--- a/ByteMe_Backup_Slides.pptx
+++ b/ByteMe_Backup_Slides.pptx
@@ -4,6 +4,9 @@
   <p:sldMasterIdLst>
     <p:sldMasterId id="2147483648" r:id="rId1"/>
   </p:sldMasterIdLst>
+  <p:notesMasterIdLst>
+    <p:notesMasterId r:id="rId14"/>
+  </p:notesMasterIdLst>
   <p:sldIdLst>
     <p:sldId id="256" r:id="rId2"/>
     <p:sldId id="257" r:id="rId3"/>
@@ -18,10 +21,7 @@
     <p:sldId id="266" r:id="rId12"/>
     <p:sldId id="267" r:id="rId13"/>
   </p:sldIdLst>
-  <p:notesMasterIdLst>
-    <p:notesMasterId r:id="rId14"/>
-  </p:notesMasterIdLst>
-  <p:sldSz cx="9144000" cy="5143500"/>
+  <p:sldSz cx="9144000" cy="5143500" type="screen16x9"/>
   <p:notesSz cx="5143500" cy="9144000"/>
   <p:defaultTextStyle>
     <a:lvl1pPr marL="0" algn="l" defTabSz="914400" rtl="0" eaLnBrk="1" latinLnBrk="0" hangingPunct="1">
@@ -115,13 +115,20 @@
       </a:defRPr>
     </a:lvl9pPr>
   </p:defaultTextStyle>
+  <p:extLst>
+    <p:ext uri="{EFAFB233-063F-42B5-8137-9DF3F51BA10A}">
+      <p15:sldGuideLst xmlns:p15="http://schemas.microsoft.com/office/powerpoint/2012/main"/>
+    </p:ext>
+  </p:extLst>
 </p:presentation>
 </file>
 
 <file path=ppt/charts/chart1.xml><?xml version="1.0" encoding="utf-8"?>
-<c:chartSpace xmlns:c="http://schemas.openxmlformats.org/drawingml/2006/chart" xmlns:a="http://schemas.openxmlformats.org/drawingml/2006/main" xmlns:r="http://schemas.openxmlformats.org/officeDocument/2006/relationships">
+<c:chartSpace xmlns:c="http://schemas.openxmlformats.org/drawingml/2006/chart" xmlns:a="http://schemas.openxmlformats.org/drawingml/2006/main" xmlns:r="http://schemas.openxmlformats.org/officeDocument/2006/relationships" xmlns:c16r2="http://schemas.microsoft.com/office/drawing/2015/06/chart">
   <c:date1904 val="0"/>
+  <c:lang val="en-US"/>
   <c:roundedCorners val="0"/>
+  <c:style val="2"/>
   <c:chart>
     <c:title>
       <c:tx>
@@ -138,7 +145,7 @@
               </a:defRPr>
             </a:pPr>
             <a:r>
-              <a:rPr sz="1200" b="0" i="0" u="none" strike="noStrike">
+              <a:rPr lang="en-US" sz="1200" b="0" i="0" u="none" strike="noStrike">
                 <a:solidFill>
                   <a:srgbClr val="0F1C30"/>
                 </a:solidFill>
@@ -149,7 +156,6 @@
           </a:p>
         </c:rich>
       </c:tx>
-      <c:layout/>
       <c:overlay val="0"/>
     </c:title>
     <c:autoTitleDeleted val="0"/>
@@ -180,40 +186,15 @@
             <a:effectLst/>
           </c:spPr>
           <c:invertIfNegative val="0"/>
-          <c:dLbls>
-            <c:numFmt formatCode="#,##0" sourceLinked="0"/>
-            <c:txPr>
-              <a:bodyPr/>
-              <a:lstStyle/>
-              <a:p>
-                <a:pPr>
-                  <a:defRPr b="0" i="0" strike="noStrike" sz="1200" u="none">
-                    <a:solidFill>
-                      <a:srgbClr val="1E293B"/>
-                    </a:solidFill>
-                    <a:latin typeface="Arial"/>
-                  </a:defRPr>
-                </a:pPr>
-              </a:p>
-            </c:txPr>
-            <c:showLegendKey val="0"/>
-            <c:showVal val="1"/>
-            <c:showCatName val="0"/>
-            <c:showSerName val="0"/>
-            <c:showPercent val="0"/>
-            <c:showBubbleSize val="0"/>
-            <c:showLeaderLines val="0"/>
-          </c:dLbls>
           <c:dPt>
             <c:idx val="0"/>
             <c:invertIfNegative val="0"/>
             <c:bubble3D val="0"/>
-            <c:spPr>
-              <a:solidFill>
-                <a:srgbClr val="64748B"/>
-              </a:solidFill>
-              <a:effectLst/>
-            </c:spPr>
+            <c:extLst>
+              <c:ext xmlns:c16="http://schemas.microsoft.com/office/drawing/2014/chart" uri="{C3380CC4-5D6E-409C-BE32-E72D297353CC}">
+                <c16:uniqueId val="{00000001-FEEE-6B49-B315-31DDC5300BB9}"/>
+              </c:ext>
+            </c:extLst>
           </c:dPt>
           <c:dPt>
             <c:idx val="1"/>
@@ -225,6 +206,11 @@
               </a:solidFill>
               <a:effectLst/>
             </c:spPr>
+            <c:extLst>
+              <c:ext xmlns:c16="http://schemas.microsoft.com/office/drawing/2014/chart" uri="{C3380CC4-5D6E-409C-BE32-E72D297353CC}">
+                <c16:uniqueId val="{00000003-FEEE-6B49-B315-31DDC5300BB9}"/>
+              </c:ext>
+            </c:extLst>
           </c:dPt>
           <c:dPt>
             <c:idx val="2"/>
@@ -236,6 +222,11 @@
               </a:solidFill>
               <a:effectLst/>
             </c:spPr>
+            <c:extLst>
+              <c:ext xmlns:c16="http://schemas.microsoft.com/office/drawing/2014/chart" uri="{C3380CC4-5D6E-409C-BE32-E72D297353CC}">
+                <c16:uniqueId val="{00000005-FEEE-6B49-B315-31DDC5300BB9}"/>
+              </c:ext>
+            </c:extLst>
           </c:dPt>
           <c:dPt>
             <c:idx val="3"/>
@@ -247,31 +238,71 @@
               </a:solidFill>
               <a:effectLst/>
             </c:spPr>
+            <c:extLst>
+              <c:ext xmlns:c16="http://schemas.microsoft.com/office/drawing/2014/chart" uri="{C3380CC4-5D6E-409C-BE32-E72D297353CC}">
+                <c16:uniqueId val="{00000007-FEEE-6B49-B315-31DDC5300BB9}"/>
+              </c:ext>
+            </c:extLst>
           </c:dPt>
+          <c:dLbls>
+            <c:numFmt formatCode="#,##0" sourceLinked="0"/>
+            <c:spPr>
+              <a:noFill/>
+              <a:ln>
+                <a:noFill/>
+              </a:ln>
+              <a:effectLst/>
+            </c:spPr>
+            <c:txPr>
+              <a:bodyPr/>
+              <a:lstStyle/>
+              <a:p>
+                <a:pPr>
+                  <a:defRPr sz="1200" b="0" i="0" u="none" strike="noStrike">
+                    <a:solidFill>
+                      <a:srgbClr val="1E293B"/>
+                    </a:solidFill>
+                    <a:latin typeface="Arial"/>
+                  </a:defRPr>
+                </a:pPr>
+                <a:endParaRPr lang="en-US"/>
+              </a:p>
+            </c:txPr>
+            <c:showLegendKey val="0"/>
+            <c:showVal val="1"/>
+            <c:showCatName val="0"/>
+            <c:showSerName val="0"/>
+            <c:showPercent val="0"/>
+            <c:showBubbleSize val="0"/>
+            <c:showLeaderLines val="0"/>
+            <c:extLst>
+              <c:ext xmlns:c15="http://schemas.microsoft.com/office/drawing/2012/chart" uri="{CE6537A1-D6FC-4f65-9D91-7224C49458BB}">
+                <c15:showLeaderLines val="0"/>
+              </c:ext>
+            </c:extLst>
+          </c:dLbls>
           <c:cat>
-            <c:multiLvlStrRef>
+            <c:strRef>
               <c:f>Sheet1!$A$2:$A$5</c:f>
-              <c:multiLvlStrCache>
+              <c:strCache>
                 <c:ptCount val="4"/>
-                <c:lvl>
-                  <c:pt idx="0">
-                    <c:v>XGBoost Baseline</c:v>
-                  </c:pt>
-                  <c:pt idx="1">
-                    <c:v>LightGBM
+                <c:pt idx="0">
+                  <c:v>XGBoost Baseline</c:v>
+                </c:pt>
+                <c:pt idx="1">
+                  <c:v>LightGBM
 (no Transfer)</c:v>
-                  </c:pt>
-                  <c:pt idx="2">
-                    <c:v>LightGBM
+                </c:pt>
+                <c:pt idx="2">
+                  <c:v>LightGBM
 (no Cultural)</c:v>
-                  </c:pt>
-                  <c:pt idx="3">
-                    <c:v>ByteMe
+                </c:pt>
+                <c:pt idx="3">
+                  <c:v>ByteMe
 Full Model</c:v>
-                  </c:pt>
-                </c:lvl>
-              </c:multiLvlStrCache>
-            </c:multiLvlStrRef>
+                </c:pt>
+              </c:strCache>
+            </c:strRef>
           </c:cat>
           <c:val>
             <c:numRef>
@@ -294,36 +325,23 @@
               </c:numCache>
             </c:numRef>
           </c:val>
+          <c:extLst>
+            <c:ext xmlns:c16="http://schemas.microsoft.com/office/drawing/2014/chart" uri="{C3380CC4-5D6E-409C-BE32-E72D297353CC}">
+              <c16:uniqueId val="{00000008-FEEE-6B49-B315-31DDC5300BB9}"/>
+            </c:ext>
+          </c:extLst>
         </c:ser>
         <c:dLbls>
-          <c:numFmt formatCode="#,##0" sourceLinked="0"/>
-          <c:txPr>
-            <a:bodyPr/>
-            <a:lstStyle/>
-            <a:p>
-              <a:pPr>
-                <a:defRPr b="0" i="0" strike="noStrike" sz="1200" u="none">
-                  <a:solidFill>
-                    <a:srgbClr val="1E293B"/>
-                  </a:solidFill>
-                  <a:latin typeface="Arial"/>
-                </a:defRPr>
-              </a:pPr>
-            </a:p>
-          </c:txPr>
           <c:showLegendKey val="0"/>
           <c:showVal val="1"/>
           <c:showCatName val="0"/>
           <c:showSerName val="0"/>
           <c:showPercent val="0"/>
           <c:showBubbleSize val="0"/>
-          <c:showLeaderLines val="0"/>
         </c:dLbls>
         <c:gapWidth val="150"/>
-        <c:overlap val="0"/>
         <c:axId val="2094734554"/>
         <c:axId val="2094734552"/>
-        <c:axId val="2094734556"/>
       </c:barChart>
       <c:catAx>
         <c:axId val="2094734554"/>
@@ -364,6 +382,7 @@
         <c:crosses val="autoZero"/>
         <c:auto val="1"/>
         <c:lblAlgn val="ctr"/>
+        <c:lblOffset val="100"/>
         <c:noMultiLvlLbl val="1"/>
       </c:catAx>
       <c:valAx>
@@ -426,6 +445,7 @@
     </c:plotArea>
     <c:plotVisOnly val="1"/>
     <c:dispBlanksAs val="span"/>
+    <c:showDLblsOverMax val="1"/>
   </c:chart>
   <c:spPr>
     <a:solidFill>
@@ -464,234 +484,10 @@
           <a:chExt cx="0" cy="0"/>
         </a:xfrm>
       </p:grpSpPr>
-      <p:sp>
-        <p:nvSpPr>
-          <p:cNvPr id="2" name="Header Placeholder 1"/>
-          <p:cNvSpPr>
-            <a:spLocks noGrp="1"/>
-          </p:cNvSpPr>
-          <p:nvPr>
-            <p:ph type="hdr" sz="quarter"/>
-          </p:nvPr>
-        </p:nvSpPr>
-        <p:spPr>
-          <a:xfrm>
-            <a:off x="0" y="0"/>
-            <a:ext cx="2971800" cy="458788"/>
-          </a:xfrm>
-          <a:prstGeom prst="rect">
-            <a:avLst/>
-          </a:prstGeom>
-        </p:spPr>
-        <p:txBody>
-          <a:bodyPr vert="horz" lIns="91440" tIns="45720" rIns="91440" bIns="45720" rtlCol="0"/>
-          <a:lstStyle>
-            <a:lvl1pPr algn="l">
-              <a:defRPr sz="1200"/>
-            </a:lvl1pPr>
-          </a:lstStyle>
-          <a:p>
-            <a:endParaRPr lang="en-US"/>
-          </a:p>
-        </p:txBody>
-      </p:sp>
-      <p:sp>
-        <p:nvSpPr>
-          <p:cNvPr id="3" name="Date Placeholder 2"/>
-          <p:cNvSpPr>
-            <a:spLocks noGrp="1"/>
-          </p:cNvSpPr>
-          <p:nvPr>
-            <p:ph type="dt" idx="1"/>
-          </p:nvPr>
-        </p:nvSpPr>
-        <p:spPr>
-          <a:xfrm>
-            <a:off x="3884613" y="0"/>
-            <a:ext cx="2971800" cy="458788"/>
-          </a:xfrm>
-          <a:prstGeom prst="rect">
-            <a:avLst/>
-          </a:prstGeom>
-        </p:spPr>
-        <p:txBody>
-          <a:bodyPr vert="horz" lIns="91440" tIns="45720" rIns="91440" bIns="45720" rtlCol="0"/>
-          <a:lstStyle>
-            <a:lvl1pPr algn="r">
-              <a:defRPr sz="1200"/>
-            </a:lvl1pPr>
-          </a:lstStyle>
-          <a:p>
-            <a:fld id="{5282F153-3F37-0F45-9E97-73ACFA13230C}" type="datetimeFigureOut">
-              <a:rPr lang="en-US"/>
-              <a:t>7/23/19</a:t>
-            </a:fld>
-            <a:endParaRPr lang="en-US"/>
-          </a:p>
-        </p:txBody>
-      </p:sp>
-      <p:sp>
-        <p:nvSpPr>
-          <p:cNvPr id="4" name="Slide Image Placeholder 3"/>
-          <p:cNvSpPr>
-            <a:spLocks noGrp="1" noRot="1" noChangeAspect="1"/>
-          </p:cNvSpPr>
-          <p:nvPr>
-            <p:ph type="sldImg" idx="2"/>
-          </p:nvPr>
-        </p:nvSpPr>
-        <p:spPr>
-          <a:xfrm>
-            <a:off x="685800" y="1143000"/>
-            <a:ext cx="5486400" cy="3086100"/>
-          </a:xfrm>
-          <a:prstGeom prst="rect">
-            <a:avLst/>
-          </a:prstGeom>
-          <a:noFill/>
-          <a:ln w="12700">
-            <a:solidFill>
-              <a:prstClr val="black"/>
-            </a:solidFill>
-          </a:ln>
-        </p:spPr>
-        <p:txBody>
-          <a:bodyPr vert="horz" lIns="91440" tIns="45720" rIns="91440" bIns="45720" rtlCol="0" anchor="ctr"/>
-          <a:lstStyle/>
-          <a:p>
-            <a:endParaRPr lang="en-US"/>
-          </a:p>
-        </p:txBody>
-      </p:sp>
-      <p:sp>
-        <p:nvSpPr>
-          <p:cNvPr id="5" name="Notes Placeholder 4"/>
-          <p:cNvSpPr>
-            <a:spLocks noGrp="1"/>
-          </p:cNvSpPr>
-          <p:nvPr>
-            <p:ph type="body" sz="quarter" idx="3"/>
-          </p:nvPr>
-        </p:nvSpPr>
-        <p:spPr>
-          <a:xfrm>
-            <a:off x="685800" y="4400550"/>
-            <a:ext cx="5486400" cy="3600450"/>
-          </a:xfrm>
-          <a:prstGeom prst="rect">
-            <a:avLst/>
-          </a:prstGeom>
-        </p:spPr>
-        <p:txBody>
-          <a:bodyPr vert="horz" lIns="91440" tIns="45720" rIns="91440" bIns="45720" rtlCol="0"/>
-          <a:lstStyle/>
-          <a:p>
-            <a:pPr lvl="0"/>
-            <a:r>
-              <a:rPr lang="en-US"/>
-              <a:t>Click to edit Master text styles</a:t>
-            </a:r>
-          </a:p>
-          <a:p>
-            <a:pPr lvl="1"/>
-            <a:r>
-              <a:rPr lang="en-US"/>
-              <a:t>Second level</a:t>
-            </a:r>
-          </a:p>
-          <a:p>
-            <a:pPr lvl="2"/>
-            <a:r>
-              <a:rPr lang="en-US"/>
-              <a:t>Third level</a:t>
-            </a:r>
-          </a:p>
-          <a:p>
-            <a:pPr lvl="3"/>
-            <a:r>
-              <a:rPr lang="en-US"/>
-              <a:t>Fourth level</a:t>
-            </a:r>
-          </a:p>
-          <a:p>
-            <a:pPr lvl="4"/>
-            <a:r>
-              <a:rPr lang="en-US"/>
-              <a:t>Fifth level</a:t>
-            </a:r>
-          </a:p>
-        </p:txBody>
-      </p:sp>
-      <p:sp>
-        <p:nvSpPr>
-          <p:cNvPr id="6" name="Footer Placeholder 5"/>
-          <p:cNvSpPr>
-            <a:spLocks noGrp="1"/>
-          </p:cNvSpPr>
-          <p:nvPr>
-            <p:ph type="ftr" sz="quarter" idx="4"/>
-          </p:nvPr>
-        </p:nvSpPr>
-        <p:spPr>
-          <a:xfrm>
-            <a:off x="0" y="8685213"/>
-            <a:ext cx="2971800" cy="458787"/>
-          </a:xfrm>
-          <a:prstGeom prst="rect">
-            <a:avLst/>
-          </a:prstGeom>
-        </p:spPr>
-        <p:txBody>
-          <a:bodyPr vert="horz" lIns="91440" tIns="45720" rIns="91440" bIns="45720" rtlCol="0" anchor="b"/>
-          <a:lstStyle>
-            <a:lvl1pPr algn="l">
-              <a:defRPr sz="1200"/>
-            </a:lvl1pPr>
-          </a:lstStyle>
-          <a:p>
-            <a:endParaRPr lang="en-US"/>
-          </a:p>
-        </p:txBody>
-      </p:sp>
-      <p:sp>
-        <p:nvSpPr>
-          <p:cNvPr id="7" name="Slide Number Placeholder 6"/>
-          <p:cNvSpPr>
-            <a:spLocks noGrp="1"/>
-          </p:cNvSpPr>
-          <p:nvPr>
-            <p:ph type="sldNum" sz="quarter" idx="5"/>
-          </p:nvPr>
-        </p:nvSpPr>
-        <p:spPr>
-          <a:xfrm>
-            <a:off x="3884613" y="8685213"/>
-            <a:ext cx="2971800" cy="458787"/>
-          </a:xfrm>
-          <a:prstGeom prst="rect">
-            <a:avLst/>
-          </a:prstGeom>
-        </p:spPr>
-        <p:txBody>
-          <a:bodyPr vert="horz" lIns="91440" tIns="45720" rIns="91440" bIns="45720" rtlCol="0" anchor="b"/>
-          <a:lstStyle>
-            <a:lvl1pPr algn="r">
-              <a:defRPr sz="1200"/>
-            </a:lvl1pPr>
-          </a:lstStyle>
-          <a:p>
-            <a:fld id="{CE5E9CC1-C706-0F49-92D6-E571CC5EEA8F}" type="slidenum">
-              <a:rPr lang="en-US"/>
-              <a:t>‹#›</a:t>
-            </a:fld>
-            <a:endParaRPr lang="en-US"/>
-          </a:p>
-        </p:txBody>
-      </p:sp>
     </p:spTree>
     <p:extLst>
       <p:ext uri="{BB962C8B-B14F-4D97-AF65-F5344CB8AC3E}">
-        <p14:creationId xmlns:p14="http://schemas.microsoft.com/office/powerpoint/2010/main" val="1024086991"/>
+        <p14:creationId xmlns:p14="http://schemas.microsoft.com/office/powerpoint/2010/main" val="2405226677"/>
       </p:ext>
     </p:extLst>
   </p:cSld>
@@ -835,10 +631,6 @@
           <a:bodyPr/>
           <a:lstStyle/>
           <a:p>
-            <a:r>
-              <a:rPr lang="en-US" dirty="0"/>
-              <a:t/>
-            </a:r>
             <a:endParaRPr lang="en-US" dirty="0"/>
           </a:p>
         </p:txBody>
@@ -923,10 +715,6 @@
           <a:bodyPr/>
           <a:lstStyle/>
           <a:p>
-            <a:r>
-              <a:rPr lang="en-US" dirty="0"/>
-              <a:t/>
-            </a:r>
             <a:endParaRPr lang="en-US" dirty="0"/>
           </a:p>
         </p:txBody>
@@ -1011,10 +799,6 @@
           <a:bodyPr/>
           <a:lstStyle/>
           <a:p>
-            <a:r>
-              <a:rPr lang="en-US" dirty="0"/>
-              <a:t/>
-            </a:r>
             <a:endParaRPr lang="en-US" dirty="0"/>
           </a:p>
         </p:txBody>
@@ -1099,10 +883,6 @@
           <a:bodyPr/>
           <a:lstStyle/>
           <a:p>
-            <a:r>
-              <a:rPr lang="en-US" dirty="0"/>
-              <a:t/>
-            </a:r>
             <a:endParaRPr lang="en-US" dirty="0"/>
           </a:p>
         </p:txBody>
@@ -1187,10 +967,6 @@
           <a:bodyPr/>
           <a:lstStyle/>
           <a:p>
-            <a:r>
-              <a:rPr lang="en-US" dirty="0"/>
-              <a:t/>
-            </a:r>
             <a:endParaRPr lang="en-US" dirty="0"/>
           </a:p>
         </p:txBody>
@@ -1275,10 +1051,6 @@
           <a:bodyPr/>
           <a:lstStyle/>
           <a:p>
-            <a:r>
-              <a:rPr lang="en-US" dirty="0"/>
-              <a:t/>
-            </a:r>
             <a:endParaRPr lang="en-US" dirty="0"/>
           </a:p>
         </p:txBody>
@@ -1363,10 +1135,6 @@
           <a:bodyPr/>
           <a:lstStyle/>
           <a:p>
-            <a:r>
-              <a:rPr lang="en-US" dirty="0"/>
-              <a:t/>
-            </a:r>
             <a:endParaRPr lang="en-US" dirty="0"/>
           </a:p>
         </p:txBody>
@@ -1451,10 +1219,6 @@
           <a:bodyPr/>
           <a:lstStyle/>
           <a:p>
-            <a:r>
-              <a:rPr lang="en-US" dirty="0"/>
-              <a:t/>
-            </a:r>
             <a:endParaRPr lang="en-US" dirty="0"/>
           </a:p>
         </p:txBody>
@@ -1539,10 +1303,6 @@
           <a:bodyPr/>
           <a:lstStyle/>
           <a:p>
-            <a:r>
-              <a:rPr lang="en-US" dirty="0"/>
-              <a:t/>
-            </a:r>
             <a:endParaRPr lang="en-US" dirty="0"/>
           </a:p>
         </p:txBody>
@@ -1627,10 +1387,6 @@
           <a:bodyPr/>
           <a:lstStyle/>
           <a:p>
-            <a:r>
-              <a:rPr lang="en-US" dirty="0"/>
-              <a:t/>
-            </a:r>
             <a:endParaRPr lang="en-US" dirty="0"/>
           </a:p>
         </p:txBody>
@@ -1715,10 +1471,6 @@
           <a:bodyPr/>
           <a:lstStyle/>
           <a:p>
-            <a:r>
-              <a:rPr lang="en-US" dirty="0"/>
-              <a:t/>
-            </a:r>
             <a:endParaRPr lang="en-US" dirty="0"/>
           </a:p>
         </p:txBody>
@@ -1803,10 +1555,6 @@
           <a:bodyPr/>
           <a:lstStyle/>
           <a:p>
-            <a:r>
-              <a:rPr lang="en-US" dirty="0"/>
-              <a:t/>
-            </a:r>
             <a:endParaRPr lang="en-US" dirty="0"/>
           </a:p>
         </p:txBody>
@@ -1880,6 +1628,11 @@
 <file path=ppt/slideMasters/slideMaster1.xml><?xml version="1.0" encoding="utf-8"?>
 <p:sldMaster xmlns:a="http://schemas.openxmlformats.org/drawingml/2006/main" xmlns:r="http://schemas.openxmlformats.org/officeDocument/2006/relationships" xmlns:p="http://schemas.openxmlformats.org/presentationml/2006/main">
   <p:cSld>
+    <p:bg>
+      <p:bgRef idx="1001">
+        <a:schemeClr val="bg1"/>
+      </p:bgRef>
+    </p:bg>
     <p:spTree>
       <p:nvGrpSpPr>
         <p:cNvPr id="1" name=""/>
@@ -2162,6 +1915,7 @@
         <a:solidFill>
           <a:srgbClr val="1B2A4A"/>
         </a:solidFill>
+        <a:effectLst/>
       </p:bgPr>
     </p:bg>
     <p:spTree>
@@ -2249,11 +2003,11 @@
           <a:bodyPr wrap="square" lIns="0" tIns="0" rIns="0" bIns="0" rtlCol="0" anchor="ctr"/>
           <a:lstStyle/>
           <a:p>
-            <a:pPr indent="0" marL="0">
-              <a:buNone/>
-            </a:pPr>
-            <a:r>
-              <a:rPr lang="en-US" sz="1200" b="1" spc="800" kern="0" dirty="0">
+            <a:pPr marL="0" indent="0">
+              <a:buNone/>
+            </a:pPr>
+            <a:r>
+              <a:rPr lang="en-US" sz="1200" b="1" kern="0" spc="800" dirty="0">
                 <a:solidFill>
                   <a:srgbClr val="C9993A"/>
                 </a:solidFill>
@@ -2285,7 +2039,7 @@
           <a:bodyPr wrap="square" lIns="0" tIns="0" rIns="0" bIns="0" rtlCol="0" anchor="ctr"/>
           <a:lstStyle/>
           <a:p>
-            <a:pPr indent="0" marL="0">
+            <a:pPr marL="0" indent="0">
               <a:buNone/>
             </a:pPr>
             <a:r>
@@ -2324,7 +2078,7 @@
           <a:bodyPr wrap="square" lIns="0" tIns="0" rIns="0" bIns="0" rtlCol="0" anchor="ctr"/>
           <a:lstStyle/>
           <a:p>
-            <a:pPr indent="0" marL="0">
+            <a:pPr marL="0" indent="0">
               <a:buNone/>
             </a:pPr>
             <a:r>
@@ -2388,7 +2142,7 @@
           <a:bodyPr wrap="square" lIns="0" tIns="0" rIns="0" bIns="0" rtlCol="0" anchor="ctr"/>
           <a:lstStyle/>
           <a:p>
-            <a:pPr indent="0" marL="0">
+            <a:pPr marL="0" indent="0">
               <a:buNone/>
             </a:pPr>
             <a:r>
@@ -2402,9 +2156,6 @@
               </a:rPr>
               <a:t>Topics covered:  </a:t>
             </a:r>
-            <a:pPr indent="0" marL="0">
-              <a:buNone/>
-            </a:pPr>
             <a:r>
               <a:rPr lang="en-US" sz="1100" dirty="0">
                 <a:solidFill>
@@ -2441,7 +2192,7 @@
           <a:bodyPr wrap="square" lIns="0" tIns="0" rIns="0" bIns="0" rtlCol="0" anchor="ctr"/>
           <a:lstStyle/>
           <a:p>
-            <a:pPr indent="0" marL="0">
+            <a:pPr marL="0" indent="0">
               <a:buNone/>
             </a:pPr>
             <a:r>
@@ -2475,6 +2226,7 @@
         <a:solidFill>
           <a:srgbClr val="1B2A4A"/>
         </a:solidFill>
+        <a:effectLst/>
       </p:bgPr>
     </p:bg>
     <p:spTree>
@@ -2537,11 +2289,11 @@
           <a:bodyPr wrap="square" lIns="0" tIns="0" rIns="0" bIns="0" rtlCol="0" anchor="ctr"/>
           <a:lstStyle/>
           <a:p>
-            <a:pPr indent="0" marL="0">
-              <a:buNone/>
-            </a:pPr>
-            <a:r>
-              <a:rPr lang="en-US" sz="800" b="1" spc="300" kern="0" dirty="0">
+            <a:pPr marL="0" indent="0">
+              <a:buNone/>
+            </a:pPr>
+            <a:r>
+              <a:rPr lang="en-US" sz="800" b="1" kern="0" spc="300" dirty="0">
                 <a:solidFill>
                   <a:srgbClr val="C9993A"/>
                 </a:solidFill>
@@ -2573,7 +2325,7 @@
           <a:bodyPr wrap="square" lIns="0" tIns="0" rIns="0" bIns="0" rtlCol="0" anchor="ctr"/>
           <a:lstStyle/>
           <a:p>
-            <a:pPr indent="0" marL="0">
+            <a:pPr marL="0" indent="0">
               <a:buNone/>
             </a:pPr>
             <a:r>
@@ -2612,7 +2364,7 @@
           <a:bodyPr wrap="square" lIns="0" tIns="0" rIns="0" bIns="0" rtlCol="0" anchor="ctr"/>
           <a:lstStyle/>
           <a:p>
-            <a:pPr indent="0" marL="0">
+            <a:pPr marL="0" indent="0">
               <a:buNone/>
             </a:pPr>
             <a:r>
@@ -2676,11 +2428,11 @@
           <a:bodyPr wrap="square" lIns="0" tIns="0" rIns="0" bIns="0" rtlCol="0" anchor="ctr"/>
           <a:lstStyle/>
           <a:p>
-            <a:pPr indent="0" marL="0">
-              <a:buNone/>
-            </a:pPr>
-            <a:r>
-              <a:rPr lang="en-US" sz="900" b="1" spc="300" kern="0" dirty="0">
+            <a:pPr marL="0" indent="0">
+              <a:buNone/>
+            </a:pPr>
+            <a:r>
+              <a:rPr lang="en-US" sz="900" b="1" kern="0" spc="300" dirty="0">
                 <a:solidFill>
                   <a:srgbClr val="C9993A"/>
                 </a:solidFill>
@@ -2712,7 +2464,7 @@
           <a:bodyPr wrap="square" lIns="0" tIns="0" rIns="0" bIns="0" rtlCol="0" anchor="ctr"/>
           <a:lstStyle/>
           <a:p>
-            <a:pPr indent="0" marL="0">
+            <a:pPr marL="0" indent="0">
               <a:buNone/>
             </a:pPr>
             <a:r>
@@ -2751,7 +2503,7 @@
           <a:bodyPr wrap="square" lIns="0" tIns="0" rIns="0" bIns="0" rtlCol="0" anchor="ctr"/>
           <a:lstStyle/>
           <a:p>
-            <a:pPr indent="0" marL="0">
+            <a:pPr marL="0" indent="0">
               <a:buNone/>
             </a:pPr>
             <a:r>
@@ -2787,7 +2539,7 @@
           <a:bodyPr wrap="square" lIns="0" tIns="0" rIns="0" bIns="0" rtlCol="0" anchor="ctr"/>
           <a:lstStyle/>
           <a:p>
-            <a:pPr indent="0" marL="0">
+            <a:pPr marL="0" indent="0">
               <a:buNone/>
             </a:pPr>
             <a:r>
@@ -2798,9 +2550,6 @@
               </a:rPr>
               <a:t>Cultural adj: </a:t>
             </a:r>
-            <a:pPr indent="0" marL="0">
-              <a:buNone/>
-            </a:pPr>
             <a:r>
               <a:rPr lang="en-US" sz="1000" b="1" dirty="0">
                 <a:solidFill>
@@ -2809,9 +2558,6 @@
               </a:rPr>
               <a:t>+15%  </a:t>
             </a:r>
-            <a:pPr indent="0" marL="0">
-              <a:buNone/>
-            </a:pPr>
             <a:r>
               <a:rPr lang="en-US" sz="1000" dirty="0">
                 <a:solidFill>
@@ -2820,9 +2566,6 @@
               </a:rPr>
               <a:t>  Sentiment: </a:t>
             </a:r>
-            <a:pPr indent="0" marL="0">
-              <a:buNone/>
-            </a:pPr>
             <a:r>
               <a:rPr lang="en-US" sz="1000" b="1" dirty="0">
                 <a:solidFill>
@@ -2856,7 +2599,7 @@
           <a:bodyPr wrap="square" lIns="0" tIns="0" rIns="0" bIns="0" rtlCol="0" anchor="ctr"/>
           <a:lstStyle/>
           <a:p>
-            <a:pPr indent="0" marL="0">
+            <a:pPr marL="0" indent="0">
               <a:buNone/>
             </a:pPr>
             <a:r>
@@ -2873,7 +2616,7 @@
             <a:endParaRPr lang="en-US" sz="950" dirty="0"/>
           </a:p>
           <a:p>
-            <a:pPr indent="0" marL="0">
+            <a:pPr marL="0" indent="0">
               <a:buNone/>
             </a:pPr>
             <a:r>
@@ -2937,11 +2680,11 @@
           <a:bodyPr wrap="square" lIns="0" tIns="0" rIns="0" bIns="0" rtlCol="0" anchor="ctr"/>
           <a:lstStyle/>
           <a:p>
-            <a:pPr indent="0" marL="0">
-              <a:buNone/>
-            </a:pPr>
-            <a:r>
-              <a:rPr lang="en-US" sz="900" b="1" spc="300" kern="0" dirty="0">
+            <a:pPr marL="0" indent="0">
+              <a:buNone/>
+            </a:pPr>
+            <a:r>
+              <a:rPr lang="en-US" sz="900" b="1" kern="0" spc="300" dirty="0">
                 <a:solidFill>
                   <a:srgbClr val="22C55E"/>
                 </a:solidFill>
@@ -2973,7 +2716,7 @@
           <a:bodyPr wrap="square" lIns="0" tIns="0" rIns="0" bIns="0" rtlCol="0" anchor="ctr"/>
           <a:lstStyle/>
           <a:p>
-            <a:pPr indent="0" marL="0">
+            <a:pPr marL="0" indent="0">
               <a:buNone/>
             </a:pPr>
             <a:r>
@@ -3012,7 +2755,7 @@
           <a:bodyPr wrap="square" lIns="0" tIns="0" rIns="0" bIns="0" rtlCol="0" anchor="ctr"/>
           <a:lstStyle/>
           <a:p>
-            <a:pPr indent="0" marL="0">
+            <a:pPr marL="0" indent="0">
               <a:buNone/>
             </a:pPr>
             <a:r>
@@ -3048,7 +2791,7 @@
           <a:bodyPr wrap="square" lIns="0" tIns="0" rIns="0" bIns="0" rtlCol="0" anchor="ctr"/>
           <a:lstStyle/>
           <a:p>
-            <a:pPr indent="0" marL="0">
+            <a:pPr marL="0" indent="0">
               <a:buNone/>
             </a:pPr>
             <a:r>
@@ -3059,9 +2802,6 @@
               </a:rPr>
               <a:t>ByteMe prediction: </a:t>
             </a:r>
-            <a:pPr indent="0" marL="0">
-              <a:buNone/>
-            </a:pPr>
             <a:r>
               <a:rPr lang="en-US" sz="1000" b="1" dirty="0">
                 <a:solidFill>
@@ -3095,7 +2835,7 @@
           <a:bodyPr wrap="square" lIns="0" tIns="0" rIns="0" bIns="0" rtlCol="0" anchor="ctr"/>
           <a:lstStyle/>
           <a:p>
-            <a:pPr indent="0" marL="0">
+            <a:pPr marL="0" indent="0">
               <a:buNone/>
             </a:pPr>
             <a:r>
@@ -3112,7 +2852,7 @@
             <a:endParaRPr lang="en-US" sz="950" dirty="0"/>
           </a:p>
           <a:p>
-            <a:pPr indent="0" marL="0">
+            <a:pPr marL="0" indent="0">
               <a:buNone/>
             </a:pPr>
             <a:r>
@@ -3176,7 +2916,7 @@
           <a:bodyPr wrap="square" lIns="0" tIns="0" rIns="0" bIns="0" rtlCol="0" anchor="ctr"/>
           <a:lstStyle/>
           <a:p>
-            <a:pPr indent="0" marL="0">
+            <a:pPr marL="0" indent="0">
               <a:buNone/>
             </a:pPr>
             <a:r>
@@ -3212,7 +2952,7 @@
           <a:bodyPr wrap="square" lIns="0" tIns="0" rIns="0" bIns="0" rtlCol="0" anchor="ctr"/>
           <a:lstStyle/>
           <a:p>
-            <a:pPr indent="0" marL="0">
+            <a:pPr marL="0" indent="0">
               <a:buNone/>
             </a:pPr>
             <a:r>
@@ -3246,6 +2986,7 @@
         <a:solidFill>
           <a:srgbClr val="F5F6FA"/>
         </a:solidFill>
+        <a:effectLst/>
       </p:bgPr>
     </p:bg>
     <p:spTree>
@@ -3308,11 +3049,11 @@
           <a:bodyPr wrap="square" lIns="0" tIns="0" rIns="0" bIns="0" rtlCol="0" anchor="ctr"/>
           <a:lstStyle/>
           <a:p>
-            <a:pPr indent="0" marL="0">
-              <a:buNone/>
-            </a:pPr>
-            <a:r>
-              <a:rPr lang="en-US" sz="800" b="1" spc="300" kern="0" dirty="0">
+            <a:pPr marL="0" indent="0">
+              <a:buNone/>
+            </a:pPr>
+            <a:r>
+              <a:rPr lang="en-US" sz="800" b="1" kern="0" spc="300" dirty="0">
                 <a:solidFill>
                   <a:srgbClr val="C9993A"/>
                 </a:solidFill>
@@ -3344,7 +3085,7 @@
           <a:bodyPr wrap="square" lIns="0" tIns="0" rIns="0" bIns="0" rtlCol="0" anchor="ctr"/>
           <a:lstStyle/>
           <a:p>
-            <a:pPr indent="0" marL="0">
+            <a:pPr marL="0" indent="0">
               <a:buNone/>
             </a:pPr>
             <a:r>
@@ -3408,7 +3149,7 @@
           <a:bodyPr wrap="square" lIns="0" tIns="0" rIns="0" bIns="0" rtlCol="0" anchor="ctr"/>
           <a:lstStyle/>
           <a:p>
-            <a:pPr indent="0" marL="0">
+            <a:pPr marL="0" indent="0">
               <a:buNone/>
             </a:pPr>
             <a:r>
@@ -3450,7 +3191,7 @@
             <a:prstDash val="solid"/>
           </a:ln>
           <a:effectLst>
-            <a:outerShdw sx="100000" sy="100000" kx="0" ky="0" algn="bl" rotWithShape="0" blurRad="101600" dist="38100" dir="8100000">
+            <a:outerShdw blurRad="101600" dist="38100" dir="8100000" algn="bl" rotWithShape="0">
               <a:srgbClr val="000000">
                 <a:alpha val="12000"/>
               </a:srgbClr>
@@ -3504,7 +3245,7 @@
           <a:bodyPr wrap="square" lIns="0" tIns="0" rIns="0" bIns="0" rtlCol="0" anchor="ctr"/>
           <a:lstStyle/>
           <a:p>
-            <a:pPr indent="0" marL="0">
+            <a:pPr marL="0" indent="0">
               <a:buNone/>
             </a:pPr>
             <a:r>
@@ -3565,7 +3306,7 @@
           <a:bodyPr wrap="square" lIns="0" tIns="0" rIns="0" bIns="0" rtlCol="0" anchor="ctr"/>
           <a:lstStyle/>
           <a:p>
-            <a:pPr indent="0" marL="0">
+            <a:pPr marL="0" indent="0">
               <a:buNone/>
             </a:pPr>
             <a:r>
@@ -3601,7 +3342,7 @@
           <a:bodyPr wrap="square" lIns="0" tIns="0" rIns="0" bIns="0" rtlCol="0" anchor="ctr"/>
           <a:lstStyle/>
           <a:p>
-            <a:pPr indent="0" marL="0">
+            <a:pPr marL="0" indent="0">
               <a:buNone/>
             </a:pPr>
             <a:r>
@@ -3662,7 +3403,7 @@
           <a:bodyPr wrap="square" lIns="0" tIns="0" rIns="0" bIns="0" rtlCol="0" anchor="ctr"/>
           <a:lstStyle/>
           <a:p>
-            <a:pPr indent="0" marL="0">
+            <a:pPr marL="0" indent="0">
               <a:buNone/>
             </a:pPr>
             <a:r>
@@ -3698,7 +3439,7 @@
           <a:bodyPr wrap="square" lIns="0" tIns="0" rIns="0" bIns="0" rtlCol="0" anchor="ctr"/>
           <a:lstStyle/>
           <a:p>
-            <a:pPr indent="0" marL="0">
+            <a:pPr marL="0" indent="0">
               <a:buNone/>
             </a:pPr>
             <a:r>
@@ -3759,7 +3500,7 @@
           <a:bodyPr wrap="square" lIns="0" tIns="0" rIns="0" bIns="0" rtlCol="0" anchor="ctr"/>
           <a:lstStyle/>
           <a:p>
-            <a:pPr indent="0" marL="0">
+            <a:pPr marL="0" indent="0">
               <a:buNone/>
             </a:pPr>
             <a:r>
@@ -3795,7 +3536,7 @@
           <a:bodyPr wrap="square" lIns="0" tIns="0" rIns="0" bIns="0" rtlCol="0" anchor="ctr"/>
           <a:lstStyle/>
           <a:p>
-            <a:pPr indent="0" marL="0">
+            <a:pPr marL="0" indent="0">
               <a:buNone/>
             </a:pPr>
             <a:r>
@@ -3856,7 +3597,7 @@
           <a:bodyPr wrap="square" lIns="0" tIns="0" rIns="0" bIns="0" rtlCol="0" anchor="ctr"/>
           <a:lstStyle/>
           <a:p>
-            <a:pPr indent="0" marL="0">
+            <a:pPr marL="0" indent="0">
               <a:buNone/>
             </a:pPr>
             <a:r>
@@ -3892,7 +3633,7 @@
           <a:bodyPr wrap="square" lIns="0" tIns="0" rIns="0" bIns="0" rtlCol="0" anchor="ctr"/>
           <a:lstStyle/>
           <a:p>
-            <a:pPr indent="0" marL="0">
+            <a:pPr marL="0" indent="0">
               <a:buNone/>
             </a:pPr>
             <a:r>
@@ -3953,7 +3694,7 @@
           <a:bodyPr wrap="square" lIns="0" tIns="0" rIns="0" bIns="0" rtlCol="0" anchor="ctr"/>
           <a:lstStyle/>
           <a:p>
-            <a:pPr indent="0" marL="0">
+            <a:pPr marL="0" indent="0">
               <a:buNone/>
             </a:pPr>
             <a:r>
@@ -3989,7 +3730,7 @@
           <a:bodyPr wrap="square" lIns="0" tIns="0" rIns="0" bIns="0" rtlCol="0" anchor="ctr"/>
           <a:lstStyle/>
           <a:p>
-            <a:pPr indent="0" marL="0">
+            <a:pPr marL="0" indent="0">
               <a:buNone/>
             </a:pPr>
             <a:r>
@@ -4050,7 +3791,7 @@
           <a:bodyPr wrap="square" lIns="0" tIns="0" rIns="0" bIns="0" rtlCol="0" anchor="ctr"/>
           <a:lstStyle/>
           <a:p>
-            <a:pPr indent="0" marL="0">
+            <a:pPr marL="0" indent="0">
               <a:buNone/>
             </a:pPr>
             <a:r>
@@ -4086,7 +3827,7 @@
           <a:bodyPr wrap="square" lIns="0" tIns="0" rIns="0" bIns="0" rtlCol="0" anchor="ctr"/>
           <a:lstStyle/>
           <a:p>
-            <a:pPr indent="0" marL="0">
+            <a:pPr marL="0" indent="0">
               <a:buNone/>
             </a:pPr>
             <a:r>
@@ -4147,7 +3888,7 @@
           <a:bodyPr wrap="square" lIns="0" tIns="0" rIns="0" bIns="0" rtlCol="0" anchor="ctr"/>
           <a:lstStyle/>
           <a:p>
-            <a:pPr indent="0" marL="0">
+            <a:pPr marL="0" indent="0">
               <a:buNone/>
             </a:pPr>
             <a:r>
@@ -4183,7 +3924,7 @@
           <a:bodyPr wrap="square" lIns="0" tIns="0" rIns="0" bIns="0" rtlCol="0" anchor="ctr"/>
           <a:lstStyle/>
           <a:p>
-            <a:pPr indent="0" marL="0">
+            <a:pPr marL="0" indent="0">
               <a:buNone/>
             </a:pPr>
             <a:r>
@@ -4244,7 +3985,7 @@
           <a:bodyPr wrap="square" lIns="0" tIns="0" rIns="0" bIns="0" rtlCol="0" anchor="ctr"/>
           <a:lstStyle/>
           <a:p>
-            <a:pPr indent="0" marL="0">
+            <a:pPr marL="0" indent="0">
               <a:buNone/>
             </a:pPr>
             <a:r>
@@ -4280,7 +4021,7 @@
           <a:bodyPr wrap="square" lIns="0" tIns="0" rIns="0" bIns="0" rtlCol="0" anchor="ctr"/>
           <a:lstStyle/>
           <a:p>
-            <a:pPr indent="0" marL="0">
+            <a:pPr marL="0" indent="0">
               <a:buNone/>
             </a:pPr>
             <a:r>
@@ -4319,7 +4060,7 @@
             <a:prstDash val="solid"/>
           </a:ln>
           <a:effectLst>
-            <a:outerShdw sx="100000" sy="100000" kx="0" ky="0" algn="bl" rotWithShape="0" blurRad="101600" dist="38100" dir="8100000">
+            <a:outerShdw blurRad="101600" dist="38100" dir="8100000" algn="bl" rotWithShape="0">
               <a:srgbClr val="000000">
                 <a:alpha val="12000"/>
               </a:srgbClr>
@@ -4373,7 +4114,7 @@
           <a:bodyPr wrap="square" lIns="0" tIns="0" rIns="0" bIns="0" rtlCol="0" anchor="ctr"/>
           <a:lstStyle/>
           <a:p>
-            <a:pPr indent="0" marL="0">
+            <a:pPr marL="0" indent="0">
               <a:buNone/>
             </a:pPr>
             <a:r>
@@ -4434,7 +4175,7 @@
           <a:bodyPr wrap="square" lIns="0" tIns="0" rIns="0" bIns="0" rtlCol="0" anchor="ctr"/>
           <a:lstStyle/>
           <a:p>
-            <a:pPr indent="0" marL="0">
+            <a:pPr marL="0" indent="0">
               <a:buNone/>
             </a:pPr>
             <a:r>
@@ -4470,7 +4211,7 @@
           <a:bodyPr wrap="square" lIns="0" tIns="0" rIns="0" bIns="0" rtlCol="0" anchor="ctr"/>
           <a:lstStyle/>
           <a:p>
-            <a:pPr indent="0" marL="0">
+            <a:pPr marL="0" indent="0">
               <a:buNone/>
             </a:pPr>
             <a:r>
@@ -4531,7 +4272,7 @@
           <a:bodyPr wrap="square" lIns="0" tIns="0" rIns="0" bIns="0" rtlCol="0" anchor="ctr"/>
           <a:lstStyle/>
           <a:p>
-            <a:pPr indent="0" marL="0">
+            <a:pPr marL="0" indent="0">
               <a:buNone/>
             </a:pPr>
             <a:r>
@@ -4567,7 +4308,7 @@
           <a:bodyPr wrap="square" lIns="0" tIns="0" rIns="0" bIns="0" rtlCol="0" anchor="ctr"/>
           <a:lstStyle/>
           <a:p>
-            <a:pPr indent="0" marL="0">
+            <a:pPr marL="0" indent="0">
               <a:buNone/>
             </a:pPr>
             <a:r>
@@ -4628,7 +4369,7 @@
           <a:bodyPr wrap="square" lIns="0" tIns="0" rIns="0" bIns="0" rtlCol="0" anchor="ctr"/>
           <a:lstStyle/>
           <a:p>
-            <a:pPr indent="0" marL="0">
+            <a:pPr marL="0" indent="0">
               <a:buNone/>
             </a:pPr>
             <a:r>
@@ -4664,7 +4405,7 @@
           <a:bodyPr wrap="square" lIns="0" tIns="0" rIns="0" bIns="0" rtlCol="0" anchor="ctr"/>
           <a:lstStyle/>
           <a:p>
-            <a:pPr indent="0" marL="0">
+            <a:pPr marL="0" indent="0">
               <a:buNone/>
             </a:pPr>
             <a:r>
@@ -4725,7 +4466,7 @@
           <a:bodyPr wrap="square" lIns="0" tIns="0" rIns="0" bIns="0" rtlCol="0" anchor="ctr"/>
           <a:lstStyle/>
           <a:p>
-            <a:pPr indent="0" marL="0">
+            <a:pPr marL="0" indent="0">
               <a:buNone/>
             </a:pPr>
             <a:r>
@@ -4761,7 +4502,7 @@
           <a:bodyPr wrap="square" lIns="0" tIns="0" rIns="0" bIns="0" rtlCol="0" anchor="ctr"/>
           <a:lstStyle/>
           <a:p>
-            <a:pPr indent="0" marL="0">
+            <a:pPr marL="0" indent="0">
               <a:buNone/>
             </a:pPr>
             <a:r>
@@ -4822,7 +4563,7 @@
           <a:bodyPr wrap="square" lIns="0" tIns="0" rIns="0" bIns="0" rtlCol="0" anchor="ctr"/>
           <a:lstStyle/>
           <a:p>
-            <a:pPr indent="0" marL="0">
+            <a:pPr marL="0" indent="0">
               <a:buNone/>
             </a:pPr>
             <a:r>
@@ -4858,7 +4599,7 @@
           <a:bodyPr wrap="square" lIns="0" tIns="0" rIns="0" bIns="0" rtlCol="0" anchor="ctr"/>
           <a:lstStyle/>
           <a:p>
-            <a:pPr indent="0" marL="0">
+            <a:pPr marL="0" indent="0">
               <a:buNone/>
             </a:pPr>
             <a:r>
@@ -4919,7 +4660,7 @@
           <a:bodyPr wrap="square" lIns="0" tIns="0" rIns="0" bIns="0" rtlCol="0" anchor="ctr"/>
           <a:lstStyle/>
           <a:p>
-            <a:pPr indent="0" marL="0">
+            <a:pPr marL="0" indent="0">
               <a:buNone/>
             </a:pPr>
             <a:r>
@@ -4955,7 +4696,7 @@
           <a:bodyPr wrap="square" lIns="0" tIns="0" rIns="0" bIns="0" rtlCol="0" anchor="ctr"/>
           <a:lstStyle/>
           <a:p>
-            <a:pPr indent="0" marL="0">
+            <a:pPr marL="0" indent="0">
               <a:buNone/>
             </a:pPr>
             <a:r>
@@ -5016,7 +4757,7 @@
           <a:bodyPr wrap="square" lIns="0" tIns="0" rIns="0" bIns="0" rtlCol="0" anchor="ctr"/>
           <a:lstStyle/>
           <a:p>
-            <a:pPr indent="0" marL="0">
+            <a:pPr marL="0" indent="0">
               <a:buNone/>
             </a:pPr>
             <a:r>
@@ -5052,7 +4793,7 @@
           <a:bodyPr wrap="square" lIns="0" tIns="0" rIns="0" bIns="0" rtlCol="0" anchor="ctr"/>
           <a:lstStyle/>
           <a:p>
-            <a:pPr indent="0" marL="0">
+            <a:pPr marL="0" indent="0">
               <a:buNone/>
             </a:pPr>
             <a:r>
@@ -5113,7 +4854,7 @@
           <a:bodyPr wrap="square" lIns="0" tIns="0" rIns="0" bIns="0" rtlCol="0" anchor="ctr"/>
           <a:lstStyle/>
           <a:p>
-            <a:pPr indent="0" marL="0">
+            <a:pPr marL="0" indent="0">
               <a:buNone/>
             </a:pPr>
             <a:r>
@@ -5149,7 +4890,7 @@
           <a:bodyPr wrap="square" lIns="0" tIns="0" rIns="0" bIns="0" rtlCol="0" anchor="ctr"/>
           <a:lstStyle/>
           <a:p>
-            <a:pPr indent="0" marL="0">
+            <a:pPr marL="0" indent="0">
               <a:buNone/>
             </a:pPr>
             <a:r>
@@ -5180,6 +4921,7 @@
         <a:solidFill>
           <a:srgbClr val="1B2A4A"/>
         </a:solidFill>
+        <a:effectLst/>
       </p:bgPr>
     </p:bg>
     <p:spTree>
@@ -5242,11 +4984,11 @@
           <a:bodyPr wrap="square" lIns="0" tIns="0" rIns="0" bIns="0" rtlCol="0" anchor="ctr"/>
           <a:lstStyle/>
           <a:p>
-            <a:pPr indent="0" marL="0">
-              <a:buNone/>
-            </a:pPr>
-            <a:r>
-              <a:rPr lang="en-US" sz="800" b="1" spc="300" kern="0" dirty="0">
+            <a:pPr marL="0" indent="0">
+              <a:buNone/>
+            </a:pPr>
+            <a:r>
+              <a:rPr lang="en-US" sz="800" b="1" kern="0" spc="300" dirty="0">
                 <a:solidFill>
                   <a:srgbClr val="C9993A"/>
                 </a:solidFill>
@@ -5278,7 +5020,7 @@
           <a:bodyPr wrap="square" lIns="0" tIns="0" rIns="0" bIns="0" rtlCol="0" anchor="ctr"/>
           <a:lstStyle/>
           <a:p>
-            <a:pPr indent="0" marL="0">
+            <a:pPr marL="0" indent="0">
               <a:buNone/>
             </a:pPr>
             <a:r>
@@ -5320,7 +5062,7 @@
             <a:prstDash val="solid"/>
           </a:ln>
           <a:effectLst>
-            <a:outerShdw sx="100000" sy="100000" kx="0" ky="0" algn="bl" rotWithShape="0" blurRad="101600" dist="38100" dir="8100000">
+            <a:outerShdw blurRad="101600" dist="38100" dir="8100000" algn="bl" rotWithShape="0">
               <a:srgbClr val="000000">
                 <a:alpha val="12000"/>
               </a:srgbClr>
@@ -5349,7 +5091,7 @@
           <a:bodyPr wrap="square" lIns="0" tIns="0" rIns="0" bIns="0" rtlCol="0" anchor="ctr"/>
           <a:lstStyle/>
           <a:p>
-            <a:pPr algn="ctr" indent="0" marL="0">
+            <a:pPr marL="0" indent="0" algn="ctr">
               <a:buNone/>
             </a:pPr>
             <a:r>
@@ -5388,7 +5130,7 @@
           <a:bodyPr wrap="square" lIns="0" tIns="0" rIns="0" bIns="0" rtlCol="0" anchor="ctr"/>
           <a:lstStyle/>
           <a:p>
-            <a:pPr algn="ctr" indent="0" marL="0">
+            <a:pPr marL="0" indent="0" algn="ctr">
               <a:buNone/>
             </a:pPr>
             <a:r>
@@ -5405,7 +5147,7 @@
             <a:endParaRPr lang="en-US" sz="1000" dirty="0"/>
           </a:p>
           <a:p>
-            <a:pPr algn="ctr" indent="0" marL="0">
+            <a:pPr marL="0" indent="0" algn="ctr">
               <a:buNone/>
             </a:pPr>
             <a:r>
@@ -5447,7 +5189,7 @@
             <a:prstDash val="solid"/>
           </a:ln>
           <a:effectLst>
-            <a:outerShdw sx="100000" sy="100000" kx="0" ky="0" algn="bl" rotWithShape="0" blurRad="101600" dist="38100" dir="8100000">
+            <a:outerShdw blurRad="101600" dist="38100" dir="8100000" algn="bl" rotWithShape="0">
               <a:srgbClr val="000000">
                 <a:alpha val="12000"/>
               </a:srgbClr>
@@ -5476,7 +5218,7 @@
           <a:bodyPr wrap="square" lIns="0" tIns="0" rIns="0" bIns="0" rtlCol="0" anchor="ctr"/>
           <a:lstStyle/>
           <a:p>
-            <a:pPr algn="ctr" indent="0" marL="0">
+            <a:pPr marL="0" indent="0" algn="ctr">
               <a:buNone/>
             </a:pPr>
             <a:r>
@@ -5515,7 +5257,7 @@
           <a:bodyPr wrap="square" lIns="0" tIns="0" rIns="0" bIns="0" rtlCol="0" anchor="ctr"/>
           <a:lstStyle/>
           <a:p>
-            <a:pPr algn="ctr" indent="0" marL="0">
+            <a:pPr marL="0" indent="0" algn="ctr">
               <a:buNone/>
             </a:pPr>
             <a:r>
@@ -5532,7 +5274,7 @@
             <a:endParaRPr lang="en-US" sz="1000" dirty="0"/>
           </a:p>
           <a:p>
-            <a:pPr algn="ctr" indent="0" marL="0">
+            <a:pPr marL="0" indent="0" algn="ctr">
               <a:buNone/>
             </a:pPr>
             <a:r>
@@ -5574,7 +5316,7 @@
             <a:prstDash val="solid"/>
           </a:ln>
           <a:effectLst>
-            <a:outerShdw sx="100000" sy="100000" kx="0" ky="0" algn="bl" rotWithShape="0" blurRad="101600" dist="38100" dir="8100000">
+            <a:outerShdw blurRad="101600" dist="38100" dir="8100000" algn="bl" rotWithShape="0">
               <a:srgbClr val="000000">
                 <a:alpha val="12000"/>
               </a:srgbClr>
@@ -5603,7 +5345,7 @@
           <a:bodyPr wrap="square" lIns="0" tIns="0" rIns="0" bIns="0" rtlCol="0" anchor="ctr"/>
           <a:lstStyle/>
           <a:p>
-            <a:pPr algn="ctr" indent="0" marL="0">
+            <a:pPr marL="0" indent="0" algn="ctr">
               <a:buNone/>
             </a:pPr>
             <a:r>
@@ -5642,7 +5384,7 @@
           <a:bodyPr wrap="square" lIns="0" tIns="0" rIns="0" bIns="0" rtlCol="0" anchor="ctr"/>
           <a:lstStyle/>
           <a:p>
-            <a:pPr algn="ctr" indent="0" marL="0">
+            <a:pPr marL="0" indent="0" algn="ctr">
               <a:buNone/>
             </a:pPr>
             <a:r>
@@ -5659,7 +5401,7 @@
             <a:endParaRPr lang="en-US" sz="1000" dirty="0"/>
           </a:p>
           <a:p>
-            <a:pPr algn="ctr" indent="0" marL="0">
+            <a:pPr marL="0" indent="0" algn="ctr">
               <a:buNone/>
             </a:pPr>
             <a:r>
@@ -5701,7 +5443,7 @@
             <a:prstDash val="solid"/>
           </a:ln>
           <a:effectLst>
-            <a:outerShdw sx="100000" sy="100000" kx="0" ky="0" algn="bl" rotWithShape="0" blurRad="101600" dist="38100" dir="8100000">
+            <a:outerShdw blurRad="101600" dist="38100" dir="8100000" algn="bl" rotWithShape="0">
               <a:srgbClr val="000000">
                 <a:alpha val="12000"/>
               </a:srgbClr>
@@ -5730,7 +5472,7 @@
           <a:bodyPr wrap="square" lIns="0" tIns="0" rIns="0" bIns="0" rtlCol="0" anchor="ctr"/>
           <a:lstStyle/>
           <a:p>
-            <a:pPr algn="ctr" indent="0" marL="0">
+            <a:pPr marL="0" indent="0" algn="ctr">
               <a:buNone/>
             </a:pPr>
             <a:r>
@@ -5769,7 +5511,7 @@
           <a:bodyPr wrap="square" lIns="0" tIns="0" rIns="0" bIns="0" rtlCol="0" anchor="ctr"/>
           <a:lstStyle/>
           <a:p>
-            <a:pPr algn="ctr" indent="0" marL="0">
+            <a:pPr marL="0" indent="0" algn="ctr">
               <a:buNone/>
             </a:pPr>
             <a:r>
@@ -5786,7 +5528,7 @@
             <a:endParaRPr lang="en-US" sz="1000" dirty="0"/>
           </a:p>
           <a:p>
-            <a:pPr algn="ctr" indent="0" marL="0">
+            <a:pPr marL="0" indent="0" algn="ctr">
               <a:buNone/>
             </a:pPr>
             <a:r>
@@ -5825,7 +5567,7 @@
           <a:bodyPr wrap="square" lIns="0" tIns="0" rIns="0" bIns="0" rtlCol="0" anchor="ctr"/>
           <a:lstStyle/>
           <a:p>
-            <a:pPr indent="0" marL="0">
+            <a:pPr marL="0" indent="0">
               <a:buNone/>
             </a:pPr>
             <a:r>
@@ -5845,7 +5587,7 @@
       </p:sp>
       <p:graphicFrame>
         <p:nvGraphicFramePr>
-          <p:cNvPr id="13" name="Table 0"/>
+          <p:cNvPr id="18" name="Table 0"/>
           <p:cNvGraphicFramePr>
             <a:graphicFrameLocks noGrp="1"/>
           </p:cNvGraphicFramePr>
@@ -5859,17 +5601,41 @@
         </p:nvGraphicFramePr>
         <p:xfrm>
           <a:off x="274320" y="2798064"/>
-          <a:ext cx="8595360" cy="2084832"/>
+          <a:ext cx="8595360" cy="2176272"/>
         </p:xfrm>
         <a:graphic>
           <a:graphicData uri="http://schemas.openxmlformats.org/drawingml/2006/table">
             <a:tbl>
               <a:tblPr/>
               <a:tblGrid>
-                <a:gridCol w="2377440"/>
-                <a:gridCol w="1280160"/>
-                <a:gridCol w="1645920"/>
-                <a:gridCol w="3291840"/>
+                <a:gridCol w="2377440">
+                  <a:extLst>
+                    <a:ext uri="{9D8B030D-6E8A-4147-A177-3AD203B41FA5}">
+                      <a16:colId xmlns:a16="http://schemas.microsoft.com/office/drawing/2014/main" val="20000"/>
+                    </a:ext>
+                  </a:extLst>
+                </a:gridCol>
+                <a:gridCol w="1280160">
+                  <a:extLst>
+                    <a:ext uri="{9D8B030D-6E8A-4147-A177-3AD203B41FA5}">
+                      <a16:colId xmlns:a16="http://schemas.microsoft.com/office/drawing/2014/main" val="20001"/>
+                    </a:ext>
+                  </a:extLst>
+                </a:gridCol>
+                <a:gridCol w="1645920">
+                  <a:extLst>
+                    <a:ext uri="{9D8B030D-6E8A-4147-A177-3AD203B41FA5}">
+                      <a16:colId xmlns:a16="http://schemas.microsoft.com/office/drawing/2014/main" val="20002"/>
+                    </a:ext>
+                  </a:extLst>
+                </a:gridCol>
+                <a:gridCol w="3291840">
+                  <a:extLst>
+                    <a:ext uri="{9D8B030D-6E8A-4147-A177-3AD203B41FA5}">
+                      <a16:colId xmlns:a16="http://schemas.microsoft.com/office/drawing/2014/main" val="20003"/>
+                    </a:ext>
+                  </a:extLst>
+                </a:gridCol>
               </a:tblGrid>
               <a:tr h="310896">
                 <a:tc>
@@ -5877,7 +5643,7 @@
                     <a:bodyPr/>
                     <a:lstStyle/>
                     <a:p>
-                      <a:pPr indent="0" marL="0">
+                      <a:pPr marL="0" indent="0">
                         <a:buNone/>
                       </a:pPr>
                       <a:r>
@@ -5898,7 +5664,7 @@
                       </a:endParaRPr>
                     </a:p>
                   </a:txBody>
-                  <a:tcPr marL="91440" marR="91440" marT="45720" marB="45720">
+                  <a:tcPr>
                     <a:lnL w="6350" cap="flat" cmpd="sng" algn="ctr">
                       <a:solidFill>
                         <a:srgbClr val="2D4A6E"/>
@@ -5945,7 +5711,7 @@
                     <a:bodyPr/>
                     <a:lstStyle/>
                     <a:p>
-                      <a:pPr indent="0" marL="0">
+                      <a:pPr marL="0" indent="0">
                         <a:buNone/>
                       </a:pPr>
                       <a:r>
@@ -5966,7 +5732,7 @@
                       </a:endParaRPr>
                     </a:p>
                   </a:txBody>
-                  <a:tcPr marL="91440" marR="91440" marT="45720" marB="45720">
+                  <a:tcPr>
                     <a:lnL w="6350" cap="flat" cmpd="sng" algn="ctr">
                       <a:solidFill>
                         <a:srgbClr val="2D4A6E"/>
@@ -6013,7 +5779,7 @@
                     <a:bodyPr/>
                     <a:lstStyle/>
                     <a:p>
-                      <a:pPr indent="0" marL="0">
+                      <a:pPr marL="0" indent="0">
                         <a:buNone/>
                       </a:pPr>
                       <a:r>
@@ -6034,7 +5800,7 @@
                       </a:endParaRPr>
                     </a:p>
                   </a:txBody>
-                  <a:tcPr marL="91440" marR="91440" marT="45720" marB="45720">
+                  <a:tcPr>
                     <a:lnL w="6350" cap="flat" cmpd="sng" algn="ctr">
                       <a:solidFill>
                         <a:srgbClr val="2D4A6E"/>
@@ -6081,7 +5847,7 @@
                     <a:bodyPr/>
                     <a:lstStyle/>
                     <a:p>
-                      <a:pPr indent="0" marL="0">
+                      <a:pPr marL="0" indent="0">
                         <a:buNone/>
                       </a:pPr>
                       <a:r>
@@ -6102,7 +5868,7 @@
                       </a:endParaRPr>
                     </a:p>
                   </a:txBody>
-                  <a:tcPr marL="91440" marR="91440" marT="45720" marB="45720">
+                  <a:tcPr>
                     <a:lnL w="6350" cap="flat" cmpd="sng" algn="ctr">
                       <a:solidFill>
                         <a:srgbClr val="2D4A6E"/>
@@ -6144,6 +5910,11 @@
                     </a:solidFill>
                   </a:tcPr>
                 </a:tc>
+                <a:extLst>
+                  <a:ext uri="{0D108BD9-81ED-4DB2-BD59-A6C34878D82A}">
+                    <a16:rowId xmlns:a16="http://schemas.microsoft.com/office/drawing/2014/main" val="10000"/>
+                  </a:ext>
+                </a:extLst>
               </a:tr>
               <a:tr h="310896">
                 <a:tc>
@@ -6151,7 +5922,7 @@
                     <a:bodyPr/>
                     <a:lstStyle/>
                     <a:p>
-                      <a:pPr indent="0" marL="0">
+                      <a:pPr marL="0" indent="0">
                         <a:buNone/>
                       </a:pPr>
                       <a:r>
@@ -6172,7 +5943,7 @@
                       </a:endParaRPr>
                     </a:p>
                   </a:txBody>
-                  <a:tcPr marL="91440" marR="91440" marT="45720" marB="45720">
+                  <a:tcPr>
                     <a:lnL w="6350" cap="flat" cmpd="sng" algn="ctr">
                       <a:solidFill>
                         <a:srgbClr val="2D4A6E"/>
@@ -6219,7 +5990,7 @@
                     <a:bodyPr/>
                     <a:lstStyle/>
                     <a:p>
-                      <a:pPr indent="0" marL="0">
+                      <a:pPr marL="0" indent="0">
                         <a:buNone/>
                       </a:pPr>
                       <a:r>
@@ -6240,7 +6011,7 @@
                       </a:endParaRPr>
                     </a:p>
                   </a:txBody>
-                  <a:tcPr marL="91440" marR="91440" marT="45720" marB="45720">
+                  <a:tcPr>
                     <a:lnL w="6350" cap="flat" cmpd="sng" algn="ctr">
                       <a:solidFill>
                         <a:srgbClr val="2D4A6E"/>
@@ -6287,7 +6058,7 @@
                     <a:bodyPr/>
                     <a:lstStyle/>
                     <a:p>
-                      <a:pPr indent="0" marL="0">
+                      <a:pPr marL="0" indent="0">
                         <a:buNone/>
                       </a:pPr>
                       <a:r>
@@ -6308,7 +6079,7 @@
                       </a:endParaRPr>
                     </a:p>
                   </a:txBody>
-                  <a:tcPr marL="91440" marR="91440" marT="45720" marB="45720">
+                  <a:tcPr>
                     <a:lnL w="6350" cap="flat" cmpd="sng" algn="ctr">
                       <a:solidFill>
                         <a:srgbClr val="2D4A6E"/>
@@ -6355,7 +6126,7 @@
                     <a:bodyPr/>
                     <a:lstStyle/>
                     <a:p>
-                      <a:pPr indent="0" marL="0">
+                      <a:pPr marL="0" indent="0">
                         <a:buNone/>
                       </a:pPr>
                       <a:r>
@@ -6376,7 +6147,7 @@
                       </a:endParaRPr>
                     </a:p>
                   </a:txBody>
-                  <a:tcPr marL="91440" marR="91440" marT="45720" marB="45720">
+                  <a:tcPr>
                     <a:lnL w="6350" cap="flat" cmpd="sng" algn="ctr">
                       <a:solidFill>
                         <a:srgbClr val="2D4A6E"/>
@@ -6418,6 +6189,11 @@
                     </a:solidFill>
                   </a:tcPr>
                 </a:tc>
+                <a:extLst>
+                  <a:ext uri="{0D108BD9-81ED-4DB2-BD59-A6C34878D82A}">
+                    <a16:rowId xmlns:a16="http://schemas.microsoft.com/office/drawing/2014/main" val="10001"/>
+                  </a:ext>
+                </a:extLst>
               </a:tr>
               <a:tr h="310896">
                 <a:tc>
@@ -6425,7 +6201,7 @@
                     <a:bodyPr/>
                     <a:lstStyle/>
                     <a:p>
-                      <a:pPr indent="0" marL="0">
+                      <a:pPr marL="0" indent="0">
                         <a:buNone/>
                       </a:pPr>
                       <a:r>
@@ -6446,7 +6222,7 @@
                       </a:endParaRPr>
                     </a:p>
                   </a:txBody>
-                  <a:tcPr marL="91440" marR="91440" marT="45720" marB="45720">
+                  <a:tcPr>
                     <a:lnL w="6350" cap="flat" cmpd="sng" algn="ctr">
                       <a:solidFill>
                         <a:srgbClr val="2D4A6E"/>
@@ -6493,7 +6269,7 @@
                     <a:bodyPr/>
                     <a:lstStyle/>
                     <a:p>
-                      <a:pPr indent="0" marL="0">
+                      <a:pPr marL="0" indent="0">
                         <a:buNone/>
                       </a:pPr>
                       <a:r>
@@ -6514,7 +6290,7 @@
                       </a:endParaRPr>
                     </a:p>
                   </a:txBody>
-                  <a:tcPr marL="91440" marR="91440" marT="45720" marB="45720">
+                  <a:tcPr>
                     <a:lnL w="6350" cap="flat" cmpd="sng" algn="ctr">
                       <a:solidFill>
                         <a:srgbClr val="2D4A6E"/>
@@ -6561,7 +6337,7 @@
                     <a:bodyPr/>
                     <a:lstStyle/>
                     <a:p>
-                      <a:pPr indent="0" marL="0">
+                      <a:pPr marL="0" indent="0">
                         <a:buNone/>
                       </a:pPr>
                       <a:r>
@@ -6582,7 +6358,7 @@
                       </a:endParaRPr>
                     </a:p>
                   </a:txBody>
-                  <a:tcPr marL="91440" marR="91440" marT="45720" marB="45720">
+                  <a:tcPr>
                     <a:lnL w="6350" cap="flat" cmpd="sng" algn="ctr">
                       <a:solidFill>
                         <a:srgbClr val="2D4A6E"/>
@@ -6629,7 +6405,7 @@
                     <a:bodyPr/>
                     <a:lstStyle/>
                     <a:p>
-                      <a:pPr indent="0" marL="0">
+                      <a:pPr marL="0" indent="0">
                         <a:buNone/>
                       </a:pPr>
                       <a:r>
@@ -6650,7 +6426,7 @@
                       </a:endParaRPr>
                     </a:p>
                   </a:txBody>
-                  <a:tcPr marL="91440" marR="91440" marT="45720" marB="45720">
+                  <a:tcPr>
                     <a:lnL w="6350" cap="flat" cmpd="sng" algn="ctr">
                       <a:solidFill>
                         <a:srgbClr val="2D4A6E"/>
@@ -6692,6 +6468,11 @@
                     </a:solidFill>
                   </a:tcPr>
                 </a:tc>
+                <a:extLst>
+                  <a:ext uri="{0D108BD9-81ED-4DB2-BD59-A6C34878D82A}">
+                    <a16:rowId xmlns:a16="http://schemas.microsoft.com/office/drawing/2014/main" val="10002"/>
+                  </a:ext>
+                </a:extLst>
               </a:tr>
               <a:tr h="310896">
                 <a:tc>
@@ -6699,7 +6480,7 @@
                     <a:bodyPr/>
                     <a:lstStyle/>
                     <a:p>
-                      <a:pPr indent="0" marL="0">
+                      <a:pPr marL="0" indent="0">
                         <a:buNone/>
                       </a:pPr>
                       <a:r>
@@ -6720,7 +6501,7 @@
                       </a:endParaRPr>
                     </a:p>
                   </a:txBody>
-                  <a:tcPr marL="91440" marR="91440" marT="45720" marB="45720">
+                  <a:tcPr>
                     <a:lnL w="6350" cap="flat" cmpd="sng" algn="ctr">
                       <a:solidFill>
                         <a:srgbClr val="2D4A6E"/>
@@ -6767,7 +6548,7 @@
                     <a:bodyPr/>
                     <a:lstStyle/>
                     <a:p>
-                      <a:pPr indent="0" marL="0">
+                      <a:pPr marL="0" indent="0">
                         <a:buNone/>
                       </a:pPr>
                       <a:r>
@@ -6788,7 +6569,7 @@
                       </a:endParaRPr>
                     </a:p>
                   </a:txBody>
-                  <a:tcPr marL="91440" marR="91440" marT="45720" marB="45720">
+                  <a:tcPr>
                     <a:lnL w="6350" cap="flat" cmpd="sng" algn="ctr">
                       <a:solidFill>
                         <a:srgbClr val="2D4A6E"/>
@@ -6835,7 +6616,7 @@
                     <a:bodyPr/>
                     <a:lstStyle/>
                     <a:p>
-                      <a:pPr indent="0" marL="0">
+                      <a:pPr marL="0" indent="0">
                         <a:buNone/>
                       </a:pPr>
                       <a:r>
@@ -6856,7 +6637,7 @@
                       </a:endParaRPr>
                     </a:p>
                   </a:txBody>
-                  <a:tcPr marL="91440" marR="91440" marT="45720" marB="45720">
+                  <a:tcPr>
                     <a:lnL w="6350" cap="flat" cmpd="sng" algn="ctr">
                       <a:solidFill>
                         <a:srgbClr val="2D4A6E"/>
@@ -6903,7 +6684,7 @@
                     <a:bodyPr/>
                     <a:lstStyle/>
                     <a:p>
-                      <a:pPr indent="0" marL="0">
+                      <a:pPr marL="0" indent="0">
                         <a:buNone/>
                       </a:pPr>
                       <a:r>
@@ -6924,7 +6705,7 @@
                       </a:endParaRPr>
                     </a:p>
                   </a:txBody>
-                  <a:tcPr marL="91440" marR="91440" marT="45720" marB="45720">
+                  <a:tcPr>
                     <a:lnL w="6350" cap="flat" cmpd="sng" algn="ctr">
                       <a:solidFill>
                         <a:srgbClr val="2D4A6E"/>
@@ -6966,6 +6747,11 @@
                     </a:solidFill>
                   </a:tcPr>
                 </a:tc>
+                <a:extLst>
+                  <a:ext uri="{0D108BD9-81ED-4DB2-BD59-A6C34878D82A}">
+                    <a16:rowId xmlns:a16="http://schemas.microsoft.com/office/drawing/2014/main" val="10003"/>
+                  </a:ext>
+                </a:extLst>
               </a:tr>
               <a:tr h="310896">
                 <a:tc>
@@ -6973,7 +6759,7 @@
                     <a:bodyPr/>
                     <a:lstStyle/>
                     <a:p>
-                      <a:pPr indent="0" marL="0">
+                      <a:pPr marL="0" indent="0">
                         <a:buNone/>
                       </a:pPr>
                       <a:r>
@@ -6994,7 +6780,7 @@
                       </a:endParaRPr>
                     </a:p>
                   </a:txBody>
-                  <a:tcPr marL="91440" marR="91440" marT="45720" marB="45720">
+                  <a:tcPr>
                     <a:lnL w="6350" cap="flat" cmpd="sng" algn="ctr">
                       <a:solidFill>
                         <a:srgbClr val="2D4A6E"/>
@@ -7041,7 +6827,7 @@
                     <a:bodyPr/>
                     <a:lstStyle/>
                     <a:p>
-                      <a:pPr indent="0" marL="0">
+                      <a:pPr marL="0" indent="0">
                         <a:buNone/>
                       </a:pPr>
                       <a:r>
@@ -7062,7 +6848,7 @@
                       </a:endParaRPr>
                     </a:p>
                   </a:txBody>
-                  <a:tcPr marL="91440" marR="91440" marT="45720" marB="45720">
+                  <a:tcPr>
                     <a:lnL w="6350" cap="flat" cmpd="sng" algn="ctr">
                       <a:solidFill>
                         <a:srgbClr val="2D4A6E"/>
@@ -7109,7 +6895,7 @@
                     <a:bodyPr/>
                     <a:lstStyle/>
                     <a:p>
-                      <a:pPr indent="0" marL="0">
+                      <a:pPr marL="0" indent="0">
                         <a:buNone/>
                       </a:pPr>
                       <a:r>
@@ -7130,7 +6916,7 @@
                       </a:endParaRPr>
                     </a:p>
                   </a:txBody>
-                  <a:tcPr marL="91440" marR="91440" marT="45720" marB="45720">
+                  <a:tcPr>
                     <a:lnL w="6350" cap="flat" cmpd="sng" algn="ctr">
                       <a:solidFill>
                         <a:srgbClr val="2D4A6E"/>
@@ -7177,7 +6963,7 @@
                     <a:bodyPr/>
                     <a:lstStyle/>
                     <a:p>
-                      <a:pPr indent="0" marL="0">
+                      <a:pPr marL="0" indent="0">
                         <a:buNone/>
                       </a:pPr>
                       <a:r>
@@ -7198,7 +6984,7 @@
                       </a:endParaRPr>
                     </a:p>
                   </a:txBody>
-                  <a:tcPr marL="91440" marR="91440" marT="45720" marB="45720">
+                  <a:tcPr>
                     <a:lnL w="6350" cap="flat" cmpd="sng" algn="ctr">
                       <a:solidFill>
                         <a:srgbClr val="2D4A6E"/>
@@ -7240,6 +7026,11 @@
                     </a:solidFill>
                   </a:tcPr>
                 </a:tc>
+                <a:extLst>
+                  <a:ext uri="{0D108BD9-81ED-4DB2-BD59-A6C34878D82A}">
+                    <a16:rowId xmlns:a16="http://schemas.microsoft.com/office/drawing/2014/main" val="10004"/>
+                  </a:ext>
+                </a:extLst>
               </a:tr>
               <a:tr h="310896">
                 <a:tc>
@@ -7247,7 +7038,7 @@
                     <a:bodyPr/>
                     <a:lstStyle/>
                     <a:p>
-                      <a:pPr indent="0" marL="0">
+                      <a:pPr marL="0" indent="0">
                         <a:buNone/>
                       </a:pPr>
                       <a:r>
@@ -7268,7 +7059,7 @@
                       </a:endParaRPr>
                     </a:p>
                   </a:txBody>
-                  <a:tcPr marL="91440" marR="91440" marT="45720" marB="45720">
+                  <a:tcPr>
                     <a:lnL w="6350" cap="flat" cmpd="sng" algn="ctr">
                       <a:solidFill>
                         <a:srgbClr val="2D4A6E"/>
@@ -7315,7 +7106,7 @@
                     <a:bodyPr/>
                     <a:lstStyle/>
                     <a:p>
-                      <a:pPr indent="0" marL="0">
+                      <a:pPr marL="0" indent="0">
                         <a:buNone/>
                       </a:pPr>
                       <a:r>
@@ -7336,7 +7127,7 @@
                       </a:endParaRPr>
                     </a:p>
                   </a:txBody>
-                  <a:tcPr marL="91440" marR="91440" marT="45720" marB="45720">
+                  <a:tcPr>
                     <a:lnL w="6350" cap="flat" cmpd="sng" algn="ctr">
                       <a:solidFill>
                         <a:srgbClr val="2D4A6E"/>
@@ -7383,7 +7174,7 @@
                     <a:bodyPr/>
                     <a:lstStyle/>
                     <a:p>
-                      <a:pPr indent="0" marL="0">
+                      <a:pPr marL="0" indent="0">
                         <a:buNone/>
                       </a:pPr>
                       <a:r>
@@ -7404,7 +7195,7 @@
                       </a:endParaRPr>
                     </a:p>
                   </a:txBody>
-                  <a:tcPr marL="91440" marR="91440" marT="45720" marB="45720">
+                  <a:tcPr>
                     <a:lnL w="6350" cap="flat" cmpd="sng" algn="ctr">
                       <a:solidFill>
                         <a:srgbClr val="2D4A6E"/>
@@ -7451,7 +7242,7 @@
                     <a:bodyPr/>
                     <a:lstStyle/>
                     <a:p>
-                      <a:pPr indent="0" marL="0">
+                      <a:pPr marL="0" indent="0">
                         <a:buNone/>
                       </a:pPr>
                       <a:r>
@@ -7472,7 +7263,7 @@
                       </a:endParaRPr>
                     </a:p>
                   </a:txBody>
-                  <a:tcPr marL="91440" marR="91440" marT="45720" marB="45720">
+                  <a:tcPr>
                     <a:lnL w="6350" cap="flat" cmpd="sng" algn="ctr">
                       <a:solidFill>
                         <a:srgbClr val="2D4A6E"/>
@@ -7514,6 +7305,11 @@
                     </a:solidFill>
                   </a:tcPr>
                 </a:tc>
+                <a:extLst>
+                  <a:ext uri="{0D108BD9-81ED-4DB2-BD59-A6C34878D82A}">
+                    <a16:rowId xmlns:a16="http://schemas.microsoft.com/office/drawing/2014/main" val="10005"/>
+                  </a:ext>
+                </a:extLst>
               </a:tr>
               <a:tr h="310896">
                 <a:tc>
@@ -7521,7 +7317,7 @@
                     <a:bodyPr/>
                     <a:lstStyle/>
                     <a:p>
-                      <a:pPr indent="0" marL="0">
+                      <a:pPr marL="0" indent="0">
                         <a:buNone/>
                       </a:pPr>
                       <a:r>
@@ -7542,7 +7338,7 @@
                       </a:endParaRPr>
                     </a:p>
                   </a:txBody>
-                  <a:tcPr marL="91440" marR="91440" marT="45720" marB="45720">
+                  <a:tcPr>
                     <a:lnL w="6350" cap="flat" cmpd="sng" algn="ctr">
                       <a:solidFill>
                         <a:srgbClr val="2D4A6E"/>
@@ -7589,7 +7385,7 @@
                     <a:bodyPr/>
                     <a:lstStyle/>
                     <a:p>
-                      <a:pPr indent="0" marL="0">
+                      <a:pPr marL="0" indent="0">
                         <a:buNone/>
                       </a:pPr>
                       <a:r>
@@ -7610,7 +7406,7 @@
                       </a:endParaRPr>
                     </a:p>
                   </a:txBody>
-                  <a:tcPr marL="91440" marR="91440" marT="45720" marB="45720">
+                  <a:tcPr>
                     <a:lnL w="6350" cap="flat" cmpd="sng" algn="ctr">
                       <a:solidFill>
                         <a:srgbClr val="2D4A6E"/>
@@ -7657,7 +7453,7 @@
                     <a:bodyPr/>
                     <a:lstStyle/>
                     <a:p>
-                      <a:pPr indent="0" marL="0">
+                      <a:pPr marL="0" indent="0">
                         <a:buNone/>
                       </a:pPr>
                       <a:r>
@@ -7678,7 +7474,7 @@
                       </a:endParaRPr>
                     </a:p>
                   </a:txBody>
-                  <a:tcPr marL="91440" marR="91440" marT="45720" marB="45720">
+                  <a:tcPr>
                     <a:lnL w="6350" cap="flat" cmpd="sng" algn="ctr">
                       <a:solidFill>
                         <a:srgbClr val="2D4A6E"/>
@@ -7725,7 +7521,7 @@
                     <a:bodyPr/>
                     <a:lstStyle/>
                     <a:p>
-                      <a:pPr indent="0" marL="0">
+                      <a:pPr marL="0" indent="0">
                         <a:buNone/>
                       </a:pPr>
                       <a:r>
@@ -7746,7 +7542,7 @@
                       </a:endParaRPr>
                     </a:p>
                   </a:txBody>
-                  <a:tcPr marL="91440" marR="91440" marT="45720" marB="45720">
+                  <a:tcPr>
                     <a:lnL w="6350" cap="flat" cmpd="sng" algn="ctr">
                       <a:solidFill>
                         <a:srgbClr val="2D4A6E"/>
@@ -7788,6 +7584,11 @@
                     </a:solidFill>
                   </a:tcPr>
                 </a:tc>
+                <a:extLst>
+                  <a:ext uri="{0D108BD9-81ED-4DB2-BD59-A6C34878D82A}">
+                    <a16:rowId xmlns:a16="http://schemas.microsoft.com/office/drawing/2014/main" val="10006"/>
+                  </a:ext>
+                </a:extLst>
               </a:tr>
             </a:tbl>
           </a:graphicData>
@@ -7809,6 +7610,7 @@
         <a:solidFill>
           <a:srgbClr val="F5F6FA"/>
         </a:solidFill>
+        <a:effectLst/>
       </p:bgPr>
     </p:bg>
     <p:spTree>
@@ -7871,11 +7673,11 @@
           <a:bodyPr wrap="square" lIns="0" tIns="0" rIns="0" bIns="0" rtlCol="0" anchor="ctr"/>
           <a:lstStyle/>
           <a:p>
-            <a:pPr indent="0" marL="0">
-              <a:buNone/>
-            </a:pPr>
-            <a:r>
-              <a:rPr lang="en-US" sz="800" b="1" spc="300" kern="0" dirty="0">
+            <a:pPr marL="0" indent="0">
+              <a:buNone/>
+            </a:pPr>
+            <a:r>
+              <a:rPr lang="en-US" sz="800" b="1" kern="0" spc="300" dirty="0">
                 <a:solidFill>
                   <a:srgbClr val="C9993A"/>
                 </a:solidFill>
@@ -7907,7 +7709,7 @@
           <a:bodyPr wrap="square" lIns="0" tIns="0" rIns="0" bIns="0" rtlCol="0" anchor="ctr"/>
           <a:lstStyle/>
           <a:p>
-            <a:pPr indent="0" marL="0">
+            <a:pPr marL="0" indent="0">
               <a:buNone/>
             </a:pPr>
             <a:r>
@@ -7971,7 +7773,7 @@
           <a:bodyPr wrap="square" lIns="0" tIns="0" rIns="0" bIns="0" rtlCol="0" anchor="ctr"/>
           <a:lstStyle/>
           <a:p>
-            <a:pPr indent="0" marL="0">
+            <a:pPr marL="0" indent="0">
               <a:buNone/>
             </a:pPr>
             <a:r>
@@ -8013,7 +7815,7 @@
             <a:prstDash val="solid"/>
           </a:ln>
           <a:effectLst>
-            <a:outerShdw sx="100000" sy="100000" kx="0" ky="0" algn="bl" rotWithShape="0" blurRad="101600" dist="38100" dir="8100000">
+            <a:outerShdw blurRad="101600" dist="38100" dir="8100000" algn="bl" rotWithShape="0">
               <a:srgbClr val="000000">
                 <a:alpha val="12000"/>
               </a:srgbClr>
@@ -8042,7 +7844,7 @@
           <a:bodyPr wrap="square" lIns="0" tIns="0" rIns="0" bIns="0" rtlCol="0" anchor="ctr"/>
           <a:lstStyle/>
           <a:p>
-            <a:pPr indent="0" marL="0">
+            <a:pPr marL="0" indent="0">
               <a:buNone/>
             </a:pPr>
             <a:r>
@@ -8081,7 +7883,7 @@
           <a:bodyPr wrap="square" lIns="0" tIns="0" rIns="0" bIns="0" rtlCol="0" anchor="ctr"/>
           <a:lstStyle/>
           <a:p>
-            <a:pPr indent="0" marL="0">
+            <a:pPr marL="0" indent="0">
               <a:lnSpc>
                 <a:spcPct val="130000"/>
               </a:lnSpc>
@@ -8101,7 +7903,7 @@
             <a:endParaRPr lang="en-US" sz="1100" dirty="0"/>
           </a:p>
           <a:p>
-            <a:pPr indent="0" marL="0">
+            <a:pPr marL="0" indent="0">
               <a:lnSpc>
                 <a:spcPct val="130000"/>
               </a:lnSpc>
@@ -8121,7 +7923,7 @@
             <a:endParaRPr lang="en-US" sz="1100" dirty="0"/>
           </a:p>
           <a:p>
-            <a:pPr indent="0" marL="0">
+            <a:pPr marL="0" indent="0">
               <a:lnSpc>
                 <a:spcPct val="130000"/>
               </a:lnSpc>
@@ -8166,7 +7968,7 @@
             <a:prstDash val="solid"/>
           </a:ln>
           <a:effectLst>
-            <a:outerShdw sx="100000" sy="100000" kx="0" ky="0" algn="bl" rotWithShape="0" blurRad="101600" dist="38100" dir="8100000">
+            <a:outerShdw blurRad="101600" dist="38100" dir="8100000" algn="bl" rotWithShape="0">
               <a:srgbClr val="000000">
                 <a:alpha val="12000"/>
               </a:srgbClr>
@@ -8195,7 +7997,7 @@
           <a:bodyPr wrap="square" lIns="0" tIns="0" rIns="0" bIns="0" rtlCol="0" anchor="ctr"/>
           <a:lstStyle/>
           <a:p>
-            <a:pPr indent="0" marL="0">
+            <a:pPr marL="0" indent="0">
               <a:buNone/>
             </a:pPr>
             <a:r>
@@ -8234,7 +8036,7 @@
           <a:bodyPr wrap="square" lIns="0" tIns="0" rIns="0" bIns="0" rtlCol="0" anchor="ctr"/>
           <a:lstStyle/>
           <a:p>
-            <a:pPr indent="0" marL="0">
+            <a:pPr marL="0" indent="0">
               <a:lnSpc>
                 <a:spcPct val="130000"/>
               </a:lnSpc>
@@ -8254,7 +8056,7 @@
             <a:endParaRPr lang="en-US" sz="1100" dirty="0"/>
           </a:p>
           <a:p>
-            <a:pPr indent="0" marL="0">
+            <a:pPr marL="0" indent="0">
               <a:lnSpc>
                 <a:spcPct val="130000"/>
               </a:lnSpc>
@@ -8274,7 +8076,7 @@
             <a:endParaRPr lang="en-US" sz="1100" dirty="0"/>
           </a:p>
           <a:p>
-            <a:pPr indent="0" marL="0">
+            <a:pPr marL="0" indent="0">
               <a:lnSpc>
                 <a:spcPct val="130000"/>
               </a:lnSpc>
@@ -8319,7 +8121,7 @@
             <a:prstDash val="solid"/>
           </a:ln>
           <a:effectLst>
-            <a:outerShdw sx="100000" sy="100000" kx="0" ky="0" algn="bl" rotWithShape="0" blurRad="101600" dist="38100" dir="8100000">
+            <a:outerShdw blurRad="101600" dist="38100" dir="8100000" algn="bl" rotWithShape="0">
               <a:srgbClr val="000000">
                 <a:alpha val="12000"/>
               </a:srgbClr>
@@ -8348,7 +8150,7 @@
           <a:bodyPr wrap="square" lIns="0" tIns="0" rIns="0" bIns="0" rtlCol="0" anchor="ctr"/>
           <a:lstStyle/>
           <a:p>
-            <a:pPr indent="0" marL="0">
+            <a:pPr marL="0" indent="0">
               <a:buNone/>
             </a:pPr>
             <a:r>
@@ -8387,7 +8189,7 @@
           <a:bodyPr wrap="square" lIns="0" tIns="0" rIns="0" bIns="0" rtlCol="0" anchor="ctr"/>
           <a:lstStyle/>
           <a:p>
-            <a:pPr indent="0" marL="0">
+            <a:pPr marL="0" indent="0">
               <a:lnSpc>
                 <a:spcPct val="130000"/>
               </a:lnSpc>
@@ -8407,7 +8209,7 @@
             <a:endParaRPr lang="en-US" sz="1100" dirty="0"/>
           </a:p>
           <a:p>
-            <a:pPr indent="0" marL="0">
+            <a:pPr marL="0" indent="0">
               <a:lnSpc>
                 <a:spcPct val="130000"/>
               </a:lnSpc>
@@ -8427,7 +8229,7 @@
             <a:endParaRPr lang="en-US" sz="1100" dirty="0"/>
           </a:p>
           <a:p>
-            <a:pPr indent="0" marL="0">
+            <a:pPr marL="0" indent="0">
               <a:lnSpc>
                 <a:spcPct val="130000"/>
               </a:lnSpc>
@@ -8472,7 +8274,7 @@
             <a:prstDash val="solid"/>
           </a:ln>
           <a:effectLst>
-            <a:outerShdw sx="100000" sy="100000" kx="0" ky="0" algn="bl" rotWithShape="0" blurRad="101600" dist="38100" dir="8100000">
+            <a:outerShdw blurRad="101600" dist="38100" dir="8100000" algn="bl" rotWithShape="0">
               <a:srgbClr val="000000">
                 <a:alpha val="12000"/>
               </a:srgbClr>
@@ -8501,7 +8303,7 @@
           <a:bodyPr wrap="square" lIns="0" tIns="0" rIns="0" bIns="0" rtlCol="0" anchor="ctr"/>
           <a:lstStyle/>
           <a:p>
-            <a:pPr indent="0" marL="0">
+            <a:pPr marL="0" indent="0">
               <a:buNone/>
             </a:pPr>
             <a:r>
@@ -8540,7 +8342,7 @@
           <a:bodyPr wrap="square" lIns="0" tIns="0" rIns="0" bIns="0" rtlCol="0" anchor="ctr"/>
           <a:lstStyle/>
           <a:p>
-            <a:pPr indent="0" marL="0">
+            <a:pPr marL="0" indent="0">
               <a:lnSpc>
                 <a:spcPct val="130000"/>
               </a:lnSpc>
@@ -8560,7 +8362,7 @@
             <a:endParaRPr lang="en-US" sz="1100" dirty="0"/>
           </a:p>
           <a:p>
-            <a:pPr indent="0" marL="0">
+            <a:pPr marL="0" indent="0">
               <a:lnSpc>
                 <a:spcPct val="130000"/>
               </a:lnSpc>
@@ -8580,7 +8382,7 @@
             <a:endParaRPr lang="en-US" sz="1100" dirty="0"/>
           </a:p>
           <a:p>
-            <a:pPr indent="0" marL="0">
+            <a:pPr marL="0" indent="0">
               <a:lnSpc>
                 <a:spcPct val="130000"/>
               </a:lnSpc>
@@ -8645,7 +8447,7 @@
           <a:bodyPr wrap="square" lIns="0" tIns="0" rIns="0" bIns="0" rtlCol="0" anchor="ctr"/>
           <a:lstStyle/>
           <a:p>
-            <a:pPr indent="0" marL="0">
+            <a:pPr marL="0" indent="0">
               <a:buNone/>
             </a:pPr>
             <a:r>
@@ -8704,7 +8506,7 @@
           <a:bodyPr wrap="square" lIns="0" tIns="0" rIns="0" bIns="0" rtlCol="0" anchor="ctr"/>
           <a:lstStyle/>
           <a:p>
-            <a:pPr indent="0" marL="0">
+            <a:pPr marL="0" indent="0">
               <a:buNone/>
             </a:pPr>
             <a:r>
@@ -8763,7 +8565,7 @@
           <a:bodyPr wrap="square" lIns="0" tIns="0" rIns="0" bIns="0" rtlCol="0" anchor="ctr"/>
           <a:lstStyle/>
           <a:p>
-            <a:pPr indent="0" marL="0">
+            <a:pPr marL="0" indent="0">
               <a:buNone/>
             </a:pPr>
             <a:r>
@@ -8802,7 +8604,7 @@
             <a:prstDash val="solid"/>
           </a:ln>
           <a:effectLst>
-            <a:outerShdw sx="100000" sy="100000" kx="0" ky="0" algn="bl" rotWithShape="0" blurRad="101600" dist="38100" dir="8100000">
+            <a:outerShdw blurRad="101600" dist="38100" dir="8100000" algn="bl" rotWithShape="0">
               <a:srgbClr val="000000">
                 <a:alpha val="12000"/>
               </a:srgbClr>
@@ -8831,7 +8633,7 @@
           <a:bodyPr wrap="square" lIns="0" tIns="0" rIns="0" bIns="0" rtlCol="0" anchor="ctr"/>
           <a:lstStyle/>
           <a:p>
-            <a:pPr algn="ctr" indent="0" marL="0">
+            <a:pPr marL="0" indent="0" algn="ctr">
               <a:buNone/>
             </a:pPr>
             <a:r>
@@ -8865,6 +8667,7 @@
         <a:solidFill>
           <a:srgbClr val="F5F6FA"/>
         </a:solidFill>
+        <a:effectLst/>
       </p:bgPr>
     </p:bg>
     <p:spTree>
@@ -8927,11 +8730,11 @@
           <a:bodyPr wrap="square" lIns="0" tIns="0" rIns="0" bIns="0" rtlCol="0" anchor="ctr"/>
           <a:lstStyle/>
           <a:p>
-            <a:pPr indent="0" marL="0">
-              <a:buNone/>
-            </a:pPr>
-            <a:r>
-              <a:rPr lang="en-US" sz="800" b="1" spc="300" kern="0" dirty="0">
+            <a:pPr marL="0" indent="0">
+              <a:buNone/>
+            </a:pPr>
+            <a:r>
+              <a:rPr lang="en-US" sz="800" b="1" kern="0" spc="300" dirty="0">
                 <a:solidFill>
                   <a:srgbClr val="C9993A"/>
                 </a:solidFill>
@@ -8963,7 +8766,7 @@
           <a:bodyPr wrap="square" lIns="0" tIns="0" rIns="0" bIns="0" rtlCol="0" anchor="ctr"/>
           <a:lstStyle/>
           <a:p>
-            <a:pPr indent="0" marL="0">
+            <a:pPr marL="0" indent="0">
               <a:buNone/>
             </a:pPr>
             <a:r>
@@ -9027,7 +8830,7 @@
           <a:bodyPr wrap="square" lIns="0" tIns="0" rIns="0" bIns="0" rtlCol="0" anchor="ctr"/>
           <a:lstStyle/>
           <a:p>
-            <a:pPr indent="0" marL="0">
+            <a:pPr marL="0" indent="0">
               <a:buNone/>
             </a:pPr>
             <a:r>
@@ -9047,7 +8850,7 @@
       </p:sp>
       <p:graphicFrame>
         <p:nvGraphicFramePr>
-          <p:cNvPr id="4" name="Table 0"/>
+          <p:cNvPr id="7" name="Table 0"/>
           <p:cNvGraphicFramePr>
             <a:graphicFrameLocks noGrp="1"/>
           </p:cNvGraphicFramePr>
@@ -9061,17 +8864,41 @@
         </p:nvGraphicFramePr>
         <p:xfrm>
           <a:off x="274320" y="1554480"/>
-          <a:ext cx="8595360" cy="3246120"/>
+          <a:ext cx="8595360" cy="3218688"/>
         </p:xfrm>
         <a:graphic>
           <a:graphicData uri="http://schemas.openxmlformats.org/drawingml/2006/table">
             <a:tbl>
               <a:tblPr/>
               <a:tblGrid>
-                <a:gridCol w="1645920"/>
-                <a:gridCol w="1554480"/>
-                <a:gridCol w="1737360"/>
-                <a:gridCol w="3657600"/>
+                <a:gridCol w="1645920">
+                  <a:extLst>
+                    <a:ext uri="{9D8B030D-6E8A-4147-A177-3AD203B41FA5}">
+                      <a16:colId xmlns:a16="http://schemas.microsoft.com/office/drawing/2014/main" val="20000"/>
+                    </a:ext>
+                  </a:extLst>
+                </a:gridCol>
+                <a:gridCol w="1554480">
+                  <a:extLst>
+                    <a:ext uri="{9D8B030D-6E8A-4147-A177-3AD203B41FA5}">
+                      <a16:colId xmlns:a16="http://schemas.microsoft.com/office/drawing/2014/main" val="20001"/>
+                    </a:ext>
+                  </a:extLst>
+                </a:gridCol>
+                <a:gridCol w="1737360">
+                  <a:extLst>
+                    <a:ext uri="{9D8B030D-6E8A-4147-A177-3AD203B41FA5}">
+                      <a16:colId xmlns:a16="http://schemas.microsoft.com/office/drawing/2014/main" val="20002"/>
+                    </a:ext>
+                  </a:extLst>
+                </a:gridCol>
+                <a:gridCol w="3657600">
+                  <a:extLst>
+                    <a:ext uri="{9D8B030D-6E8A-4147-A177-3AD203B41FA5}">
+                      <a16:colId xmlns:a16="http://schemas.microsoft.com/office/drawing/2014/main" val="20003"/>
+                    </a:ext>
+                  </a:extLst>
+                </a:gridCol>
               </a:tblGrid>
               <a:tr h="292608">
                 <a:tc>
@@ -9079,7 +8906,7 @@
                     <a:bodyPr/>
                     <a:lstStyle/>
                     <a:p>
-                      <a:pPr indent="0" marL="0">
+                      <a:pPr marL="0" indent="0">
                         <a:buNone/>
                       </a:pPr>
                       <a:r>
@@ -9100,7 +8927,7 @@
                       </a:endParaRPr>
                     </a:p>
                   </a:txBody>
-                  <a:tcPr marL="91440" marR="91440" marT="45720" marB="45720">
+                  <a:tcPr>
                     <a:lnL w="6350" cap="flat" cmpd="sng" algn="ctr">
                       <a:solidFill>
                         <a:srgbClr val="E2E8F0"/>
@@ -9147,7 +8974,7 @@
                     <a:bodyPr/>
                     <a:lstStyle/>
                     <a:p>
-                      <a:pPr indent="0" marL="0">
+                      <a:pPr marL="0" indent="0">
                         <a:buNone/>
                       </a:pPr>
                       <a:r>
@@ -9168,7 +8995,7 @@
                       </a:endParaRPr>
                     </a:p>
                   </a:txBody>
-                  <a:tcPr marL="91440" marR="91440" marT="45720" marB="45720">
+                  <a:tcPr>
                     <a:lnL w="6350" cap="flat" cmpd="sng" algn="ctr">
                       <a:solidFill>
                         <a:srgbClr val="E2E8F0"/>
@@ -9215,7 +9042,7 @@
                     <a:bodyPr/>
                     <a:lstStyle/>
                     <a:p>
-                      <a:pPr indent="0" marL="0">
+                      <a:pPr marL="0" indent="0">
                         <a:buNone/>
                       </a:pPr>
                       <a:r>
@@ -9236,7 +9063,7 @@
                       </a:endParaRPr>
                     </a:p>
                   </a:txBody>
-                  <a:tcPr marL="91440" marR="91440" marT="45720" marB="45720">
+                  <a:tcPr>
                     <a:lnL w="6350" cap="flat" cmpd="sng" algn="ctr">
                       <a:solidFill>
                         <a:srgbClr val="E2E8F0"/>
@@ -9283,7 +9110,7 @@
                     <a:bodyPr/>
                     <a:lstStyle/>
                     <a:p>
-                      <a:pPr indent="0" marL="0">
+                      <a:pPr marL="0" indent="0">
                         <a:buNone/>
                       </a:pPr>
                       <a:r>
@@ -9304,7 +9131,7 @@
                       </a:endParaRPr>
                     </a:p>
                   </a:txBody>
-                  <a:tcPr marL="91440" marR="91440" marT="45720" marB="45720">
+                  <a:tcPr>
                     <a:lnL w="6350" cap="flat" cmpd="sng" algn="ctr">
                       <a:solidFill>
                         <a:srgbClr val="E2E8F0"/>
@@ -9346,6 +9173,11 @@
                     </a:solidFill>
                   </a:tcPr>
                 </a:tc>
+                <a:extLst>
+                  <a:ext uri="{0D108BD9-81ED-4DB2-BD59-A6C34878D82A}">
+                    <a16:rowId xmlns:a16="http://schemas.microsoft.com/office/drawing/2014/main" val="10000"/>
+                  </a:ext>
+                </a:extLst>
               </a:tr>
               <a:tr h="292608">
                 <a:tc>
@@ -9353,7 +9185,7 @@
                     <a:bodyPr/>
                     <a:lstStyle/>
                     <a:p>
-                      <a:pPr indent="0" marL="0">
+                      <a:pPr marL="0" indent="0">
                         <a:buNone/>
                       </a:pPr>
                       <a:r>
@@ -9374,7 +9206,7 @@
                       </a:endParaRPr>
                     </a:p>
                   </a:txBody>
-                  <a:tcPr marL="91440" marR="91440" marT="45720" marB="45720">
+                  <a:tcPr>
                     <a:lnL w="6350" cap="flat" cmpd="sng" algn="ctr">
                       <a:solidFill>
                         <a:srgbClr val="E2E8F0"/>
@@ -9421,7 +9253,7 @@
                     <a:bodyPr/>
                     <a:lstStyle/>
                     <a:p>
-                      <a:pPr indent="0" marL="0">
+                      <a:pPr marL="0" indent="0">
                         <a:buNone/>
                       </a:pPr>
                       <a:r>
@@ -9442,7 +9274,7 @@
                       </a:endParaRPr>
                     </a:p>
                   </a:txBody>
-                  <a:tcPr marL="91440" marR="91440" marT="45720" marB="45720">
+                  <a:tcPr>
                     <a:lnL w="6350" cap="flat" cmpd="sng" algn="ctr">
                       <a:solidFill>
                         <a:srgbClr val="E2E8F0"/>
@@ -9489,7 +9321,7 @@
                     <a:bodyPr/>
                     <a:lstStyle/>
                     <a:p>
-                      <a:pPr indent="0" marL="0">
+                      <a:pPr marL="0" indent="0">
                         <a:buNone/>
                       </a:pPr>
                       <a:r>
@@ -9510,7 +9342,7 @@
                       </a:endParaRPr>
                     </a:p>
                   </a:txBody>
-                  <a:tcPr marL="91440" marR="91440" marT="45720" marB="45720">
+                  <a:tcPr>
                     <a:lnL w="6350" cap="flat" cmpd="sng" algn="ctr">
                       <a:solidFill>
                         <a:srgbClr val="E2E8F0"/>
@@ -9557,7 +9389,7 @@
                     <a:bodyPr/>
                     <a:lstStyle/>
                     <a:p>
-                      <a:pPr indent="0" marL="0">
+                      <a:pPr marL="0" indent="0">
                         <a:buNone/>
                       </a:pPr>
                       <a:r>
@@ -9578,7 +9410,7 @@
                       </a:endParaRPr>
                     </a:p>
                   </a:txBody>
-                  <a:tcPr marL="91440" marR="91440" marT="45720" marB="45720">
+                  <a:tcPr>
                     <a:lnL w="6350" cap="flat" cmpd="sng" algn="ctr">
                       <a:solidFill>
                         <a:srgbClr val="E2E8F0"/>
@@ -9620,6 +9452,11 @@
                     </a:solidFill>
                   </a:tcPr>
                 </a:tc>
+                <a:extLst>
+                  <a:ext uri="{0D108BD9-81ED-4DB2-BD59-A6C34878D82A}">
+                    <a16:rowId xmlns:a16="http://schemas.microsoft.com/office/drawing/2014/main" val="10001"/>
+                  </a:ext>
+                </a:extLst>
               </a:tr>
               <a:tr h="292608">
                 <a:tc>
@@ -9627,7 +9464,7 @@
                     <a:bodyPr/>
                     <a:lstStyle/>
                     <a:p>
-                      <a:pPr indent="0" marL="0">
+                      <a:pPr marL="0" indent="0">
                         <a:buNone/>
                       </a:pPr>
                       <a:r>
@@ -9648,7 +9485,7 @@
                       </a:endParaRPr>
                     </a:p>
                   </a:txBody>
-                  <a:tcPr marL="91440" marR="91440" marT="45720" marB="45720">
+                  <a:tcPr>
                     <a:lnL w="6350" cap="flat" cmpd="sng" algn="ctr">
                       <a:solidFill>
                         <a:srgbClr val="E2E8F0"/>
@@ -9695,7 +9532,7 @@
                     <a:bodyPr/>
                     <a:lstStyle/>
                     <a:p>
-                      <a:pPr indent="0" marL="0">
+                      <a:pPr marL="0" indent="0">
                         <a:buNone/>
                       </a:pPr>
                       <a:r>
@@ -9716,7 +9553,7 @@
                       </a:endParaRPr>
                     </a:p>
                   </a:txBody>
-                  <a:tcPr marL="91440" marR="91440" marT="45720" marB="45720">
+                  <a:tcPr>
                     <a:lnL w="6350" cap="flat" cmpd="sng" algn="ctr">
                       <a:solidFill>
                         <a:srgbClr val="E2E8F0"/>
@@ -9763,7 +9600,7 @@
                     <a:bodyPr/>
                     <a:lstStyle/>
                     <a:p>
-                      <a:pPr indent="0" marL="0">
+                      <a:pPr marL="0" indent="0">
                         <a:buNone/>
                       </a:pPr>
                       <a:r>
@@ -9784,7 +9621,7 @@
                       </a:endParaRPr>
                     </a:p>
                   </a:txBody>
-                  <a:tcPr marL="91440" marR="91440" marT="45720" marB="45720">
+                  <a:tcPr>
                     <a:lnL w="6350" cap="flat" cmpd="sng" algn="ctr">
                       <a:solidFill>
                         <a:srgbClr val="E2E8F0"/>
@@ -9831,7 +9668,7 @@
                     <a:bodyPr/>
                     <a:lstStyle/>
                     <a:p>
-                      <a:pPr indent="0" marL="0">
+                      <a:pPr marL="0" indent="0">
                         <a:buNone/>
                       </a:pPr>
                       <a:r>
@@ -9852,7 +9689,7 @@
                       </a:endParaRPr>
                     </a:p>
                   </a:txBody>
-                  <a:tcPr marL="91440" marR="91440" marT="45720" marB="45720">
+                  <a:tcPr>
                     <a:lnL w="6350" cap="flat" cmpd="sng" algn="ctr">
                       <a:solidFill>
                         <a:srgbClr val="E2E8F0"/>
@@ -9894,6 +9731,11 @@
                     </a:solidFill>
                   </a:tcPr>
                 </a:tc>
+                <a:extLst>
+                  <a:ext uri="{0D108BD9-81ED-4DB2-BD59-A6C34878D82A}">
+                    <a16:rowId xmlns:a16="http://schemas.microsoft.com/office/drawing/2014/main" val="10002"/>
+                  </a:ext>
+                </a:extLst>
               </a:tr>
               <a:tr h="292608">
                 <a:tc>
@@ -9901,7 +9743,7 @@
                     <a:bodyPr/>
                     <a:lstStyle/>
                     <a:p>
-                      <a:pPr indent="0" marL="0">
+                      <a:pPr marL="0" indent="0">
                         <a:buNone/>
                       </a:pPr>
                       <a:r>
@@ -9922,7 +9764,7 @@
                       </a:endParaRPr>
                     </a:p>
                   </a:txBody>
-                  <a:tcPr marL="91440" marR="91440" marT="45720" marB="45720">
+                  <a:tcPr>
                     <a:lnL w="6350" cap="flat" cmpd="sng" algn="ctr">
                       <a:solidFill>
                         <a:srgbClr val="E2E8F0"/>
@@ -9969,7 +9811,7 @@
                     <a:bodyPr/>
                     <a:lstStyle/>
                     <a:p>
-                      <a:pPr indent="0" marL="0">
+                      <a:pPr marL="0" indent="0">
                         <a:buNone/>
                       </a:pPr>
                       <a:r>
@@ -9990,7 +9832,7 @@
                       </a:endParaRPr>
                     </a:p>
                   </a:txBody>
-                  <a:tcPr marL="91440" marR="91440" marT="45720" marB="45720">
+                  <a:tcPr>
                     <a:lnL w="6350" cap="flat" cmpd="sng" algn="ctr">
                       <a:solidFill>
                         <a:srgbClr val="E2E8F0"/>
@@ -10037,7 +9879,7 @@
                     <a:bodyPr/>
                     <a:lstStyle/>
                     <a:p>
-                      <a:pPr indent="0" marL="0">
+                      <a:pPr marL="0" indent="0">
                         <a:buNone/>
                       </a:pPr>
                       <a:r>
@@ -10058,7 +9900,7 @@
                       </a:endParaRPr>
                     </a:p>
                   </a:txBody>
-                  <a:tcPr marL="91440" marR="91440" marT="45720" marB="45720">
+                  <a:tcPr>
                     <a:lnL w="6350" cap="flat" cmpd="sng" algn="ctr">
                       <a:solidFill>
                         <a:srgbClr val="E2E8F0"/>
@@ -10105,7 +9947,7 @@
                     <a:bodyPr/>
                     <a:lstStyle/>
                     <a:p>
-                      <a:pPr indent="0" marL="0">
+                      <a:pPr marL="0" indent="0">
                         <a:buNone/>
                       </a:pPr>
                       <a:r>
@@ -10126,7 +9968,7 @@
                       </a:endParaRPr>
                     </a:p>
                   </a:txBody>
-                  <a:tcPr marL="91440" marR="91440" marT="45720" marB="45720">
+                  <a:tcPr>
                     <a:lnL w="6350" cap="flat" cmpd="sng" algn="ctr">
                       <a:solidFill>
                         <a:srgbClr val="E2E8F0"/>
@@ -10168,6 +10010,11 @@
                     </a:solidFill>
                   </a:tcPr>
                 </a:tc>
+                <a:extLst>
+                  <a:ext uri="{0D108BD9-81ED-4DB2-BD59-A6C34878D82A}">
+                    <a16:rowId xmlns:a16="http://schemas.microsoft.com/office/drawing/2014/main" val="10003"/>
+                  </a:ext>
+                </a:extLst>
               </a:tr>
               <a:tr h="292608">
                 <a:tc>
@@ -10175,7 +10022,7 @@
                     <a:bodyPr/>
                     <a:lstStyle/>
                     <a:p>
-                      <a:pPr indent="0" marL="0">
+                      <a:pPr marL="0" indent="0">
                         <a:buNone/>
                       </a:pPr>
                       <a:r>
@@ -10196,7 +10043,7 @@
                       </a:endParaRPr>
                     </a:p>
                   </a:txBody>
-                  <a:tcPr marL="91440" marR="91440" marT="45720" marB="45720">
+                  <a:tcPr>
                     <a:lnL w="6350" cap="flat" cmpd="sng" algn="ctr">
                       <a:solidFill>
                         <a:srgbClr val="E2E8F0"/>
@@ -10243,7 +10090,7 @@
                     <a:bodyPr/>
                     <a:lstStyle/>
                     <a:p>
-                      <a:pPr indent="0" marL="0">
+                      <a:pPr marL="0" indent="0">
                         <a:buNone/>
                       </a:pPr>
                       <a:r>
@@ -10264,7 +10111,7 @@
                       </a:endParaRPr>
                     </a:p>
                   </a:txBody>
-                  <a:tcPr marL="91440" marR="91440" marT="45720" marB="45720">
+                  <a:tcPr>
                     <a:lnL w="6350" cap="flat" cmpd="sng" algn="ctr">
                       <a:solidFill>
                         <a:srgbClr val="E2E8F0"/>
@@ -10311,7 +10158,7 @@
                     <a:bodyPr/>
                     <a:lstStyle/>
                     <a:p>
-                      <a:pPr indent="0" marL="0">
+                      <a:pPr marL="0" indent="0">
                         <a:buNone/>
                       </a:pPr>
                       <a:r>
@@ -10332,7 +10179,7 @@
                       </a:endParaRPr>
                     </a:p>
                   </a:txBody>
-                  <a:tcPr marL="91440" marR="91440" marT="45720" marB="45720">
+                  <a:tcPr>
                     <a:lnL w="6350" cap="flat" cmpd="sng" algn="ctr">
                       <a:solidFill>
                         <a:srgbClr val="E2E8F0"/>
@@ -10379,7 +10226,7 @@
                     <a:bodyPr/>
                     <a:lstStyle/>
                     <a:p>
-                      <a:pPr indent="0" marL="0">
+                      <a:pPr marL="0" indent="0">
                         <a:buNone/>
                       </a:pPr>
                       <a:r>
@@ -10400,7 +10247,7 @@
                       </a:endParaRPr>
                     </a:p>
                   </a:txBody>
-                  <a:tcPr marL="91440" marR="91440" marT="45720" marB="45720">
+                  <a:tcPr>
                     <a:lnL w="6350" cap="flat" cmpd="sng" algn="ctr">
                       <a:solidFill>
                         <a:srgbClr val="E2E8F0"/>
@@ -10442,6 +10289,11 @@
                     </a:solidFill>
                   </a:tcPr>
                 </a:tc>
+                <a:extLst>
+                  <a:ext uri="{0D108BD9-81ED-4DB2-BD59-A6C34878D82A}">
+                    <a16:rowId xmlns:a16="http://schemas.microsoft.com/office/drawing/2014/main" val="10004"/>
+                  </a:ext>
+                </a:extLst>
               </a:tr>
               <a:tr h="292608">
                 <a:tc>
@@ -10449,7 +10301,7 @@
                     <a:bodyPr/>
                     <a:lstStyle/>
                     <a:p>
-                      <a:pPr indent="0" marL="0">
+                      <a:pPr marL="0" indent="0">
                         <a:buNone/>
                       </a:pPr>
                       <a:r>
@@ -10470,7 +10322,7 @@
                       </a:endParaRPr>
                     </a:p>
                   </a:txBody>
-                  <a:tcPr marL="91440" marR="91440" marT="45720" marB="45720">
+                  <a:tcPr>
                     <a:lnL w="6350" cap="flat" cmpd="sng" algn="ctr">
                       <a:solidFill>
                         <a:srgbClr val="E2E8F0"/>
@@ -10517,7 +10369,7 @@
                     <a:bodyPr/>
                     <a:lstStyle/>
                     <a:p>
-                      <a:pPr indent="0" marL="0">
+                      <a:pPr marL="0" indent="0">
                         <a:buNone/>
                       </a:pPr>
                       <a:r>
@@ -10538,7 +10390,7 @@
                       </a:endParaRPr>
                     </a:p>
                   </a:txBody>
-                  <a:tcPr marL="91440" marR="91440" marT="45720" marB="45720">
+                  <a:tcPr>
                     <a:lnL w="6350" cap="flat" cmpd="sng" algn="ctr">
                       <a:solidFill>
                         <a:srgbClr val="E2E8F0"/>
@@ -10585,7 +10437,7 @@
                     <a:bodyPr/>
                     <a:lstStyle/>
                     <a:p>
-                      <a:pPr indent="0" marL="0">
+                      <a:pPr marL="0" indent="0">
                         <a:buNone/>
                       </a:pPr>
                       <a:r>
@@ -10606,7 +10458,7 @@
                       </a:endParaRPr>
                     </a:p>
                   </a:txBody>
-                  <a:tcPr marL="91440" marR="91440" marT="45720" marB="45720">
+                  <a:tcPr>
                     <a:lnL w="6350" cap="flat" cmpd="sng" algn="ctr">
                       <a:solidFill>
                         <a:srgbClr val="E2E8F0"/>
@@ -10653,7 +10505,7 @@
                     <a:bodyPr/>
                     <a:lstStyle/>
                     <a:p>
-                      <a:pPr indent="0" marL="0">
+                      <a:pPr marL="0" indent="0">
                         <a:buNone/>
                       </a:pPr>
                       <a:r>
@@ -10674,7 +10526,7 @@
                       </a:endParaRPr>
                     </a:p>
                   </a:txBody>
-                  <a:tcPr marL="91440" marR="91440" marT="45720" marB="45720">
+                  <a:tcPr>
                     <a:lnL w="6350" cap="flat" cmpd="sng" algn="ctr">
                       <a:solidFill>
                         <a:srgbClr val="E2E8F0"/>
@@ -10716,6 +10568,11 @@
                     </a:solidFill>
                   </a:tcPr>
                 </a:tc>
+                <a:extLst>
+                  <a:ext uri="{0D108BD9-81ED-4DB2-BD59-A6C34878D82A}">
+                    <a16:rowId xmlns:a16="http://schemas.microsoft.com/office/drawing/2014/main" val="10005"/>
+                  </a:ext>
+                </a:extLst>
               </a:tr>
               <a:tr h="292608">
                 <a:tc>
@@ -10723,7 +10580,7 @@
                     <a:bodyPr/>
                     <a:lstStyle/>
                     <a:p>
-                      <a:pPr indent="0" marL="0">
+                      <a:pPr marL="0" indent="0">
                         <a:buNone/>
                       </a:pPr>
                       <a:r>
@@ -10744,7 +10601,7 @@
                       </a:endParaRPr>
                     </a:p>
                   </a:txBody>
-                  <a:tcPr marL="91440" marR="91440" marT="45720" marB="45720">
+                  <a:tcPr>
                     <a:lnL w="6350" cap="flat" cmpd="sng" algn="ctr">
                       <a:solidFill>
                         <a:srgbClr val="E2E8F0"/>
@@ -10791,7 +10648,7 @@
                     <a:bodyPr/>
                     <a:lstStyle/>
                     <a:p>
-                      <a:pPr indent="0" marL="0">
+                      <a:pPr marL="0" indent="0">
                         <a:buNone/>
                       </a:pPr>
                       <a:r>
@@ -10812,7 +10669,7 @@
                       </a:endParaRPr>
                     </a:p>
                   </a:txBody>
-                  <a:tcPr marL="91440" marR="91440" marT="45720" marB="45720">
+                  <a:tcPr>
                     <a:lnL w="6350" cap="flat" cmpd="sng" algn="ctr">
                       <a:solidFill>
                         <a:srgbClr val="E2E8F0"/>
@@ -10859,7 +10716,7 @@
                     <a:bodyPr/>
                     <a:lstStyle/>
                     <a:p>
-                      <a:pPr indent="0" marL="0">
+                      <a:pPr marL="0" indent="0">
                         <a:buNone/>
                       </a:pPr>
                       <a:r>
@@ -10880,7 +10737,7 @@
                       </a:endParaRPr>
                     </a:p>
                   </a:txBody>
-                  <a:tcPr marL="91440" marR="91440" marT="45720" marB="45720">
+                  <a:tcPr>
                     <a:lnL w="6350" cap="flat" cmpd="sng" algn="ctr">
                       <a:solidFill>
                         <a:srgbClr val="E2E8F0"/>
@@ -10927,7 +10784,7 @@
                     <a:bodyPr/>
                     <a:lstStyle/>
                     <a:p>
-                      <a:pPr indent="0" marL="0">
+                      <a:pPr marL="0" indent="0">
                         <a:buNone/>
                       </a:pPr>
                       <a:r>
@@ -10948,7 +10805,7 @@
                       </a:endParaRPr>
                     </a:p>
                   </a:txBody>
-                  <a:tcPr marL="91440" marR="91440" marT="45720" marB="45720">
+                  <a:tcPr>
                     <a:lnL w="6350" cap="flat" cmpd="sng" algn="ctr">
                       <a:solidFill>
                         <a:srgbClr val="E2E8F0"/>
@@ -10990,6 +10847,11 @@
                     </a:solidFill>
                   </a:tcPr>
                 </a:tc>
+                <a:extLst>
+                  <a:ext uri="{0D108BD9-81ED-4DB2-BD59-A6C34878D82A}">
+                    <a16:rowId xmlns:a16="http://schemas.microsoft.com/office/drawing/2014/main" val="10006"/>
+                  </a:ext>
+                </a:extLst>
               </a:tr>
               <a:tr h="292608">
                 <a:tc>
@@ -10997,7 +10859,7 @@
                     <a:bodyPr/>
                     <a:lstStyle/>
                     <a:p>
-                      <a:pPr indent="0" marL="0">
+                      <a:pPr marL="0" indent="0">
                         <a:buNone/>
                       </a:pPr>
                       <a:r>
@@ -11018,7 +10880,7 @@
                       </a:endParaRPr>
                     </a:p>
                   </a:txBody>
-                  <a:tcPr marL="91440" marR="91440" marT="45720" marB="45720">
+                  <a:tcPr>
                     <a:lnL w="6350" cap="flat" cmpd="sng" algn="ctr">
                       <a:solidFill>
                         <a:srgbClr val="E2E8F0"/>
@@ -11065,7 +10927,7 @@
                     <a:bodyPr/>
                     <a:lstStyle/>
                     <a:p>
-                      <a:pPr indent="0" marL="0">
+                      <a:pPr marL="0" indent="0">
                         <a:buNone/>
                       </a:pPr>
                       <a:r>
@@ -11086,7 +10948,7 @@
                       </a:endParaRPr>
                     </a:p>
                   </a:txBody>
-                  <a:tcPr marL="91440" marR="91440" marT="45720" marB="45720">
+                  <a:tcPr>
                     <a:lnL w="6350" cap="flat" cmpd="sng" algn="ctr">
                       <a:solidFill>
                         <a:srgbClr val="E2E8F0"/>
@@ -11133,7 +10995,7 @@
                     <a:bodyPr/>
                     <a:lstStyle/>
                     <a:p>
-                      <a:pPr indent="0" marL="0">
+                      <a:pPr marL="0" indent="0">
                         <a:buNone/>
                       </a:pPr>
                       <a:r>
@@ -11154,7 +11016,7 @@
                       </a:endParaRPr>
                     </a:p>
                   </a:txBody>
-                  <a:tcPr marL="91440" marR="91440" marT="45720" marB="45720">
+                  <a:tcPr>
                     <a:lnL w="6350" cap="flat" cmpd="sng" algn="ctr">
                       <a:solidFill>
                         <a:srgbClr val="E2E8F0"/>
@@ -11201,7 +11063,7 @@
                     <a:bodyPr/>
                     <a:lstStyle/>
                     <a:p>
-                      <a:pPr indent="0" marL="0">
+                      <a:pPr marL="0" indent="0">
                         <a:buNone/>
                       </a:pPr>
                       <a:r>
@@ -11222,7 +11084,7 @@
                       </a:endParaRPr>
                     </a:p>
                   </a:txBody>
-                  <a:tcPr marL="91440" marR="91440" marT="45720" marB="45720">
+                  <a:tcPr>
                     <a:lnL w="6350" cap="flat" cmpd="sng" algn="ctr">
                       <a:solidFill>
                         <a:srgbClr val="E2E8F0"/>
@@ -11264,6 +11126,11 @@
                     </a:solidFill>
                   </a:tcPr>
                 </a:tc>
+                <a:extLst>
+                  <a:ext uri="{0D108BD9-81ED-4DB2-BD59-A6C34878D82A}">
+                    <a16:rowId xmlns:a16="http://schemas.microsoft.com/office/drawing/2014/main" val="10007"/>
+                  </a:ext>
+                </a:extLst>
               </a:tr>
               <a:tr h="292608">
                 <a:tc>
@@ -11271,7 +11138,7 @@
                     <a:bodyPr/>
                     <a:lstStyle/>
                     <a:p>
-                      <a:pPr indent="0" marL="0">
+                      <a:pPr marL="0" indent="0">
                         <a:buNone/>
                       </a:pPr>
                       <a:r>
@@ -11292,7 +11159,7 @@
                       </a:endParaRPr>
                     </a:p>
                   </a:txBody>
-                  <a:tcPr marL="91440" marR="91440" marT="45720" marB="45720">
+                  <a:tcPr>
                     <a:lnL w="6350" cap="flat" cmpd="sng" algn="ctr">
                       <a:solidFill>
                         <a:srgbClr val="E2E8F0"/>
@@ -11339,7 +11206,7 @@
                     <a:bodyPr/>
                     <a:lstStyle/>
                     <a:p>
-                      <a:pPr indent="0" marL="0">
+                      <a:pPr marL="0" indent="0">
                         <a:buNone/>
                       </a:pPr>
                       <a:r>
@@ -11360,7 +11227,7 @@
                       </a:endParaRPr>
                     </a:p>
                   </a:txBody>
-                  <a:tcPr marL="91440" marR="91440" marT="45720" marB="45720">
+                  <a:tcPr>
                     <a:lnL w="6350" cap="flat" cmpd="sng" algn="ctr">
                       <a:solidFill>
                         <a:srgbClr val="E2E8F0"/>
@@ -11407,7 +11274,7 @@
                     <a:bodyPr/>
                     <a:lstStyle/>
                     <a:p>
-                      <a:pPr indent="0" marL="0">
+                      <a:pPr marL="0" indent="0">
                         <a:buNone/>
                       </a:pPr>
                       <a:r>
@@ -11428,7 +11295,7 @@
                       </a:endParaRPr>
                     </a:p>
                   </a:txBody>
-                  <a:tcPr marL="91440" marR="91440" marT="45720" marB="45720">
+                  <a:tcPr>
                     <a:lnL w="6350" cap="flat" cmpd="sng" algn="ctr">
                       <a:solidFill>
                         <a:srgbClr val="E2E8F0"/>
@@ -11475,7 +11342,7 @@
                     <a:bodyPr/>
                     <a:lstStyle/>
                     <a:p>
-                      <a:pPr indent="0" marL="0">
+                      <a:pPr marL="0" indent="0">
                         <a:buNone/>
                       </a:pPr>
                       <a:r>
@@ -11496,7 +11363,7 @@
                       </a:endParaRPr>
                     </a:p>
                   </a:txBody>
-                  <a:tcPr marL="91440" marR="91440" marT="45720" marB="45720">
+                  <a:tcPr>
                     <a:lnL w="6350" cap="flat" cmpd="sng" algn="ctr">
                       <a:solidFill>
                         <a:srgbClr val="E2E8F0"/>
@@ -11538,6 +11405,11 @@
                     </a:solidFill>
                   </a:tcPr>
                 </a:tc>
+                <a:extLst>
+                  <a:ext uri="{0D108BD9-81ED-4DB2-BD59-A6C34878D82A}">
+                    <a16:rowId xmlns:a16="http://schemas.microsoft.com/office/drawing/2014/main" val="10008"/>
+                  </a:ext>
+                </a:extLst>
               </a:tr>
               <a:tr h="292608">
                 <a:tc>
@@ -11545,7 +11417,7 @@
                     <a:bodyPr/>
                     <a:lstStyle/>
                     <a:p>
-                      <a:pPr indent="0" marL="0">
+                      <a:pPr marL="0" indent="0">
                         <a:buNone/>
                       </a:pPr>
                       <a:r>
@@ -11566,7 +11438,7 @@
                       </a:endParaRPr>
                     </a:p>
                   </a:txBody>
-                  <a:tcPr marL="91440" marR="91440" marT="45720" marB="45720">
+                  <a:tcPr>
                     <a:lnL w="6350" cap="flat" cmpd="sng" algn="ctr">
                       <a:solidFill>
                         <a:srgbClr val="E2E8F0"/>
@@ -11613,7 +11485,7 @@
                     <a:bodyPr/>
                     <a:lstStyle/>
                     <a:p>
-                      <a:pPr indent="0" marL="0">
+                      <a:pPr marL="0" indent="0">
                         <a:buNone/>
                       </a:pPr>
                       <a:r>
@@ -11634,7 +11506,7 @@
                       </a:endParaRPr>
                     </a:p>
                   </a:txBody>
-                  <a:tcPr marL="91440" marR="91440" marT="45720" marB="45720">
+                  <a:tcPr>
                     <a:lnL w="6350" cap="flat" cmpd="sng" algn="ctr">
                       <a:solidFill>
                         <a:srgbClr val="E2E8F0"/>
@@ -11681,7 +11553,7 @@
                     <a:bodyPr/>
                     <a:lstStyle/>
                     <a:p>
-                      <a:pPr indent="0" marL="0">
+                      <a:pPr marL="0" indent="0">
                         <a:buNone/>
                       </a:pPr>
                       <a:r>
@@ -11702,7 +11574,7 @@
                       </a:endParaRPr>
                     </a:p>
                   </a:txBody>
-                  <a:tcPr marL="91440" marR="91440" marT="45720" marB="45720">
+                  <a:tcPr>
                     <a:lnL w="6350" cap="flat" cmpd="sng" algn="ctr">
                       <a:solidFill>
                         <a:srgbClr val="E2E8F0"/>
@@ -11749,7 +11621,7 @@
                     <a:bodyPr/>
                     <a:lstStyle/>
                     <a:p>
-                      <a:pPr indent="0" marL="0">
+                      <a:pPr marL="0" indent="0">
                         <a:buNone/>
                       </a:pPr>
                       <a:r>
@@ -11770,7 +11642,7 @@
                       </a:endParaRPr>
                     </a:p>
                   </a:txBody>
-                  <a:tcPr marL="91440" marR="91440" marT="45720" marB="45720">
+                  <a:tcPr>
                     <a:lnL w="6350" cap="flat" cmpd="sng" algn="ctr">
                       <a:solidFill>
                         <a:srgbClr val="E2E8F0"/>
@@ -11812,6 +11684,11 @@
                     </a:solidFill>
                   </a:tcPr>
                 </a:tc>
+                <a:extLst>
+                  <a:ext uri="{0D108BD9-81ED-4DB2-BD59-A6C34878D82A}">
+                    <a16:rowId xmlns:a16="http://schemas.microsoft.com/office/drawing/2014/main" val="10009"/>
+                  </a:ext>
+                </a:extLst>
               </a:tr>
               <a:tr h="292608">
                 <a:tc>
@@ -11819,7 +11696,7 @@
                     <a:bodyPr/>
                     <a:lstStyle/>
                     <a:p>
-                      <a:pPr indent="0" marL="0">
+                      <a:pPr marL="0" indent="0">
                         <a:buNone/>
                       </a:pPr>
                       <a:r>
@@ -11840,7 +11717,7 @@
                       </a:endParaRPr>
                     </a:p>
                   </a:txBody>
-                  <a:tcPr marL="91440" marR="91440" marT="45720" marB="45720">
+                  <a:tcPr>
                     <a:lnL w="6350" cap="flat" cmpd="sng" algn="ctr">
                       <a:solidFill>
                         <a:srgbClr val="E2E8F0"/>
@@ -11887,7 +11764,7 @@
                     <a:bodyPr/>
                     <a:lstStyle/>
                     <a:p>
-                      <a:pPr indent="0" marL="0">
+                      <a:pPr marL="0" indent="0">
                         <a:buNone/>
                       </a:pPr>
                       <a:r>
@@ -11908,7 +11785,7 @@
                       </a:endParaRPr>
                     </a:p>
                   </a:txBody>
-                  <a:tcPr marL="91440" marR="91440" marT="45720" marB="45720">
+                  <a:tcPr>
                     <a:lnL w="6350" cap="flat" cmpd="sng" algn="ctr">
                       <a:solidFill>
                         <a:srgbClr val="E2E8F0"/>
@@ -11955,7 +11832,7 @@
                     <a:bodyPr/>
                     <a:lstStyle/>
                     <a:p>
-                      <a:pPr indent="0" marL="0">
+                      <a:pPr marL="0" indent="0">
                         <a:buNone/>
                       </a:pPr>
                       <a:r>
@@ -11976,7 +11853,7 @@
                       </a:endParaRPr>
                     </a:p>
                   </a:txBody>
-                  <a:tcPr marL="91440" marR="91440" marT="45720" marB="45720">
+                  <a:tcPr>
                     <a:lnL w="6350" cap="flat" cmpd="sng" algn="ctr">
                       <a:solidFill>
                         <a:srgbClr val="E2E8F0"/>
@@ -12023,7 +11900,7 @@
                     <a:bodyPr/>
                     <a:lstStyle/>
                     <a:p>
-                      <a:pPr indent="0" marL="0">
+                      <a:pPr marL="0" indent="0">
                         <a:buNone/>
                       </a:pPr>
                       <a:r>
@@ -12044,7 +11921,7 @@
                       </a:endParaRPr>
                     </a:p>
                   </a:txBody>
-                  <a:tcPr marL="91440" marR="91440" marT="45720" marB="45720">
+                  <a:tcPr>
                     <a:lnL w="6350" cap="flat" cmpd="sng" algn="ctr">
                       <a:solidFill>
                         <a:srgbClr val="E2E8F0"/>
@@ -12086,6 +11963,11 @@
                     </a:solidFill>
                   </a:tcPr>
                 </a:tc>
+                <a:extLst>
+                  <a:ext uri="{0D108BD9-81ED-4DB2-BD59-A6C34878D82A}">
+                    <a16:rowId xmlns:a16="http://schemas.microsoft.com/office/drawing/2014/main" val="10010"/>
+                  </a:ext>
+                </a:extLst>
               </a:tr>
             </a:tbl>
           </a:graphicData>
@@ -12107,6 +11989,7 @@
         <a:solidFill>
           <a:srgbClr val="F5F6FA"/>
         </a:solidFill>
+        <a:effectLst/>
       </p:bgPr>
     </p:bg>
     <p:spTree>
@@ -12169,11 +12052,11 @@
           <a:bodyPr wrap="square" lIns="0" tIns="0" rIns="0" bIns="0" rtlCol="0" anchor="ctr"/>
           <a:lstStyle/>
           <a:p>
-            <a:pPr indent="0" marL="0">
-              <a:buNone/>
-            </a:pPr>
-            <a:r>
-              <a:rPr lang="en-US" sz="800" b="1" spc="300" kern="0" dirty="0">
+            <a:pPr marL="0" indent="0">
+              <a:buNone/>
+            </a:pPr>
+            <a:r>
+              <a:rPr lang="en-US" sz="800" b="1" kern="0" spc="300" dirty="0">
                 <a:solidFill>
                   <a:srgbClr val="C9993A"/>
                 </a:solidFill>
@@ -12205,7 +12088,7 @@
           <a:bodyPr wrap="square" lIns="0" tIns="0" rIns="0" bIns="0" rtlCol="0" anchor="ctr"/>
           <a:lstStyle/>
           <a:p>
-            <a:pPr indent="0" marL="0">
+            <a:pPr marL="0" indent="0">
               <a:buNone/>
             </a:pPr>
             <a:r>
@@ -12269,7 +12152,7 @@
           <a:bodyPr wrap="square" lIns="0" tIns="0" rIns="0" bIns="0" rtlCol="0" anchor="ctr"/>
           <a:lstStyle/>
           <a:p>
-            <a:pPr indent="0" marL="0">
+            <a:pPr marL="0" indent="0">
               <a:buNone/>
             </a:pPr>
             <a:r>
@@ -12333,7 +12216,7 @@
           <a:bodyPr wrap="square" lIns="0" tIns="0" rIns="0" bIns="0" rtlCol="0" anchor="ctr"/>
           <a:lstStyle/>
           <a:p>
-            <a:pPr algn="ctr" indent="0" marL="0">
+            <a:pPr marL="0" indent="0" algn="ctr">
               <a:buNone/>
             </a:pPr>
             <a:r>
@@ -12369,7 +12252,7 @@
           <a:bodyPr wrap="square" lIns="0" tIns="0" rIns="0" bIns="0" rtlCol="0" anchor="ctr"/>
           <a:lstStyle/>
           <a:p>
-            <a:pPr indent="0" marL="0">
+            <a:pPr marL="0" indent="0">
               <a:buNone/>
             </a:pPr>
             <a:r>
@@ -12408,7 +12291,7 @@
           <a:bodyPr wrap="square" lIns="0" tIns="0" rIns="0" bIns="0" rtlCol="0" anchor="ctr"/>
           <a:lstStyle/>
           <a:p>
-            <a:pPr indent="0" marL="0">
+            <a:pPr marL="0" indent="0">
               <a:buNone/>
             </a:pPr>
             <a:r>
@@ -12472,7 +12355,7 @@
           <a:bodyPr wrap="square" lIns="0" tIns="0" rIns="0" bIns="0" rtlCol="0" anchor="ctr"/>
           <a:lstStyle/>
           <a:p>
-            <a:pPr algn="ctr" indent="0" marL="0">
+            <a:pPr marL="0" indent="0" algn="ctr">
               <a:buNone/>
             </a:pPr>
             <a:r>
@@ -12508,7 +12391,7 @@
           <a:bodyPr wrap="square" lIns="0" tIns="0" rIns="0" bIns="0" rtlCol="0" anchor="ctr"/>
           <a:lstStyle/>
           <a:p>
-            <a:pPr indent="0" marL="0">
+            <a:pPr marL="0" indent="0">
               <a:buNone/>
             </a:pPr>
             <a:r>
@@ -12547,7 +12430,7 @@
           <a:bodyPr wrap="square" lIns="0" tIns="0" rIns="0" bIns="0" rtlCol="0" anchor="ctr"/>
           <a:lstStyle/>
           <a:p>
-            <a:pPr indent="0" marL="0">
+            <a:pPr marL="0" indent="0">
               <a:buNone/>
             </a:pPr>
             <a:r>
@@ -12611,7 +12494,7 @@
           <a:bodyPr wrap="square" lIns="0" tIns="0" rIns="0" bIns="0" rtlCol="0" anchor="ctr"/>
           <a:lstStyle/>
           <a:p>
-            <a:pPr algn="ctr" indent="0" marL="0">
+            <a:pPr marL="0" indent="0" algn="ctr">
               <a:buNone/>
             </a:pPr>
             <a:r>
@@ -12647,7 +12530,7 @@
           <a:bodyPr wrap="square" lIns="0" tIns="0" rIns="0" bIns="0" rtlCol="0" anchor="ctr"/>
           <a:lstStyle/>
           <a:p>
-            <a:pPr indent="0" marL="0">
+            <a:pPr marL="0" indent="0">
               <a:buNone/>
             </a:pPr>
             <a:r>
@@ -12686,7 +12569,7 @@
           <a:bodyPr wrap="square" lIns="0" tIns="0" rIns="0" bIns="0" rtlCol="0" anchor="ctr"/>
           <a:lstStyle/>
           <a:p>
-            <a:pPr indent="0" marL="0">
+            <a:pPr marL="0" indent="0">
               <a:buNone/>
             </a:pPr>
             <a:r>
@@ -12750,7 +12633,7 @@
           <a:bodyPr wrap="square" lIns="0" tIns="0" rIns="0" bIns="0" rtlCol="0" anchor="ctr"/>
           <a:lstStyle/>
           <a:p>
-            <a:pPr algn="ctr" indent="0" marL="0">
+            <a:pPr marL="0" indent="0" algn="ctr">
               <a:buNone/>
             </a:pPr>
             <a:r>
@@ -12786,7 +12669,7 @@
           <a:bodyPr wrap="square" lIns="0" tIns="0" rIns="0" bIns="0" rtlCol="0" anchor="ctr"/>
           <a:lstStyle/>
           <a:p>
-            <a:pPr indent="0" marL="0">
+            <a:pPr marL="0" indent="0">
               <a:buNone/>
             </a:pPr>
             <a:r>
@@ -12825,7 +12708,7 @@
           <a:bodyPr wrap="square" lIns="0" tIns="0" rIns="0" bIns="0" rtlCol="0" anchor="ctr"/>
           <a:lstStyle/>
           <a:p>
-            <a:pPr indent="0" marL="0">
+            <a:pPr marL="0" indent="0">
               <a:buNone/>
             </a:pPr>
             <a:r>
@@ -12889,7 +12772,7 @@
           <a:bodyPr wrap="square" lIns="0" tIns="0" rIns="0" bIns="0" rtlCol="0" anchor="ctr"/>
           <a:lstStyle/>
           <a:p>
-            <a:pPr algn="ctr" indent="0" marL="0">
+            <a:pPr marL="0" indent="0" algn="ctr">
               <a:buNone/>
             </a:pPr>
             <a:r>
@@ -12925,7 +12808,7 @@
           <a:bodyPr wrap="square" lIns="0" tIns="0" rIns="0" bIns="0" rtlCol="0" anchor="ctr"/>
           <a:lstStyle/>
           <a:p>
-            <a:pPr indent="0" marL="0">
+            <a:pPr marL="0" indent="0">
               <a:buNone/>
             </a:pPr>
             <a:r>
@@ -12964,7 +12847,7 @@
           <a:bodyPr wrap="square" lIns="0" tIns="0" rIns="0" bIns="0" rtlCol="0" anchor="ctr"/>
           <a:lstStyle/>
           <a:p>
-            <a:pPr indent="0" marL="0">
+            <a:pPr marL="0" indent="0">
               <a:buNone/>
             </a:pPr>
             <a:r>
@@ -13028,7 +12911,7 @@
           <a:bodyPr wrap="square" lIns="0" tIns="0" rIns="0" bIns="0" rtlCol="0" anchor="ctr"/>
           <a:lstStyle/>
           <a:p>
-            <a:pPr algn="ctr" indent="0" marL="0">
+            <a:pPr marL="0" indent="0" algn="ctr">
               <a:buNone/>
             </a:pPr>
             <a:r>
@@ -13064,7 +12947,7 @@
           <a:bodyPr wrap="square" lIns="0" tIns="0" rIns="0" bIns="0" rtlCol="0" anchor="ctr"/>
           <a:lstStyle/>
           <a:p>
-            <a:pPr indent="0" marL="0">
+            <a:pPr marL="0" indent="0">
               <a:buNone/>
             </a:pPr>
             <a:r>
@@ -13103,7 +12986,7 @@
           <a:bodyPr wrap="square" lIns="0" tIns="0" rIns="0" bIns="0" rtlCol="0" anchor="ctr"/>
           <a:lstStyle/>
           <a:p>
-            <a:pPr indent="0" marL="0">
+            <a:pPr marL="0" indent="0">
               <a:buNone/>
             </a:pPr>
             <a:r>
@@ -13167,7 +13050,7 @@
           <a:bodyPr wrap="square" lIns="0" tIns="0" rIns="0" bIns="0" rtlCol="0" anchor="ctr"/>
           <a:lstStyle/>
           <a:p>
-            <a:pPr algn="ctr" indent="0" marL="0">
+            <a:pPr marL="0" indent="0" algn="ctr">
               <a:buNone/>
             </a:pPr>
             <a:r>
@@ -13203,7 +13086,7 @@
           <a:bodyPr wrap="square" lIns="0" tIns="0" rIns="0" bIns="0" rtlCol="0" anchor="ctr"/>
           <a:lstStyle/>
           <a:p>
-            <a:pPr indent="0" marL="0">
+            <a:pPr marL="0" indent="0">
               <a:buNone/>
             </a:pPr>
             <a:r>
@@ -13242,7 +13125,7 @@
           <a:bodyPr wrap="square" lIns="0" tIns="0" rIns="0" bIns="0" rtlCol="0" anchor="ctr"/>
           <a:lstStyle/>
           <a:p>
-            <a:pPr indent="0" marL="0">
+            <a:pPr marL="0" indent="0">
               <a:buNone/>
             </a:pPr>
             <a:r>
@@ -13306,7 +13189,7 @@
           <a:bodyPr wrap="square" lIns="0" tIns="0" rIns="0" bIns="0" rtlCol="0" anchor="ctr"/>
           <a:lstStyle/>
           <a:p>
-            <a:pPr algn="ctr" indent="0" marL="0">
+            <a:pPr marL="0" indent="0" algn="ctr">
               <a:buNone/>
             </a:pPr>
             <a:r>
@@ -13342,7 +13225,7 @@
           <a:bodyPr wrap="square" lIns="0" tIns="0" rIns="0" bIns="0" rtlCol="0" anchor="ctr"/>
           <a:lstStyle/>
           <a:p>
-            <a:pPr indent="0" marL="0">
+            <a:pPr marL="0" indent="0">
               <a:buNone/>
             </a:pPr>
             <a:r>
@@ -13381,7 +13264,7 @@
           <a:bodyPr wrap="square" lIns="0" tIns="0" rIns="0" bIns="0" rtlCol="0" anchor="ctr"/>
           <a:lstStyle/>
           <a:p>
-            <a:pPr indent="0" marL="0">
+            <a:pPr marL="0" indent="0">
               <a:buNone/>
             </a:pPr>
             <a:r>
@@ -13445,7 +13328,7 @@
           <a:bodyPr wrap="square" lIns="0" tIns="0" rIns="0" bIns="0" rtlCol="0" anchor="ctr"/>
           <a:lstStyle/>
           <a:p>
-            <a:pPr algn="ctr" indent="0" marL="0">
+            <a:pPr marL="0" indent="0" algn="ctr">
               <a:buNone/>
             </a:pPr>
             <a:r>
@@ -13481,7 +13364,7 @@
           <a:bodyPr wrap="square" lIns="0" tIns="0" rIns="0" bIns="0" rtlCol="0" anchor="ctr"/>
           <a:lstStyle/>
           <a:p>
-            <a:pPr indent="0" marL="0">
+            <a:pPr marL="0" indent="0">
               <a:buNone/>
             </a:pPr>
             <a:r>
@@ -13520,7 +13403,7 @@
           <a:bodyPr wrap="square" lIns="0" tIns="0" rIns="0" bIns="0" rtlCol="0" anchor="ctr"/>
           <a:lstStyle/>
           <a:p>
-            <a:pPr indent="0" marL="0">
+            <a:pPr marL="0" indent="0">
               <a:buNone/>
             </a:pPr>
             <a:r>
@@ -13584,7 +13467,7 @@
           <a:bodyPr wrap="square" lIns="0" tIns="0" rIns="0" bIns="0" rtlCol="0" anchor="ctr"/>
           <a:lstStyle/>
           <a:p>
-            <a:pPr algn="ctr" indent="0" marL="0">
+            <a:pPr marL="0" indent="0" algn="ctr">
               <a:buNone/>
             </a:pPr>
             <a:r>
@@ -13620,7 +13503,7 @@
           <a:bodyPr wrap="square" lIns="0" tIns="0" rIns="0" bIns="0" rtlCol="0" anchor="ctr"/>
           <a:lstStyle/>
           <a:p>
-            <a:pPr indent="0" marL="0">
+            <a:pPr marL="0" indent="0">
               <a:buNone/>
             </a:pPr>
             <a:r>
@@ -13659,7 +13542,7 @@
           <a:bodyPr wrap="square" lIns="0" tIns="0" rIns="0" bIns="0" rtlCol="0" anchor="ctr"/>
           <a:lstStyle/>
           <a:p>
-            <a:pPr indent="0" marL="0">
+            <a:pPr marL="0" indent="0">
               <a:buNone/>
             </a:pPr>
             <a:r>
@@ -13723,7 +13606,7 @@
           <a:bodyPr wrap="square" lIns="0" tIns="0" rIns="0" bIns="0" rtlCol="0" anchor="ctr"/>
           <a:lstStyle/>
           <a:p>
-            <a:pPr algn="ctr" indent="0" marL="0">
+            <a:pPr marL="0" indent="0" algn="ctr">
               <a:buNone/>
             </a:pPr>
             <a:r>
@@ -13759,7 +13642,7 @@
           <a:bodyPr wrap="square" lIns="0" tIns="0" rIns="0" bIns="0" rtlCol="0" anchor="ctr"/>
           <a:lstStyle/>
           <a:p>
-            <a:pPr indent="0" marL="0">
+            <a:pPr marL="0" indent="0">
               <a:buNone/>
             </a:pPr>
             <a:r>
@@ -13798,7 +13681,7 @@
           <a:bodyPr wrap="square" lIns="0" tIns="0" rIns="0" bIns="0" rtlCol="0" anchor="ctr"/>
           <a:lstStyle/>
           <a:p>
-            <a:pPr indent="0" marL="0">
+            <a:pPr marL="0" indent="0">
               <a:buNone/>
             </a:pPr>
             <a:r>
@@ -13832,6 +13715,7 @@
         <a:solidFill>
           <a:srgbClr val="1B2A4A"/>
         </a:solidFill>
+        <a:effectLst/>
       </p:bgPr>
     </p:bg>
     <p:spTree>
@@ -13894,11 +13778,11 @@
           <a:bodyPr wrap="square" lIns="0" tIns="0" rIns="0" bIns="0" rtlCol="0" anchor="ctr"/>
           <a:lstStyle/>
           <a:p>
-            <a:pPr indent="0" marL="0">
-              <a:buNone/>
-            </a:pPr>
-            <a:r>
-              <a:rPr lang="en-US" sz="800" b="1" spc="300" kern="0" dirty="0">
+            <a:pPr marL="0" indent="0">
+              <a:buNone/>
+            </a:pPr>
+            <a:r>
+              <a:rPr lang="en-US" sz="800" b="1" kern="0" spc="300" dirty="0">
                 <a:solidFill>
                   <a:srgbClr val="C9993A"/>
                 </a:solidFill>
@@ -13930,7 +13814,7 @@
           <a:bodyPr wrap="square" lIns="0" tIns="0" rIns="0" bIns="0" rtlCol="0" anchor="ctr"/>
           <a:lstStyle/>
           <a:p>
-            <a:pPr indent="0" marL="0">
+            <a:pPr marL="0" indent="0">
               <a:buNone/>
             </a:pPr>
             <a:r>
@@ -13969,7 +13853,7 @@
           <a:bodyPr wrap="square" lIns="0" tIns="0" rIns="0" bIns="0" rtlCol="0" anchor="ctr"/>
           <a:lstStyle/>
           <a:p>
-            <a:pPr indent="0" marL="0">
+            <a:pPr marL="0" indent="0">
               <a:buNone/>
             </a:pPr>
             <a:r>
@@ -14083,7 +13967,7 @@
           <a:bodyPr wrap="square" lIns="0" tIns="0" rIns="0" bIns="0" rtlCol="0" anchor="ctr"/>
           <a:lstStyle/>
           <a:p>
-            <a:pPr indent="0" marL="0">
+            <a:pPr marL="0" indent="0">
               <a:buNone/>
             </a:pPr>
             <a:r>
@@ -14119,7 +14003,7 @@
           <a:bodyPr wrap="square" lIns="0" tIns="0" rIns="0" bIns="0" rtlCol="0" anchor="ctr"/>
           <a:lstStyle/>
           <a:p>
-            <a:pPr indent="0" marL="0">
+            <a:pPr marL="0" indent="0">
               <a:buNone/>
             </a:pPr>
             <a:r>
@@ -14158,7 +14042,7 @@
           <a:bodyPr wrap="square" lIns="0" tIns="0" rIns="0" bIns="0" rtlCol="0" anchor="ctr"/>
           <a:lstStyle/>
           <a:p>
-            <a:pPr indent="0" marL="0">
+            <a:pPr marL="0" indent="0">
               <a:buNone/>
             </a:pPr>
             <a:r>
@@ -14222,7 +14106,7 @@
           <a:bodyPr wrap="square" lIns="0" tIns="0" rIns="0" bIns="0" rtlCol="0" anchor="ctr"/>
           <a:lstStyle/>
           <a:p>
-            <a:pPr algn="ctr" indent="0" marL="0">
+            <a:pPr marL="0" indent="0" algn="ctr">
               <a:buNone/>
             </a:pPr>
             <a:r>
@@ -14258,7 +14142,7 @@
           <a:bodyPr wrap="square" lIns="0" tIns="0" rIns="0" bIns="0" rtlCol="0" anchor="ctr"/>
           <a:lstStyle/>
           <a:p>
-            <a:pPr algn="ctr" indent="0" marL="0">
+            <a:pPr marL="0" indent="0" algn="ctr">
               <a:buNone/>
             </a:pPr>
             <a:r>
@@ -14297,7 +14181,7 @@
           <a:bodyPr wrap="square" lIns="0" tIns="0" rIns="0" bIns="0" rtlCol="0" anchor="ctr"/>
           <a:lstStyle/>
           <a:p>
-            <a:pPr algn="ctr" indent="0" marL="0">
+            <a:pPr marL="0" indent="0" algn="ctr">
               <a:buNone/>
             </a:pPr>
             <a:r>
@@ -14408,7 +14292,7 @@
           <a:bodyPr wrap="square" lIns="0" tIns="0" rIns="0" bIns="0" rtlCol="0" anchor="ctr"/>
           <a:lstStyle/>
           <a:p>
-            <a:pPr indent="0" marL="0">
+            <a:pPr marL="0" indent="0">
               <a:buNone/>
             </a:pPr>
             <a:r>
@@ -14444,7 +14328,7 @@
           <a:bodyPr wrap="square" lIns="0" tIns="0" rIns="0" bIns="0" rtlCol="0" anchor="ctr"/>
           <a:lstStyle/>
           <a:p>
-            <a:pPr indent="0" marL="0">
+            <a:pPr marL="0" indent="0">
               <a:buNone/>
             </a:pPr>
             <a:r>
@@ -14483,7 +14367,7 @@
           <a:bodyPr wrap="square" lIns="0" tIns="0" rIns="0" bIns="0" rtlCol="0" anchor="ctr"/>
           <a:lstStyle/>
           <a:p>
-            <a:pPr indent="0" marL="0">
+            <a:pPr marL="0" indent="0">
               <a:buNone/>
             </a:pPr>
             <a:r>
@@ -14547,7 +14431,7 @@
           <a:bodyPr wrap="square" lIns="0" tIns="0" rIns="0" bIns="0" rtlCol="0" anchor="ctr"/>
           <a:lstStyle/>
           <a:p>
-            <a:pPr algn="ctr" indent="0" marL="0">
+            <a:pPr marL="0" indent="0" algn="ctr">
               <a:buNone/>
             </a:pPr>
             <a:r>
@@ -14583,7 +14467,7 @@
           <a:bodyPr wrap="square" lIns="0" tIns="0" rIns="0" bIns="0" rtlCol="0" anchor="ctr"/>
           <a:lstStyle/>
           <a:p>
-            <a:pPr algn="ctr" indent="0" marL="0">
+            <a:pPr marL="0" indent="0" algn="ctr">
               <a:buNone/>
             </a:pPr>
             <a:r>
@@ -14622,7 +14506,7 @@
           <a:bodyPr wrap="square" lIns="0" tIns="0" rIns="0" bIns="0" rtlCol="0" anchor="ctr"/>
           <a:lstStyle/>
           <a:p>
-            <a:pPr algn="ctr" indent="0" marL="0">
+            <a:pPr marL="0" indent="0" algn="ctr">
               <a:buNone/>
             </a:pPr>
             <a:r>
@@ -14733,7 +14617,7 @@
           <a:bodyPr wrap="square" lIns="0" tIns="0" rIns="0" bIns="0" rtlCol="0" anchor="ctr"/>
           <a:lstStyle/>
           <a:p>
-            <a:pPr indent="0" marL="0">
+            <a:pPr marL="0" indent="0">
               <a:buNone/>
             </a:pPr>
             <a:r>
@@ -14769,7 +14653,7 @@
           <a:bodyPr wrap="square" lIns="0" tIns="0" rIns="0" bIns="0" rtlCol="0" anchor="ctr"/>
           <a:lstStyle/>
           <a:p>
-            <a:pPr indent="0" marL="0">
+            <a:pPr marL="0" indent="0">
               <a:buNone/>
             </a:pPr>
             <a:r>
@@ -14808,7 +14692,7 @@
           <a:bodyPr wrap="square" lIns="0" tIns="0" rIns="0" bIns="0" rtlCol="0" anchor="ctr"/>
           <a:lstStyle/>
           <a:p>
-            <a:pPr indent="0" marL="0">
+            <a:pPr marL="0" indent="0">
               <a:buNone/>
             </a:pPr>
             <a:r>
@@ -14872,7 +14756,7 @@
           <a:bodyPr wrap="square" lIns="0" tIns="0" rIns="0" bIns="0" rtlCol="0" anchor="ctr"/>
           <a:lstStyle/>
           <a:p>
-            <a:pPr algn="ctr" indent="0" marL="0">
+            <a:pPr marL="0" indent="0" algn="ctr">
               <a:buNone/>
             </a:pPr>
             <a:r>
@@ -14908,7 +14792,7 @@
           <a:bodyPr wrap="square" lIns="0" tIns="0" rIns="0" bIns="0" rtlCol="0" anchor="ctr"/>
           <a:lstStyle/>
           <a:p>
-            <a:pPr algn="ctr" indent="0" marL="0">
+            <a:pPr marL="0" indent="0" algn="ctr">
               <a:buNone/>
             </a:pPr>
             <a:r>
@@ -14947,7 +14831,7 @@
           <a:bodyPr wrap="square" lIns="0" tIns="0" rIns="0" bIns="0" rtlCol="0" anchor="ctr"/>
           <a:lstStyle/>
           <a:p>
-            <a:pPr algn="ctr" indent="0" marL="0">
+            <a:pPr marL="0" indent="0" algn="ctr">
               <a:buNone/>
             </a:pPr>
             <a:r>
@@ -15058,7 +14942,7 @@
           <a:bodyPr wrap="square" lIns="0" tIns="0" rIns="0" bIns="0" rtlCol="0" anchor="ctr"/>
           <a:lstStyle/>
           <a:p>
-            <a:pPr indent="0" marL="0">
+            <a:pPr marL="0" indent="0">
               <a:buNone/>
             </a:pPr>
             <a:r>
@@ -15094,7 +14978,7 @@
           <a:bodyPr wrap="square" lIns="0" tIns="0" rIns="0" bIns="0" rtlCol="0" anchor="ctr"/>
           <a:lstStyle/>
           <a:p>
-            <a:pPr indent="0" marL="0">
+            <a:pPr marL="0" indent="0">
               <a:buNone/>
             </a:pPr>
             <a:r>
@@ -15133,7 +15017,7 @@
           <a:bodyPr wrap="square" lIns="0" tIns="0" rIns="0" bIns="0" rtlCol="0" anchor="ctr"/>
           <a:lstStyle/>
           <a:p>
-            <a:pPr indent="0" marL="0">
+            <a:pPr marL="0" indent="0">
               <a:buNone/>
             </a:pPr>
             <a:r>
@@ -15197,7 +15081,7 @@
           <a:bodyPr wrap="square" lIns="0" tIns="0" rIns="0" bIns="0" rtlCol="0" anchor="ctr"/>
           <a:lstStyle/>
           <a:p>
-            <a:pPr algn="ctr" indent="0" marL="0">
+            <a:pPr marL="0" indent="0" algn="ctr">
               <a:buNone/>
             </a:pPr>
             <a:r>
@@ -15233,7 +15117,7 @@
           <a:bodyPr wrap="square" lIns="0" tIns="0" rIns="0" bIns="0" rtlCol="0" anchor="ctr"/>
           <a:lstStyle/>
           <a:p>
-            <a:pPr algn="ctr" indent="0" marL="0">
+            <a:pPr marL="0" indent="0" algn="ctr">
               <a:buNone/>
             </a:pPr>
             <a:r>
@@ -15272,7 +15156,7 @@
           <a:bodyPr wrap="square" lIns="0" tIns="0" rIns="0" bIns="0" rtlCol="0" anchor="ctr"/>
           <a:lstStyle/>
           <a:p>
-            <a:pPr algn="ctr" indent="0" marL="0">
+            <a:pPr marL="0" indent="0" algn="ctr">
               <a:buNone/>
             </a:pPr>
             <a:r>
@@ -15303,6 +15187,7 @@
         <a:solidFill>
           <a:srgbClr val="F5F6FA"/>
         </a:solidFill>
+        <a:effectLst/>
       </p:bgPr>
     </p:bg>
     <p:spTree>
@@ -15365,11 +15250,11 @@
           <a:bodyPr wrap="square" lIns="0" tIns="0" rIns="0" bIns="0" rtlCol="0" anchor="ctr"/>
           <a:lstStyle/>
           <a:p>
-            <a:pPr indent="0" marL="0">
-              <a:buNone/>
-            </a:pPr>
-            <a:r>
-              <a:rPr lang="en-US" sz="800" b="1" spc="300" kern="0" dirty="0">
+            <a:pPr marL="0" indent="0">
+              <a:buNone/>
+            </a:pPr>
+            <a:r>
+              <a:rPr lang="en-US" sz="800" b="1" kern="0" spc="300" dirty="0">
                 <a:solidFill>
                   <a:srgbClr val="C9993A"/>
                 </a:solidFill>
@@ -15401,7 +15286,7 @@
           <a:bodyPr wrap="square" lIns="0" tIns="0" rIns="0" bIns="0" rtlCol="0" anchor="ctr"/>
           <a:lstStyle/>
           <a:p>
-            <a:pPr indent="0" marL="0">
+            <a:pPr marL="0" indent="0">
               <a:buNone/>
             </a:pPr>
             <a:r>
@@ -15465,7 +15350,7 @@
           <a:bodyPr wrap="square" lIns="0" tIns="0" rIns="0" bIns="0" rtlCol="0" anchor="ctr"/>
           <a:lstStyle/>
           <a:p>
-            <a:pPr indent="0" marL="0">
+            <a:pPr marL="0" indent="0">
               <a:buNone/>
             </a:pPr>
             <a:r>
@@ -15507,7 +15392,7 @@
             <a:prstDash val="solid"/>
           </a:ln>
           <a:effectLst>
-            <a:outerShdw sx="100000" sy="100000" kx="0" ky="0" algn="bl" rotWithShape="0" blurRad="101600" dist="38100" dir="8100000">
+            <a:outerShdw blurRad="101600" dist="38100" dir="8100000" algn="bl" rotWithShape="0">
               <a:srgbClr val="000000">
                 <a:alpha val="12000"/>
               </a:srgbClr>
@@ -15561,7 +15446,7 @@
           <a:bodyPr wrap="square" lIns="0" tIns="0" rIns="0" bIns="0" rtlCol="0" anchor="ctr"/>
           <a:lstStyle/>
           <a:p>
-            <a:pPr algn="ctr" indent="0" marL="0">
+            <a:pPr marL="0" indent="0" algn="ctr">
               <a:buNone/>
             </a:pPr>
             <a:r>
@@ -15600,7 +15485,7 @@
           <a:bodyPr wrap="square" lIns="0" tIns="0" rIns="0" bIns="0" rtlCol="0" anchor="ctr"/>
           <a:lstStyle/>
           <a:p>
-            <a:pPr indent="0" marL="0">
+            <a:pPr marL="0" indent="0">
               <a:buNone/>
             </a:pPr>
             <a:r>
@@ -15639,7 +15524,7 @@
           <a:bodyPr wrap="square" lIns="0" tIns="0" rIns="0" bIns="0" rtlCol="0" anchor="ctr"/>
           <a:lstStyle/>
           <a:p>
-            <a:pPr indent="0" marL="0">
+            <a:pPr marL="0" indent="0">
               <a:buNone/>
             </a:pPr>
             <a:r>
@@ -15681,7 +15566,7 @@
             <a:prstDash val="solid"/>
           </a:ln>
           <a:effectLst>
-            <a:outerShdw sx="100000" sy="100000" kx="0" ky="0" algn="bl" rotWithShape="0" blurRad="101600" dist="38100" dir="8100000">
+            <a:outerShdw blurRad="101600" dist="38100" dir="8100000" algn="bl" rotWithShape="0">
               <a:srgbClr val="000000">
                 <a:alpha val="12000"/>
               </a:srgbClr>
@@ -15735,7 +15620,7 @@
           <a:bodyPr wrap="square" lIns="0" tIns="0" rIns="0" bIns="0" rtlCol="0" anchor="ctr"/>
           <a:lstStyle/>
           <a:p>
-            <a:pPr algn="ctr" indent="0" marL="0">
+            <a:pPr marL="0" indent="0" algn="ctr">
               <a:buNone/>
             </a:pPr>
             <a:r>
@@ -15774,7 +15659,7 @@
           <a:bodyPr wrap="square" lIns="0" tIns="0" rIns="0" bIns="0" rtlCol="0" anchor="ctr"/>
           <a:lstStyle/>
           <a:p>
-            <a:pPr indent="0" marL="0">
+            <a:pPr marL="0" indent="0">
               <a:buNone/>
             </a:pPr>
             <a:r>
@@ -15813,7 +15698,7 @@
           <a:bodyPr wrap="square" lIns="0" tIns="0" rIns="0" bIns="0" rtlCol="0" anchor="ctr"/>
           <a:lstStyle/>
           <a:p>
-            <a:pPr indent="0" marL="0">
+            <a:pPr marL="0" indent="0">
               <a:buNone/>
             </a:pPr>
             <a:r>
@@ -15855,7 +15740,7 @@
             <a:prstDash val="solid"/>
           </a:ln>
           <a:effectLst>
-            <a:outerShdw sx="100000" sy="100000" kx="0" ky="0" algn="bl" rotWithShape="0" blurRad="101600" dist="38100" dir="8100000">
+            <a:outerShdw blurRad="101600" dist="38100" dir="8100000" algn="bl" rotWithShape="0">
               <a:srgbClr val="000000">
                 <a:alpha val="12000"/>
               </a:srgbClr>
@@ -15909,7 +15794,7 @@
           <a:bodyPr wrap="square" lIns="0" tIns="0" rIns="0" bIns="0" rtlCol="0" anchor="ctr"/>
           <a:lstStyle/>
           <a:p>
-            <a:pPr algn="ctr" indent="0" marL="0">
+            <a:pPr marL="0" indent="0" algn="ctr">
               <a:buNone/>
             </a:pPr>
             <a:r>
@@ -15948,7 +15833,7 @@
           <a:bodyPr wrap="square" lIns="0" tIns="0" rIns="0" bIns="0" rtlCol="0" anchor="ctr"/>
           <a:lstStyle/>
           <a:p>
-            <a:pPr indent="0" marL="0">
+            <a:pPr marL="0" indent="0">
               <a:buNone/>
             </a:pPr>
             <a:r>
@@ -15987,7 +15872,7 @@
           <a:bodyPr wrap="square" lIns="0" tIns="0" rIns="0" bIns="0" rtlCol="0" anchor="ctr"/>
           <a:lstStyle/>
           <a:p>
-            <a:pPr indent="0" marL="0">
+            <a:pPr marL="0" indent="0">
               <a:buNone/>
             </a:pPr>
             <a:r>
@@ -16029,7 +15914,7 @@
             <a:prstDash val="solid"/>
           </a:ln>
           <a:effectLst>
-            <a:outerShdw sx="100000" sy="100000" kx="0" ky="0" algn="bl" rotWithShape="0" blurRad="101600" dist="38100" dir="8100000">
+            <a:outerShdw blurRad="101600" dist="38100" dir="8100000" algn="bl" rotWithShape="0">
               <a:srgbClr val="000000">
                 <a:alpha val="12000"/>
               </a:srgbClr>
@@ -16083,7 +15968,7 @@
           <a:bodyPr wrap="square" lIns="0" tIns="0" rIns="0" bIns="0" rtlCol="0" anchor="ctr"/>
           <a:lstStyle/>
           <a:p>
-            <a:pPr algn="ctr" indent="0" marL="0">
+            <a:pPr marL="0" indent="0" algn="ctr">
               <a:buNone/>
             </a:pPr>
             <a:r>
@@ -16122,7 +16007,7 @@
           <a:bodyPr wrap="square" lIns="0" tIns="0" rIns="0" bIns="0" rtlCol="0" anchor="ctr"/>
           <a:lstStyle/>
           <a:p>
-            <a:pPr indent="0" marL="0">
+            <a:pPr marL="0" indent="0">
               <a:buNone/>
             </a:pPr>
             <a:r>
@@ -16161,7 +16046,7 @@
           <a:bodyPr wrap="square" lIns="0" tIns="0" rIns="0" bIns="0" rtlCol="0" anchor="ctr"/>
           <a:lstStyle/>
           <a:p>
-            <a:pPr indent="0" marL="0">
+            <a:pPr marL="0" indent="0">
               <a:buNone/>
             </a:pPr>
             <a:r>
@@ -16195,6 +16080,7 @@
         <a:solidFill>
           <a:srgbClr val="1B2A4A"/>
         </a:solidFill>
+        <a:effectLst/>
       </p:bgPr>
     </p:bg>
     <p:spTree>
@@ -16257,11 +16143,11 @@
           <a:bodyPr wrap="square" lIns="0" tIns="0" rIns="0" bIns="0" rtlCol="0" anchor="ctr"/>
           <a:lstStyle/>
           <a:p>
-            <a:pPr indent="0" marL="0">
-              <a:buNone/>
-            </a:pPr>
-            <a:r>
-              <a:rPr lang="en-US" sz="800" b="1" spc="300" kern="0" dirty="0">
+            <a:pPr marL="0" indent="0">
+              <a:buNone/>
+            </a:pPr>
+            <a:r>
+              <a:rPr lang="en-US" sz="800" b="1" kern="0" spc="300" dirty="0">
                 <a:solidFill>
                   <a:srgbClr val="C9993A"/>
                 </a:solidFill>
@@ -16293,7 +16179,7 @@
           <a:bodyPr wrap="square" lIns="0" tIns="0" rIns="0" bIns="0" rtlCol="0" anchor="ctr"/>
           <a:lstStyle/>
           <a:p>
-            <a:pPr indent="0" marL="0">
+            <a:pPr marL="0" indent="0">
               <a:buNone/>
             </a:pPr>
             <a:r>
@@ -16332,7 +16218,7 @@
           <a:bodyPr wrap="square" lIns="0" tIns="0" rIns="0" bIns="0" rtlCol="0" anchor="ctr"/>
           <a:lstStyle/>
           <a:p>
-            <a:pPr indent="0" marL="0">
+            <a:pPr marL="0" indent="0">
               <a:buNone/>
             </a:pPr>
             <a:r>
@@ -16358,8 +16244,8 @@
         </p:nvSpPr>
         <p:spPr>
           <a:xfrm>
-            <a:off x="274320" y="1417320"/>
-            <a:ext cx="4114800" cy="2377440"/>
+            <a:off x="274320" y="1362456"/>
+            <a:ext cx="4113122" cy="2432304"/>
           </a:xfrm>
           <a:prstGeom prst="rect">
             <a:avLst/>
@@ -16396,11 +16282,11 @@
           <a:bodyPr wrap="square" lIns="0" tIns="0" rIns="0" bIns="0" rtlCol="0" anchor="ctr"/>
           <a:lstStyle/>
           <a:p>
-            <a:pPr indent="0" marL="0">
-              <a:buNone/>
-            </a:pPr>
-            <a:r>
-              <a:rPr lang="en-US" sz="1000" b="1" spc="300" kern="0" dirty="0">
+            <a:pPr marL="0" indent="0">
+              <a:buNone/>
+            </a:pPr>
+            <a:r>
+              <a:rPr lang="en-US" sz="1000" b="1" kern="0" spc="300" dirty="0">
                 <a:solidFill>
                   <a:srgbClr val="EF4444"/>
                 </a:solidFill>
@@ -16432,9 +16318,9 @@
           <a:bodyPr wrap="square" lIns="0" tIns="0" rIns="0" bIns="0" rtlCol="0" anchor="ctr"/>
           <a:lstStyle/>
           <a:p>
-            <a:pPr indent="0" marL="0">
+            <a:pPr marL="0" indent="0">
               <a:lnSpc>
-                <a:spcPct val="135000"/>
+                <a:spcPct val="200000"/>
               </a:lnSpc>
               <a:buNone/>
             </a:pPr>
@@ -16447,15 +16333,14 @@
                 <a:ea typeface="Calibri" pitchFamily="34" charset="-122"/>
                 <a:cs typeface="Calibri" pitchFamily="34" charset="-120"/>
               </a:rPr>
-              <a:t>Official sources (DENR, PSA, Lamudi) miss:
-</a:t>
+              <a:t>Official sources (DENR, PSA, Lamudi) miss:</a:t>
             </a:r>
             <a:endParaRPr lang="en-US" sz="1050" dirty="0"/>
           </a:p>
           <a:p>
-            <a:pPr indent="0" marL="0">
+            <a:pPr marL="0" indent="0">
               <a:lnSpc>
-                <a:spcPct val="135000"/>
+                <a:spcPct val="200000"/>
               </a:lnSpc>
               <a:buNone/>
             </a:pPr>
@@ -16468,15 +16353,14 @@
                 <a:ea typeface="Calibri" pitchFamily="34" charset="-122"/>
                 <a:cs typeface="Calibri" pitchFamily="34" charset="-120"/>
               </a:rPr>
-              <a:t>• Localized monsoon flooding not in PAGASA maps
-</a:t>
+              <a:t>• Localized monsoon flooding not in PAGASA maps</a:t>
             </a:r>
             <a:endParaRPr lang="en-US" sz="1050" dirty="0"/>
           </a:p>
           <a:p>
-            <a:pPr indent="0" marL="0">
+            <a:pPr marL="0" indent="0">
               <a:lnSpc>
-                <a:spcPct val="135000"/>
+                <a:spcPct val="200000"/>
               </a:lnSpc>
               <a:buNone/>
             </a:pPr>
@@ -16489,15 +16373,14 @@
                 <a:ea typeface="Calibri" pitchFamily="34" charset="-122"/>
                 <a:cs typeface="Calibri" pitchFamily="34" charset="-120"/>
               </a:rPr>
-              <a:t>• Informal community flood reports per barangay
-</a:t>
+              <a:t>• Informal community flood reports per barangay</a:t>
             </a:r>
             <a:endParaRPr lang="en-US" sz="1050" dirty="0"/>
           </a:p>
           <a:p>
-            <a:pPr indent="0" marL="0">
+            <a:pPr marL="0" indent="0">
               <a:lnSpc>
-                <a:spcPct val="135000"/>
+                <a:spcPct val="200000"/>
               </a:lnSpc>
               <a:buNone/>
             </a:pPr>
@@ -16510,15 +16393,14 @@
                 <a:ea typeface="Calibri" pitchFamily="34" charset="-122"/>
                 <a:cs typeface="Calibri" pitchFamily="34" charset="-120"/>
               </a:rPr>
-              <a:t>• Speculative listing language (40% price surge language in SJL)
-</a:t>
+              <a:t>• Speculative listing language (40% price surge language in SJL)</a:t>
             </a:r>
             <a:endParaRPr lang="en-US" sz="1050" dirty="0"/>
           </a:p>
           <a:p>
-            <a:pPr indent="0" marL="0">
+            <a:pPr marL="0" indent="0">
               <a:lnSpc>
-                <a:spcPct val="135000"/>
+                <a:spcPct val="200000"/>
               </a:lnSpc>
               <a:buNone/>
             </a:pPr>
@@ -16531,15 +16413,14 @@
                 <a:ea typeface="Calibri" pitchFamily="34" charset="-122"/>
                 <a:cs typeface="Calibri" pitchFamily="34" charset="-120"/>
               </a:rPr>
-              <a:t>• Short-term rental velocity shifts before price moves
-</a:t>
+              <a:t>• Short-term rental velocity shifts before price moves</a:t>
             </a:r>
             <a:endParaRPr lang="en-US" sz="1050" dirty="0"/>
           </a:p>
           <a:p>
-            <a:pPr indent="0" marL="0">
+            <a:pPr marL="0" indent="0">
               <a:lnSpc>
-                <a:spcPct val="135000"/>
+                <a:spcPct val="200000"/>
               </a:lnSpc>
               <a:buNone/>
             </a:pPr>
@@ -16552,10 +16433,8 @@
                 <a:ea typeface="Calibri" pitchFamily="34" charset="-122"/>
                 <a:cs typeface="Calibri" pitchFamily="34" charset="-120"/>
               </a:rPr>
-              <a:t>• Heritage tourism sentiment driving premiums
-</a:t>
-            </a:r>
-            <a:endParaRPr lang="en-US" sz="1050" dirty="0"/>
+              <a:t>• Heritage tourism sentiment driving premiums</a:t>
+            </a:r>
           </a:p>
         </p:txBody>
       </p:sp>
@@ -16567,8 +16446,8 @@
         </p:nvSpPr>
         <p:spPr>
           <a:xfrm>
-            <a:off x="4663440" y="1417320"/>
-            <a:ext cx="4206240" cy="2377440"/>
+            <a:off x="4663440" y="1362456"/>
+            <a:ext cx="4206240" cy="2432304"/>
           </a:xfrm>
           <a:prstGeom prst="rect">
             <a:avLst/>
@@ -16605,11 +16484,11 @@
           <a:bodyPr wrap="square" lIns="0" tIns="0" rIns="0" bIns="0" rtlCol="0" anchor="ctr"/>
           <a:lstStyle/>
           <a:p>
-            <a:pPr indent="0" marL="0">
-              <a:buNone/>
-            </a:pPr>
-            <a:r>
-              <a:rPr lang="en-US" sz="1000" b="1" spc="300" kern="0" dirty="0">
+            <a:pPr marL="0" indent="0">
+              <a:buNone/>
+            </a:pPr>
+            <a:r>
+              <a:rPr lang="en-US" sz="1000" b="1" kern="0" spc="300" dirty="0">
                 <a:solidFill>
                   <a:srgbClr val="22C55E"/>
                 </a:solidFill>
@@ -16641,9 +16520,9 @@
           <a:bodyPr wrap="square" lIns="0" tIns="0" rIns="0" bIns="0" rtlCol="0" anchor="ctr"/>
           <a:lstStyle/>
           <a:p>
-            <a:pPr indent="0" marL="0">
+            <a:pPr marL="0" indent="0">
               <a:lnSpc>
-                <a:spcPct val="135000"/>
+                <a:spcPct val="200000"/>
               </a:lnSpc>
               <a:buNone/>
             </a:pPr>
@@ -16656,15 +16535,14 @@
                 <a:ea typeface="Calibri" pitchFamily="34" charset="-122"/>
                 <a:cs typeface="Calibri" pitchFamily="34" charset="-120"/>
               </a:rPr>
-              <a:t>ByteMe ingests &amp; weights:
-</a:t>
+              <a:t>ByteMe ingests &amp; weights:</a:t>
             </a:r>
             <a:endParaRPr lang="en-US" sz="1050" dirty="0"/>
           </a:p>
           <a:p>
-            <a:pPr indent="0" marL="0">
+            <a:pPr marL="0" indent="0">
               <a:lnSpc>
-                <a:spcPct val="135000"/>
+                <a:spcPct val="200000"/>
               </a:lnSpc>
               <a:buNone/>
             </a:pPr>
@@ -16677,15 +16555,14 @@
                 <a:ea typeface="Calibri" pitchFamily="34" charset="-122"/>
                 <a:cs typeface="Calibri" pitchFamily="34" charset="-120"/>
               </a:rPr>
-              <a:t>• community_sentinel_signals.json — district-level
-</a:t>
+              <a:t>• community_sentinel_signals.json — district-level</a:t>
             </a:r>
             <a:endParaRPr lang="en-US" sz="1050" dirty="0"/>
           </a:p>
           <a:p>
-            <a:pPr indent="0" marL="0">
+            <a:pPr marL="0" indent="0">
               <a:lnSpc>
-                <a:spcPct val="135000"/>
+                <a:spcPct val="200000"/>
               </a:lnSpc>
               <a:buNone/>
             </a:pPr>
@@ -16698,15 +16575,14 @@
                 <a:ea typeface="Calibri" pitchFamily="34" charset="-122"/>
                 <a:cs typeface="Calibri" pitchFamily="34" charset="-120"/>
               </a:rPr>
-              <a:t>• Headline NLP scores (surge / correction / stable)
-</a:t>
+              <a:t>• Headline NLP scores (surge / correction / stable)</a:t>
             </a:r>
             <a:endParaRPr lang="en-US" sz="1050" dirty="0"/>
           </a:p>
           <a:p>
-            <a:pPr indent="0" marL="0">
+            <a:pPr marL="0" indent="0">
               <a:lnSpc>
-                <a:spcPct val="135000"/>
+                <a:spcPct val="200000"/>
               </a:lnSpc>
               <a:buNone/>
             </a:pPr>
@@ -16719,20 +16595,10 @@
                 <a:ea typeface="Calibri" pitchFamily="34" charset="-122"/>
                 <a:cs typeface="Calibri" pitchFamily="34" charset="-120"/>
               </a:rPr>
-              <a:t>• Flood flag per barangay → negative cultural_premium_factor
-</a:t>
-            </a:r>
-            <a:endParaRPr lang="en-US" sz="1050" dirty="0"/>
-          </a:p>
-          <a:p>
-            <a:pPr indent="0" marL="0">
-              <a:lnSpc>
-                <a:spcPct val="135000"/>
-              </a:lnSpc>
-              <a:buNone/>
-            </a:pPr>
-            <a:r>
-              <a:rPr lang="en-US" sz="1050" dirty="0">
+              <a:t>• Flood flag per barangay → negative </a:t>
+            </a:r>
+            <a:r>
+              <a:rPr lang="en-US" sz="1050" dirty="0" err="1">
                 <a:solidFill>
                   <a:srgbClr val="94A3B8"/>
                 </a:solidFill>
@@ -16740,15 +16606,14 @@
                 <a:ea typeface="Calibri" pitchFamily="34" charset="-122"/>
                 <a:cs typeface="Calibri" pitchFamily="34" charset="-120"/>
               </a:rPr>
-              <a:t>• Overpriced flag → seller warning overlay in UI
-</a:t>
+              <a:t>cultural_premium_factor</a:t>
             </a:r>
             <a:endParaRPr lang="en-US" sz="1050" dirty="0"/>
           </a:p>
           <a:p>
-            <a:pPr indent="0" marL="0">
+            <a:pPr marL="0" indent="0">
               <a:lnSpc>
-                <a:spcPct val="135000"/>
+                <a:spcPct val="200000"/>
               </a:lnSpc>
               <a:buNone/>
             </a:pPr>
@@ -16761,10 +16626,47 @@
                 <a:ea typeface="Calibri" pitchFamily="34" charset="-122"/>
                 <a:cs typeface="Calibri" pitchFamily="34" charset="-120"/>
               </a:rPr>
-              <a:t>• Opportunity flag → buyer insight overlay
-</a:t>
+              <a:t>• Overpriced flag → seller warning overlay in UI</a:t>
             </a:r>
             <a:endParaRPr lang="en-US" sz="1050" dirty="0"/>
+          </a:p>
+          <a:p>
+            <a:pPr marL="0" indent="0">
+              <a:lnSpc>
+                <a:spcPct val="200000"/>
+              </a:lnSpc>
+              <a:buNone/>
+            </a:pPr>
+            <a:r>
+              <a:rPr lang="en-US" sz="1050" dirty="0">
+                <a:solidFill>
+                  <a:srgbClr val="94A3B8"/>
+                </a:solidFill>
+                <a:latin typeface="Calibri" pitchFamily="34" charset="0"/>
+                <a:ea typeface="Calibri" pitchFamily="34" charset="-122"/>
+                <a:cs typeface="Calibri" pitchFamily="34" charset="-120"/>
+              </a:rPr>
+              <a:t>• Opportunity flag → buyer insight </a:t>
+            </a:r>
+            <a:r>
+              <a:rPr lang="en-US" sz="1050" dirty="0" err="1">
+                <a:solidFill>
+                  <a:srgbClr val="94A3B8"/>
+                </a:solidFill>
+                <a:latin typeface="Calibri" pitchFamily="34" charset="0"/>
+                <a:ea typeface="Calibri" pitchFamily="34" charset="-122"/>
+                <a:cs typeface="Calibri" pitchFamily="34" charset="-120"/>
+              </a:rPr>
+              <a:t>overla</a:t>
+            </a:r>
+            <a:endParaRPr lang="en-US" sz="1050" dirty="0">
+              <a:solidFill>
+                <a:srgbClr val="94A3B8"/>
+              </a:solidFill>
+              <a:latin typeface="Calibri" pitchFamily="34" charset="0"/>
+              <a:ea typeface="Calibri" pitchFamily="34" charset="-122"/>
+              <a:cs typeface="Calibri" pitchFamily="34" charset="-120"/>
+            </a:endParaRPr>
           </a:p>
         </p:txBody>
       </p:sp>
@@ -16814,7 +16716,7 @@
           <a:bodyPr wrap="square" lIns="0" tIns="0" rIns="0" bIns="0" rtlCol="0" anchor="ctr"/>
           <a:lstStyle/>
           <a:p>
-            <a:pPr indent="0" marL="0">
+            <a:pPr marL="0" indent="0">
               <a:buNone/>
             </a:pPr>
             <a:r>
@@ -16850,7 +16752,7 @@
           <a:bodyPr wrap="square" lIns="0" tIns="0" rIns="0" bIns="0" rtlCol="0" anchor="ctr"/>
           <a:lstStyle/>
           <a:p>
-            <a:pPr indent="0" marL="0">
+            <a:pPr marL="0" indent="0">
               <a:buNone/>
             </a:pPr>
             <a:r>
@@ -16884,6 +16786,7 @@
         <a:solidFill>
           <a:srgbClr val="F5F6FA"/>
         </a:solidFill>
+        <a:effectLst/>
       </p:bgPr>
     </p:bg>
     <p:spTree>
@@ -16946,11 +16849,11 @@
           <a:bodyPr wrap="square" lIns="0" tIns="0" rIns="0" bIns="0" rtlCol="0" anchor="ctr"/>
           <a:lstStyle/>
           <a:p>
-            <a:pPr indent="0" marL="0">
-              <a:buNone/>
-            </a:pPr>
-            <a:r>
-              <a:rPr lang="en-US" sz="800" b="1" spc="300" kern="0" dirty="0">
+            <a:pPr marL="0" indent="0">
+              <a:buNone/>
+            </a:pPr>
+            <a:r>
+              <a:rPr lang="en-US" sz="800" b="1" kern="0" spc="300" dirty="0">
                 <a:solidFill>
                   <a:srgbClr val="C9993A"/>
                 </a:solidFill>
@@ -16982,7 +16885,7 @@
           <a:bodyPr wrap="square" lIns="0" tIns="0" rIns="0" bIns="0" rtlCol="0" anchor="ctr"/>
           <a:lstStyle/>
           <a:p>
-            <a:pPr indent="0" marL="0">
+            <a:pPr marL="0" indent="0">
               <a:buNone/>
             </a:pPr>
             <a:r>
@@ -17046,7 +16949,7 @@
           <a:bodyPr wrap="square" lIns="0" tIns="0" rIns="0" bIns="0" rtlCol="0" anchor="ctr"/>
           <a:lstStyle/>
           <a:p>
-            <a:pPr indent="0" marL="0">
+            <a:pPr marL="0" indent="0">
               <a:buNone/>
             </a:pPr>
             <a:r>
@@ -17066,7 +16969,7 @@
       </p:sp>
       <p:graphicFrame>
         <p:nvGraphicFramePr>
-          <p:cNvPr id="7" name="Chart 0" descr=""/>
+          <p:cNvPr id="7" name="Chart 0"/>
           <p:cNvGraphicFramePr/>
           <p:nvPr/>
         </p:nvGraphicFramePr>
@@ -17074,9 +16977,9 @@
           <a:off x="274320" y="1463040"/>
           <a:ext cx="5120640" cy="3291840"/>
         </p:xfrm>
-        <a:graphic xmlns:a="http://schemas.openxmlformats.org/drawingml/2006/main">
+        <a:graphic>
           <a:graphicData uri="http://schemas.openxmlformats.org/drawingml/2006/chart">
-            <c:chart xmlns:c="http://schemas.openxmlformats.org/drawingml/2006/chart" r:id="rId1"/>
+            <c:chart xmlns:c="http://schemas.openxmlformats.org/drawingml/2006/chart" xmlns:r="http://schemas.openxmlformats.org/officeDocument/2006/relationships" r:id="rId3"/>
           </a:graphicData>
         </a:graphic>
       </p:graphicFrame>
@@ -17104,7 +17007,7 @@
             <a:prstDash val="solid"/>
           </a:ln>
           <a:effectLst>
-            <a:outerShdw sx="100000" sy="100000" kx="0" ky="0" algn="bl" rotWithShape="0" blurRad="101600" dist="38100" dir="8100000">
+            <a:outerShdw blurRad="101600" dist="38100" dir="8100000" algn="bl" rotWithShape="0">
               <a:srgbClr val="000000">
                 <a:alpha val="12000"/>
               </a:srgbClr>
@@ -17133,7 +17036,7 @@
           <a:bodyPr wrap="square" lIns="0" tIns="0" rIns="0" bIns="0" rtlCol="0" anchor="ctr"/>
           <a:lstStyle/>
           <a:p>
-            <a:pPr indent="0" marL="0">
+            <a:pPr marL="0" indent="0">
               <a:buNone/>
             </a:pPr>
             <a:r>
@@ -17172,7 +17075,7 @@
           <a:bodyPr wrap="square" lIns="0" tIns="0" rIns="0" bIns="0" rtlCol="0" anchor="ctr"/>
           <a:lstStyle/>
           <a:p>
-            <a:pPr indent="0" marL="0">
+            <a:pPr marL="0" indent="0">
               <a:lnSpc>
                 <a:spcPct val="130000"/>
               </a:lnSpc>
@@ -17192,7 +17095,7 @@
             <a:endParaRPr lang="en-US" sz="950" dirty="0"/>
           </a:p>
           <a:p>
-            <a:pPr indent="0" marL="0">
+            <a:pPr marL="0" indent="0">
               <a:lnSpc>
                 <a:spcPct val="130000"/>
               </a:lnSpc>
@@ -17212,7 +17115,7 @@
             <a:endParaRPr lang="en-US" sz="950" dirty="0"/>
           </a:p>
           <a:p>
-            <a:pPr indent="0" marL="0">
+            <a:pPr marL="0" indent="0">
               <a:lnSpc>
                 <a:spcPct val="130000"/>
               </a:lnSpc>
@@ -17257,7 +17160,7 @@
             <a:prstDash val="solid"/>
           </a:ln>
           <a:effectLst>
-            <a:outerShdw sx="100000" sy="100000" kx="0" ky="0" algn="bl" rotWithShape="0" blurRad="101600" dist="38100" dir="8100000">
+            <a:outerShdw blurRad="101600" dist="38100" dir="8100000" algn="bl" rotWithShape="0">
               <a:srgbClr val="000000">
                 <a:alpha val="12000"/>
               </a:srgbClr>
@@ -17286,7 +17189,7 @@
           <a:bodyPr wrap="square" lIns="0" tIns="0" rIns="0" bIns="0" rtlCol="0" anchor="ctr"/>
           <a:lstStyle/>
           <a:p>
-            <a:pPr indent="0" marL="0">
+            <a:pPr marL="0" indent="0">
               <a:buNone/>
             </a:pPr>
             <a:r>
@@ -17325,7 +17228,7 @@
           <a:bodyPr wrap="square" lIns="0" tIns="0" rIns="0" bIns="0" rtlCol="0" anchor="ctr"/>
           <a:lstStyle/>
           <a:p>
-            <a:pPr indent="0" marL="0">
+            <a:pPr marL="0" indent="0">
               <a:lnSpc>
                 <a:spcPct val="130000"/>
               </a:lnSpc>
@@ -17345,7 +17248,7 @@
             <a:endParaRPr lang="en-US" sz="950" dirty="0"/>
           </a:p>
           <a:p>
-            <a:pPr indent="0" marL="0">
+            <a:pPr marL="0" indent="0">
               <a:lnSpc>
                 <a:spcPct val="130000"/>
               </a:lnSpc>
@@ -17365,7 +17268,7 @@
             <a:endParaRPr lang="en-US" sz="950" dirty="0"/>
           </a:p>
           <a:p>
-            <a:pPr indent="0" marL="0">
+            <a:pPr marL="0" indent="0">
               <a:lnSpc>
                 <a:spcPct val="130000"/>
               </a:lnSpc>
@@ -17410,7 +17313,7 @@
             <a:prstDash val="solid"/>
           </a:ln>
           <a:effectLst>
-            <a:outerShdw sx="100000" sy="100000" kx="0" ky="0" algn="bl" rotWithShape="0" blurRad="101600" dist="38100" dir="8100000">
+            <a:outerShdw blurRad="101600" dist="38100" dir="8100000" algn="bl" rotWithShape="0">
               <a:srgbClr val="000000">
                 <a:alpha val="12000"/>
               </a:srgbClr>
@@ -17439,7 +17342,7 @@
           <a:bodyPr wrap="square" lIns="0" tIns="0" rIns="0" bIns="0" rtlCol="0" anchor="ctr"/>
           <a:lstStyle/>
           <a:p>
-            <a:pPr indent="0" marL="0">
+            <a:pPr marL="0" indent="0">
               <a:buNone/>
             </a:pPr>
             <a:r>
@@ -17478,7 +17381,7 @@
           <a:bodyPr wrap="square" lIns="0" tIns="0" rIns="0" bIns="0" rtlCol="0" anchor="ctr"/>
           <a:lstStyle/>
           <a:p>
-            <a:pPr indent="0" marL="0">
+            <a:pPr marL="0" indent="0">
               <a:lnSpc>
                 <a:spcPct val="130000"/>
               </a:lnSpc>
@@ -17498,7 +17401,7 @@
             <a:endParaRPr lang="en-US" sz="950" dirty="0"/>
           </a:p>
           <a:p>
-            <a:pPr indent="0" marL="0">
+            <a:pPr marL="0" indent="0">
               <a:lnSpc>
                 <a:spcPct val="130000"/>
               </a:lnSpc>
@@ -17518,7 +17421,7 @@
             <a:endParaRPr lang="en-US" sz="950" dirty="0"/>
           </a:p>
           <a:p>
-            <a:pPr indent="0" marL="0">
+            <a:pPr marL="0" indent="0">
               <a:lnSpc>
                 <a:spcPct val="130000"/>
               </a:lnSpc>
@@ -17555,6 +17458,7 @@
         <a:solidFill>
           <a:srgbClr val="1B2A4A"/>
         </a:solidFill>
+        <a:effectLst/>
       </p:bgPr>
     </p:bg>
     <p:spTree>
@@ -17617,11 +17521,11 @@
           <a:bodyPr wrap="square" lIns="0" tIns="0" rIns="0" bIns="0" rtlCol="0" anchor="ctr"/>
           <a:lstStyle/>
           <a:p>
-            <a:pPr indent="0" marL="0">
-              <a:buNone/>
-            </a:pPr>
-            <a:r>
-              <a:rPr lang="en-US" sz="800" b="1" spc="300" kern="0" dirty="0">
+            <a:pPr marL="0" indent="0">
+              <a:buNone/>
+            </a:pPr>
+            <a:r>
+              <a:rPr lang="en-US" sz="800" b="1" kern="0" spc="300" dirty="0">
                 <a:solidFill>
                   <a:srgbClr val="C9993A"/>
                 </a:solidFill>
@@ -17653,7 +17557,7 @@
           <a:bodyPr wrap="square" lIns="0" tIns="0" rIns="0" bIns="0" rtlCol="0" anchor="ctr"/>
           <a:lstStyle/>
           <a:p>
-            <a:pPr indent="0" marL="0">
+            <a:pPr marL="0" indent="0">
               <a:buNone/>
             </a:pPr>
             <a:r>
@@ -17692,7 +17596,7 @@
           <a:bodyPr wrap="square" lIns="0" tIns="0" rIns="0" bIns="0" rtlCol="0" anchor="ctr"/>
           <a:lstStyle/>
           <a:p>
-            <a:pPr indent="0" marL="0">
+            <a:pPr marL="0" indent="0">
               <a:buNone/>
             </a:pPr>
             <a:r>
@@ -17756,11 +17660,11 @@
           <a:bodyPr wrap="square" lIns="0" tIns="0" rIns="0" bIns="0" rtlCol="0" anchor="ctr"/>
           <a:lstStyle/>
           <a:p>
-            <a:pPr indent="0" marL="0">
-              <a:buNone/>
-            </a:pPr>
-            <a:r>
-              <a:rPr lang="en-US" sz="900" b="1" spc="300" kern="0" dirty="0">
+            <a:pPr marL="0" indent="0">
+              <a:buNone/>
+            </a:pPr>
+            <a:r>
+              <a:rPr lang="en-US" sz="900" b="1" kern="0" spc="300" dirty="0">
                 <a:solidFill>
                   <a:srgbClr val="C9993A"/>
                 </a:solidFill>
@@ -17792,7 +17696,7 @@
           <a:bodyPr wrap="square" lIns="0" tIns="0" rIns="0" bIns="0" rtlCol="0" anchor="ctr"/>
           <a:lstStyle/>
           <a:p>
-            <a:pPr indent="0" marL="0">
+            <a:pPr marL="0" indent="0">
               <a:buNone/>
             </a:pPr>
             <a:r>
@@ -17831,7 +17735,7 @@
           <a:bodyPr wrap="square" lIns="0" tIns="0" rIns="0" bIns="0" rtlCol="0" anchor="ctr"/>
           <a:lstStyle/>
           <a:p>
-            <a:pPr indent="0" marL="0">
+            <a:pPr marL="0" indent="0">
               <a:buNone/>
             </a:pPr>
             <a:r>
@@ -17867,7 +17771,7 @@
           <a:bodyPr wrap="square" lIns="0" tIns="0" rIns="0" bIns="0" rtlCol="0" anchor="ctr"/>
           <a:lstStyle/>
           <a:p>
-            <a:pPr indent="0" marL="0">
+            <a:pPr marL="0" indent="0">
               <a:buNone/>
             </a:pPr>
             <a:r>
@@ -17878,9 +17782,6 @@
               </a:rPr>
               <a:t>Cultural adj: </a:t>
             </a:r>
-            <a:pPr indent="0" marL="0">
-              <a:buNone/>
-            </a:pPr>
             <a:r>
               <a:rPr lang="en-US" sz="1000" b="1" dirty="0">
                 <a:solidFill>
@@ -17889,9 +17790,6 @@
               </a:rPr>
               <a:t>+12%  </a:t>
             </a:r>
-            <a:pPr indent="0" marL="0">
-              <a:buNone/>
-            </a:pPr>
             <a:r>
               <a:rPr lang="en-US" sz="1000" dirty="0">
                 <a:solidFill>
@@ -17900,9 +17798,6 @@
               </a:rPr>
               <a:t>  Sentiment: </a:t>
             </a:r>
-            <a:pPr indent="0" marL="0">
-              <a:buNone/>
-            </a:pPr>
             <a:r>
               <a:rPr lang="en-US" sz="1000" b="1" dirty="0">
                 <a:solidFill>
@@ -17936,7 +17831,7 @@
           <a:bodyPr wrap="square" lIns="0" tIns="0" rIns="0" bIns="0" rtlCol="0" anchor="ctr"/>
           <a:lstStyle/>
           <a:p>
-            <a:pPr indent="0" marL="0">
+            <a:pPr marL="0" indent="0">
               <a:buNone/>
             </a:pPr>
             <a:r>
@@ -17953,7 +17848,7 @@
             <a:endParaRPr lang="en-US" sz="950" dirty="0"/>
           </a:p>
           <a:p>
-            <a:pPr indent="0" marL="0">
+            <a:pPr marL="0" indent="0">
               <a:buNone/>
             </a:pPr>
             <a:r>
@@ -18017,11 +17912,11 @@
           <a:bodyPr wrap="square" lIns="0" tIns="0" rIns="0" bIns="0" rtlCol="0" anchor="ctr"/>
           <a:lstStyle/>
           <a:p>
-            <a:pPr indent="0" marL="0">
-              <a:buNone/>
-            </a:pPr>
-            <a:r>
-              <a:rPr lang="en-US" sz="900" b="1" spc="300" kern="0" dirty="0">
+            <a:pPr marL="0" indent="0">
+              <a:buNone/>
+            </a:pPr>
+            <a:r>
+              <a:rPr lang="en-US" sz="900" b="1" kern="0" spc="300" dirty="0">
                 <a:solidFill>
                   <a:srgbClr val="22C55E"/>
                 </a:solidFill>
@@ -18053,7 +17948,7 @@
           <a:bodyPr wrap="square" lIns="0" tIns="0" rIns="0" bIns="0" rtlCol="0" anchor="ctr"/>
           <a:lstStyle/>
           <a:p>
-            <a:pPr indent="0" marL="0">
+            <a:pPr marL="0" indent="0">
               <a:buNone/>
             </a:pPr>
             <a:r>
@@ -18092,7 +17987,7 @@
           <a:bodyPr wrap="square" lIns="0" tIns="0" rIns="0" bIns="0" rtlCol="0" anchor="ctr"/>
           <a:lstStyle/>
           <a:p>
-            <a:pPr indent="0" marL="0">
+            <a:pPr marL="0" indent="0">
               <a:buNone/>
             </a:pPr>
             <a:r>
@@ -18128,7 +18023,7 @@
           <a:bodyPr wrap="square" lIns="0" tIns="0" rIns="0" bIns="0" rtlCol="0" anchor="ctr"/>
           <a:lstStyle/>
           <a:p>
-            <a:pPr indent="0" marL="0">
+            <a:pPr marL="0" indent="0">
               <a:buNone/>
             </a:pPr>
             <a:r>
@@ -18139,9 +18034,6 @@
               </a:rPr>
               <a:t>ByteMe prediction: </a:t>
             </a:r>
-            <a:pPr indent="0" marL="0">
-              <a:buNone/>
-            </a:pPr>
             <a:r>
               <a:rPr lang="en-US" sz="1000" b="1" dirty="0">
                 <a:solidFill>
@@ -18175,7 +18067,7 @@
           <a:bodyPr wrap="square" lIns="0" tIns="0" rIns="0" bIns="0" rtlCol="0" anchor="ctr"/>
           <a:lstStyle/>
           <a:p>
-            <a:pPr indent="0" marL="0">
+            <a:pPr marL="0" indent="0">
               <a:buNone/>
             </a:pPr>
             <a:r>
@@ -18192,7 +18084,7 @@
             <a:endParaRPr lang="en-US" sz="950" dirty="0"/>
           </a:p>
           <a:p>
-            <a:pPr indent="0" marL="0">
+            <a:pPr marL="0" indent="0">
               <a:buNone/>
             </a:pPr>
             <a:r>
@@ -18256,7 +18148,7 @@
           <a:bodyPr wrap="square" lIns="0" tIns="0" rIns="0" bIns="0" rtlCol="0" anchor="ctr"/>
           <a:lstStyle/>
           <a:p>
-            <a:pPr indent="0" marL="0">
+            <a:pPr marL="0" indent="0">
               <a:buNone/>
             </a:pPr>
             <a:r>
@@ -18292,7 +18184,7 @@
           <a:bodyPr wrap="square" lIns="0" tIns="0" rIns="0" bIns="0" rtlCol="0" anchor="ctr"/>
           <a:lstStyle/>
           <a:p>
-            <a:pPr indent="0" marL="0">
+            <a:pPr marL="0" indent="0">
               <a:buNone/>
             </a:pPr>
             <a:r>
@@ -18611,4 +18503,299 @@
     </a:ext>
   </a:extLst>
 </a:theme>
+</file>
+
+<file path=ppt/theme/theme2.xml><?xml version="1.0" encoding="utf-8"?>
+<a:theme xmlns:a="http://schemas.openxmlformats.org/drawingml/2006/main" name="Office Theme">
+  <a:themeElements>
+    <a:clrScheme name="Office">
+      <a:dk1>
+        <a:sysClr val="windowText" lastClr="000000"/>
+      </a:dk1>
+      <a:lt1>
+        <a:sysClr val="window" lastClr="FFFFFF"/>
+      </a:lt1>
+      <a:dk2>
+        <a:srgbClr val="44546A"/>
+      </a:dk2>
+      <a:lt2>
+        <a:srgbClr val="E7E6E6"/>
+      </a:lt2>
+      <a:accent1>
+        <a:srgbClr val="4472C4"/>
+      </a:accent1>
+      <a:accent2>
+        <a:srgbClr val="ED7D31"/>
+      </a:accent2>
+      <a:accent3>
+        <a:srgbClr val="A5A5A5"/>
+      </a:accent3>
+      <a:accent4>
+        <a:srgbClr val="FFC000"/>
+      </a:accent4>
+      <a:accent5>
+        <a:srgbClr val="5B9BD5"/>
+      </a:accent5>
+      <a:accent6>
+        <a:srgbClr val="70AD47"/>
+      </a:accent6>
+      <a:hlink>
+        <a:srgbClr val="0563C1"/>
+      </a:hlink>
+      <a:folHlink>
+        <a:srgbClr val="954F72"/>
+      </a:folHlink>
+    </a:clrScheme>
+    <a:fontScheme name="Office">
+      <a:majorFont>
+        <a:latin typeface="Calibri Light" panose="020F0302020204030204"/>
+        <a:ea typeface=""/>
+        <a:cs typeface=""/>
+        <a:font script="Jpan" typeface="游ゴシック Light"/>
+        <a:font script="Hang" typeface="맑은 고딕"/>
+        <a:font script="Hans" typeface="等线 Light"/>
+        <a:font script="Hant" typeface="新細明體"/>
+        <a:font script="Arab" typeface="Times New Roman"/>
+        <a:font script="Hebr" typeface="Times New Roman"/>
+        <a:font script="Thai" typeface="Angsana New"/>
+        <a:font script="Ethi" typeface="Nyala"/>
+        <a:font script="Beng" typeface="Vrinda"/>
+        <a:font script="Gujr" typeface="Shruti"/>
+        <a:font script="Khmr" typeface="MoolBoran"/>
+        <a:font script="Knda" typeface="Tunga"/>
+        <a:font script="Guru" typeface="Raavi"/>
+        <a:font script="Cans" typeface="Euphemia"/>
+        <a:font script="Cher" typeface="Plantagenet Cherokee"/>
+        <a:font script="Yiii" typeface="Microsoft Yi Baiti"/>
+        <a:font script="Tibt" typeface="Microsoft Himalaya"/>
+        <a:font script="Thaa" typeface="MV Boli"/>
+        <a:font script="Deva" typeface="Mangal"/>
+        <a:font script="Telu" typeface="Gautami"/>
+        <a:font script="Taml" typeface="Latha"/>
+        <a:font script="Syrc" typeface="Estrangelo Edessa"/>
+        <a:font script="Orya" typeface="Kalinga"/>
+        <a:font script="Mlym" typeface="Kartika"/>
+        <a:font script="Laoo" typeface="DokChampa"/>
+        <a:font script="Sinh" typeface="Iskoola Pota"/>
+        <a:font script="Mong" typeface="Mongolian Baiti"/>
+        <a:font script="Viet" typeface="Times New Roman"/>
+        <a:font script="Uigh" typeface="Microsoft Uighur"/>
+        <a:font script="Geor" typeface="Sylfaen"/>
+        <a:font script="Armn" typeface="Arial"/>
+        <a:font script="Bugi" typeface="Leelawadee UI"/>
+        <a:font script="Bopo" typeface="Microsoft JhengHei"/>
+        <a:font script="Java" typeface="Javanese Text"/>
+        <a:font script="Lisu" typeface="Segoe UI"/>
+        <a:font script="Mymr" typeface="Myanmar Text"/>
+        <a:font script="Nkoo" typeface="Ebrima"/>
+        <a:font script="Olck" typeface="Nirmala UI"/>
+        <a:font script="Osma" typeface="Ebrima"/>
+        <a:font script="Phag" typeface="Phagspa"/>
+        <a:font script="Syrn" typeface="Estrangelo Edessa"/>
+        <a:font script="Syrj" typeface="Estrangelo Edessa"/>
+        <a:font script="Syre" typeface="Estrangelo Edessa"/>
+        <a:font script="Sora" typeface="Nirmala UI"/>
+        <a:font script="Tale" typeface="Microsoft Tai Le"/>
+        <a:font script="Talu" typeface="Microsoft New Tai Lue"/>
+        <a:font script="Tfng" typeface="Ebrima"/>
+      </a:majorFont>
+      <a:minorFont>
+        <a:latin typeface="Calibri" panose="020F0502020204030204"/>
+        <a:ea typeface=""/>
+        <a:cs typeface=""/>
+        <a:font script="Jpan" typeface="游ゴシック"/>
+        <a:font script="Hang" typeface="맑은 고딕"/>
+        <a:font script="Hans" typeface="等线"/>
+        <a:font script="Hant" typeface="新細明體"/>
+        <a:font script="Arab" typeface="Arial"/>
+        <a:font script="Hebr" typeface="Arial"/>
+        <a:font script="Thai" typeface="Cordia New"/>
+        <a:font script="Ethi" typeface="Nyala"/>
+        <a:font script="Beng" typeface="Vrinda"/>
+        <a:font script="Gujr" typeface="Shruti"/>
+        <a:font script="Khmr" typeface="DaunPenh"/>
+        <a:font script="Knda" typeface="Tunga"/>
+        <a:font script="Guru" typeface="Raavi"/>
+        <a:font script="Cans" typeface="Euphemia"/>
+        <a:font script="Cher" typeface="Plantagenet Cherokee"/>
+        <a:font script="Yiii" typeface="Microsoft Yi Baiti"/>
+        <a:font script="Tibt" typeface="Microsoft Himalaya"/>
+        <a:font script="Thaa" typeface="MV Boli"/>
+        <a:font script="Deva" typeface="Mangal"/>
+        <a:font script="Telu" typeface="Gautami"/>
+        <a:font script="Taml" typeface="Latha"/>
+        <a:font script="Syrc" typeface="Estrangelo Edessa"/>
+        <a:font script="Orya" typeface="Kalinga"/>
+        <a:font script="Mlym" typeface="Kartika"/>
+        <a:font script="Laoo" typeface="DokChampa"/>
+        <a:font script="Sinh" typeface="Iskoola Pota"/>
+        <a:font script="Mong" typeface="Mongolian Baiti"/>
+        <a:font script="Viet" typeface="Arial"/>
+        <a:font script="Uigh" typeface="Microsoft Uighur"/>
+        <a:font script="Geor" typeface="Sylfaen"/>
+        <a:font script="Armn" typeface="Arial"/>
+        <a:font script="Bugi" typeface="Leelawadee UI"/>
+        <a:font script="Bopo" typeface="Microsoft JhengHei"/>
+        <a:font script="Java" typeface="Javanese Text"/>
+        <a:font script="Lisu" typeface="Segoe UI"/>
+        <a:font script="Mymr" typeface="Myanmar Text"/>
+        <a:font script="Nkoo" typeface="Ebrima"/>
+        <a:font script="Olck" typeface="Nirmala UI"/>
+        <a:font script="Osma" typeface="Ebrima"/>
+        <a:font script="Phag" typeface="Phagspa"/>
+        <a:font script="Syrn" typeface="Estrangelo Edessa"/>
+        <a:font script="Syrj" typeface="Estrangelo Edessa"/>
+        <a:font script="Syre" typeface="Estrangelo Edessa"/>
+        <a:font script="Sora" typeface="Nirmala UI"/>
+        <a:font script="Tale" typeface="Microsoft Tai Le"/>
+        <a:font script="Talu" typeface="Microsoft New Tai Lue"/>
+        <a:font script="Tfng" typeface="Ebrima"/>
+      </a:minorFont>
+    </a:fontScheme>
+    <a:fmtScheme name="Office">
+      <a:fillStyleLst>
+        <a:solidFill>
+          <a:schemeClr val="phClr"/>
+        </a:solidFill>
+        <a:gradFill rotWithShape="1">
+          <a:gsLst>
+            <a:gs pos="0">
+              <a:schemeClr val="phClr">
+                <a:lumMod val="110000"/>
+                <a:satMod val="105000"/>
+                <a:tint val="67000"/>
+              </a:schemeClr>
+            </a:gs>
+            <a:gs pos="50000">
+              <a:schemeClr val="phClr">
+                <a:lumMod val="105000"/>
+                <a:satMod val="103000"/>
+                <a:tint val="73000"/>
+              </a:schemeClr>
+            </a:gs>
+            <a:gs pos="100000">
+              <a:schemeClr val="phClr">
+                <a:lumMod val="105000"/>
+                <a:satMod val="109000"/>
+                <a:tint val="81000"/>
+              </a:schemeClr>
+            </a:gs>
+          </a:gsLst>
+          <a:lin ang="5400000" scaled="0"/>
+        </a:gradFill>
+        <a:gradFill rotWithShape="1">
+          <a:gsLst>
+            <a:gs pos="0">
+              <a:schemeClr val="phClr">
+                <a:satMod val="103000"/>
+                <a:lumMod val="102000"/>
+                <a:tint val="94000"/>
+              </a:schemeClr>
+            </a:gs>
+            <a:gs pos="50000">
+              <a:schemeClr val="phClr">
+                <a:satMod val="110000"/>
+                <a:lumMod val="100000"/>
+                <a:shade val="100000"/>
+              </a:schemeClr>
+            </a:gs>
+            <a:gs pos="100000">
+              <a:schemeClr val="phClr">
+                <a:lumMod val="99000"/>
+                <a:satMod val="120000"/>
+                <a:shade val="78000"/>
+              </a:schemeClr>
+            </a:gs>
+          </a:gsLst>
+          <a:lin ang="5400000" scaled="0"/>
+        </a:gradFill>
+      </a:fillStyleLst>
+      <a:lnStyleLst>
+        <a:ln w="6350" cap="flat" cmpd="sng" algn="ctr">
+          <a:solidFill>
+            <a:schemeClr val="phClr"/>
+          </a:solidFill>
+          <a:prstDash val="solid"/>
+          <a:miter lim="800000"/>
+        </a:ln>
+        <a:ln w="12700" cap="flat" cmpd="sng" algn="ctr">
+          <a:solidFill>
+            <a:schemeClr val="phClr"/>
+          </a:solidFill>
+          <a:prstDash val="solid"/>
+          <a:miter lim="800000"/>
+        </a:ln>
+        <a:ln w="19050" cap="flat" cmpd="sng" algn="ctr">
+          <a:solidFill>
+            <a:schemeClr val="phClr"/>
+          </a:solidFill>
+          <a:prstDash val="solid"/>
+          <a:miter lim="800000"/>
+        </a:ln>
+      </a:lnStyleLst>
+      <a:effectStyleLst>
+        <a:effectStyle>
+          <a:effectLst/>
+        </a:effectStyle>
+        <a:effectStyle>
+          <a:effectLst/>
+        </a:effectStyle>
+        <a:effectStyle>
+          <a:effectLst>
+            <a:outerShdw blurRad="57150" dist="19050" dir="5400000" algn="ctr" rotWithShape="0">
+              <a:srgbClr val="000000">
+                <a:alpha val="63000"/>
+              </a:srgbClr>
+            </a:outerShdw>
+          </a:effectLst>
+        </a:effectStyle>
+      </a:effectStyleLst>
+      <a:bgFillStyleLst>
+        <a:solidFill>
+          <a:schemeClr val="phClr"/>
+        </a:solidFill>
+        <a:solidFill>
+          <a:schemeClr val="phClr">
+            <a:tint val="95000"/>
+            <a:satMod val="170000"/>
+          </a:schemeClr>
+        </a:solidFill>
+        <a:gradFill rotWithShape="1">
+          <a:gsLst>
+            <a:gs pos="0">
+              <a:schemeClr val="phClr">
+                <a:tint val="93000"/>
+                <a:satMod val="150000"/>
+                <a:shade val="98000"/>
+                <a:lumMod val="102000"/>
+              </a:schemeClr>
+            </a:gs>
+            <a:gs pos="50000">
+              <a:schemeClr val="phClr">
+                <a:tint val="98000"/>
+                <a:satMod val="130000"/>
+                <a:shade val="90000"/>
+                <a:lumMod val="103000"/>
+              </a:schemeClr>
+            </a:gs>
+            <a:gs pos="100000">
+              <a:schemeClr val="phClr">
+                <a:shade val="63000"/>
+                <a:satMod val="120000"/>
+              </a:schemeClr>
+            </a:gs>
+          </a:gsLst>
+          <a:lin ang="5400000" scaled="0"/>
+        </a:gradFill>
+      </a:bgFillStyleLst>
+    </a:fmtScheme>
+  </a:themeElements>
+  <a:objectDefaults/>
+  <a:extraClrSchemeLst/>
+  <a:extLst>
+    <a:ext uri="{05A4C25C-085E-4340-85A3-A5531E510DB2}">
+      <thm15:themeFamily xmlns:thm15="http://schemas.microsoft.com/office/thememl/2012/main" name="Office Theme" id="{62F939B6-93AF-4DB8-9C6B-D6C7DFDC589F}" vid="{4A3C46E8-61CC-4603-A589-7422A47A8E4A}"/>
+    </a:ext>
+  </a:extLst>
+</a:theme>
 </file>